--- a/assets/lessons/lectures/digital-signal-processing/filters-2018.pptx
+++ b/assets/lessons/lectures/digital-signal-processing/filters-2018.pptx
@@ -20,7 +20,7 @@
     <p:sldId id="267" r:id="rId11"/>
     <p:sldId id="268" r:id="rId12"/>
   </p:sldIdLst>
-  <p:sldSz cx="12192000" cy="6858000"/>
+  <p:sldSz cx="12192000" cy="7543800"/>
   <p:notesSz cx="6858000" cy="9144000"/>
   <p:defaultTextStyle>
     <a:defPPr>
@@ -123,6 +123,185 @@
     </p:ext>
   </p:extLst>
 </p:presentation>
+</file>
+
+<file path=ppt/customXml/item1.xml><?xml version="1.0" encoding="utf-8"?>
+<ct:contentTypeSchema xmlns:ct="http://schemas.microsoft.com/office/2006/metadata/contentType" xmlns:ma="http://schemas.microsoft.com/office/2006/metadata/properties/metaAttributes" ct:_="" ma:_="" ma:contentTypeName="Document" ma:contentTypeID="0x01010016C36F108F9F92488C988DDF36346911" ma:contentTypeVersion="5" ma:contentTypeDescription="Create a new document." ma:contentTypeScope="" ma:versionID="c417924321fef32731141cd966ef6f94">
+  <xsd:schema xmlns:xsd="http://www.w3.org/2001/XMLSchema" xmlns:xs="http://www.w3.org/2001/XMLSchema" xmlns:p="http://schemas.microsoft.com/office/2006/metadata/properties" xmlns:ns2="1bb24863-89de-455f-aabf-4424925aa312" targetNamespace="http://schemas.microsoft.com/office/2006/metadata/properties" ma:root="true" ma:fieldsID="a7d3b2212d350eb904df17fc79fef4f4" ns2:_="">
+    <xsd:import namespace="1bb24863-89de-455f-aabf-4424925aa312"/>
+    <xsd:element name="properties">
+      <xsd:complexType>
+        <xsd:sequence>
+          <xsd:element name="documentManagement">
+            <xsd:complexType>
+              <xsd:all>
+                <xsd:element ref="ns2:MediaServiceMetadata" minOccurs="0"/>
+                <xsd:element ref="ns2:MediaServiceFastMetadata" minOccurs="0"/>
+                <xsd:element ref="ns2:MediaServiceAutoTags" minOccurs="0"/>
+                <xsd:element ref="ns2:MediaServiceOCR" minOccurs="0"/>
+                <xsd:element ref="ns2:MediaServiceDateTaken" minOccurs="0"/>
+              </xsd:all>
+            </xsd:complexType>
+          </xsd:element>
+        </xsd:sequence>
+      </xsd:complexType>
+    </xsd:element>
+  </xsd:schema>
+  <xsd:schema xmlns:xsd="http://www.w3.org/2001/XMLSchema" xmlns:xs="http://www.w3.org/2001/XMLSchema" xmlns:dms="http://schemas.microsoft.com/office/2006/documentManagement/types" xmlns:pc="http://schemas.microsoft.com/office/infopath/2007/PartnerControls" targetNamespace="1bb24863-89de-455f-aabf-4424925aa312" elementFormDefault="qualified">
+    <xsd:import namespace="http://schemas.microsoft.com/office/2006/documentManagement/types"/>
+    <xsd:import namespace="http://schemas.microsoft.com/office/infopath/2007/PartnerControls"/>
+    <xsd:element name="MediaServiceMetadata" ma:index="8" nillable="true" ma:displayName="MediaServiceMetadata" ma:hidden="true" ma:internalName="MediaServiceMetadata" ma:readOnly="true">
+      <xsd:simpleType>
+        <xsd:restriction base="dms:Note"/>
+      </xsd:simpleType>
+    </xsd:element>
+    <xsd:element name="MediaServiceFastMetadata" ma:index="9" nillable="true" ma:displayName="MediaServiceFastMetadata" ma:hidden="true" ma:internalName="MediaServiceFastMetadata" ma:readOnly="true">
+      <xsd:simpleType>
+        <xsd:restriction base="dms:Note"/>
+      </xsd:simpleType>
+    </xsd:element>
+    <xsd:element name="MediaServiceAutoTags" ma:index="10" nillable="true" ma:displayName="MediaServiceAutoTags" ma:internalName="MediaServiceAutoTags" ma:readOnly="true">
+      <xsd:simpleType>
+        <xsd:restriction base="dms:Text"/>
+      </xsd:simpleType>
+    </xsd:element>
+    <xsd:element name="MediaServiceOCR" ma:index="11" nillable="true" ma:displayName="MediaServiceOCR" ma:internalName="MediaServiceOCR" ma:readOnly="true">
+      <xsd:simpleType>
+        <xsd:restriction base="dms:Note">
+          <xsd:maxLength value="255"/>
+        </xsd:restriction>
+      </xsd:simpleType>
+    </xsd:element>
+    <xsd:element name="MediaServiceDateTaken" ma:index="12" nillable="true" ma:displayName="MediaServiceDateTaken" ma:hidden="true" ma:internalName="MediaServiceDateTaken" ma:readOnly="true">
+      <xsd:simpleType>
+        <xsd:restriction base="dms:Text"/>
+      </xsd:simpleType>
+    </xsd:element>
+  </xsd:schema>
+  <xsd:schema xmlns="http://schemas.openxmlformats.org/package/2006/metadata/core-properties" xmlns:xsd="http://www.w3.org/2001/XMLSchema" xmlns:xsi="http://www.w3.org/2001/XMLSchema-instance" xmlns:dc="http://purl.org/dc/elements/1.1/" xmlns:dcterms="http://purl.org/dc/terms/" xmlns:odoc="http://schemas.microsoft.com/internal/obd" targetNamespace="http://schemas.openxmlformats.org/package/2006/metadata/core-properties" elementFormDefault="qualified" attributeFormDefault="unqualified" blockDefault="#all">
+    <xsd:import namespace="http://purl.org/dc/elements/1.1/" schemaLocation="http://dublincore.org/schemas/xmls/qdc/2003/04/02/dc.xsd"/>
+    <xsd:import namespace="http://purl.org/dc/terms/" schemaLocation="http://dublincore.org/schemas/xmls/qdc/2003/04/02/dcterms.xsd"/>
+    <xsd:element name="coreProperties" type="CT_coreProperties"/>
+    <xsd:complexType name="CT_coreProperties">
+      <xsd:all>
+        <xsd:element ref="dc:creator" minOccurs="0" maxOccurs="1"/>
+        <xsd:element ref="dcterms:created" minOccurs="0" maxOccurs="1"/>
+        <xsd:element ref="dc:identifier" minOccurs="0" maxOccurs="1"/>
+        <xsd:element name="contentType" minOccurs="0" maxOccurs="1" type="xsd:string" ma:index="0" ma:displayName="Content Type"/>
+        <xsd:element ref="dc:title" minOccurs="0" maxOccurs="1" ma:index="4" ma:displayName="Title"/>
+        <xsd:element ref="dc:subject" minOccurs="0" maxOccurs="1"/>
+        <xsd:element ref="dc:description" minOccurs="0" maxOccurs="1"/>
+        <xsd:element name="keywords" minOccurs="0" maxOccurs="1" type="xsd:string"/>
+        <xsd:element ref="dc:language" minOccurs="0" maxOccurs="1"/>
+        <xsd:element name="category" minOccurs="0" maxOccurs="1" type="xsd:string"/>
+        <xsd:element name="version" minOccurs="0" maxOccurs="1" type="xsd:string"/>
+        <xsd:element name="revision" minOccurs="0" maxOccurs="1" type="xsd:string">
+          <xsd:annotation>
+            <xsd:documentation>
+                        This value indicates the number of saves or revisions. The application is responsible for updating this value after each revision.
+                    </xsd:documentation>
+          </xsd:annotation>
+        </xsd:element>
+        <xsd:element name="lastModifiedBy" minOccurs="0" maxOccurs="1" type="xsd:string"/>
+        <xsd:element ref="dcterms:modified" minOccurs="0" maxOccurs="1"/>
+        <xsd:element name="contentStatus" minOccurs="0" maxOccurs="1" type="xsd:string"/>
+      </xsd:all>
+    </xsd:complexType>
+  </xsd:schema>
+  <xs:schema xmlns:pc="http://schemas.microsoft.com/office/infopath/2007/PartnerControls" xmlns:xs="http://www.w3.org/2001/XMLSchema" targetNamespace="http://schemas.microsoft.com/office/infopath/2007/PartnerControls" elementFormDefault="qualified" attributeFormDefault="unqualified">
+    <xs:element name="Person">
+      <xs:complexType>
+        <xs:sequence>
+          <xs:element ref="pc:DisplayName" minOccurs="0"/>
+          <xs:element ref="pc:AccountId" minOccurs="0"/>
+          <xs:element ref="pc:AccountType" minOccurs="0"/>
+        </xs:sequence>
+      </xs:complexType>
+    </xs:element>
+    <xs:element name="DisplayName" type="xs:string"/>
+    <xs:element name="AccountId" type="xs:string"/>
+    <xs:element name="AccountType" type="xs:string"/>
+    <xs:element name="BDCAssociatedEntity">
+      <xs:complexType>
+        <xs:sequence>
+          <xs:element ref="pc:BDCEntity" minOccurs="0" maxOccurs="unbounded"/>
+        </xs:sequence>
+        <xs:attribute ref="pc:EntityNamespace"/>
+        <xs:attribute ref="pc:EntityName"/>
+        <xs:attribute ref="pc:SystemInstanceName"/>
+        <xs:attribute ref="pc:AssociationName"/>
+      </xs:complexType>
+    </xs:element>
+    <xs:attribute name="EntityNamespace" type="xs:string"/>
+    <xs:attribute name="EntityName" type="xs:string"/>
+    <xs:attribute name="SystemInstanceName" type="xs:string"/>
+    <xs:attribute name="AssociationName" type="xs:string"/>
+    <xs:element name="BDCEntity">
+      <xs:complexType>
+        <xs:sequence>
+          <xs:element ref="pc:EntityDisplayName" minOccurs="0"/>
+          <xs:element ref="pc:EntityInstanceReference" minOccurs="0"/>
+          <xs:element ref="pc:EntityId1" minOccurs="0"/>
+          <xs:element ref="pc:EntityId2" minOccurs="0"/>
+          <xs:element ref="pc:EntityId3" minOccurs="0"/>
+          <xs:element ref="pc:EntityId4" minOccurs="0"/>
+          <xs:element ref="pc:EntityId5" minOccurs="0"/>
+        </xs:sequence>
+      </xs:complexType>
+    </xs:element>
+    <xs:element name="EntityDisplayName" type="xs:string"/>
+    <xs:element name="EntityInstanceReference" type="xs:string"/>
+    <xs:element name="EntityId1" type="xs:string"/>
+    <xs:element name="EntityId2" type="xs:string"/>
+    <xs:element name="EntityId3" type="xs:string"/>
+    <xs:element name="EntityId4" type="xs:string"/>
+    <xs:element name="EntityId5" type="xs:string"/>
+    <xs:element name="Terms">
+      <xs:complexType>
+        <xs:sequence>
+          <xs:element ref="pc:TermInfo" minOccurs="0" maxOccurs="unbounded"/>
+        </xs:sequence>
+      </xs:complexType>
+    </xs:element>
+    <xs:element name="TermInfo">
+      <xs:complexType>
+        <xs:sequence>
+          <xs:element ref="pc:TermName" minOccurs="0"/>
+          <xs:element ref="pc:TermId" minOccurs="0"/>
+        </xs:sequence>
+      </xs:complexType>
+    </xs:element>
+    <xs:element name="TermName" type="xs:string"/>
+    <xs:element name="TermId" type="xs:string"/>
+  </xs:schema>
+</ct:contentTypeSchema>
+</file>
+
+<file path=ppt/customXml/item2.xml><?xml version="1.0" encoding="utf-8"?>
+<?mso-contentType ?>
+<FormTemplates xmlns="http://schemas.microsoft.com/sharepoint/v3/contenttype/forms">
+  <Display>DocumentLibraryForm</Display>
+  <Edit>DocumentLibraryForm</Edit>
+  <New>DocumentLibraryForm</New>
+</FormTemplates>
+</file>
+
+<file path=ppt/customXml/item3.xml><?xml version="1.0" encoding="utf-8"?>
+<p:properties xmlns:p="http://schemas.microsoft.com/office/2006/metadata/properties" xmlns:xsi="http://www.w3.org/2001/XMLSchema-instance" xmlns:pc="http://schemas.microsoft.com/office/infopath/2007/PartnerControls">
+  <documentManagement/>
+</p:properties>
+</file>
+
+<file path=ppt/customXml/itemProps1.xml><?xml version="1.0" encoding="utf-8"?>
+<ds:datastoreItem xmlns:ds="http://schemas.openxmlformats.org/officeDocument/2006/customXml" ds:itemID="{CD00ECD5-069A-4A47-8009-7628C4DE17E6}"/>
+</file>
+
+<file path=ppt/customXml/itemProps2.xml><?xml version="1.0" encoding="utf-8"?>
+<ds:datastoreItem xmlns:ds="http://schemas.openxmlformats.org/officeDocument/2006/customXml" ds:itemID="{79C6B61D-7E3F-42E0-B39A-294C5CD6CDBD}"/>
+</file>
+
+<file path=ppt/customXml/itemProps3.xml><?xml version="1.0" encoding="utf-8"?>
+<ds:datastoreItem xmlns:ds="http://schemas.openxmlformats.org/officeDocument/2006/customXml" ds:itemID="{382EB52C-8715-4C9E-A982-6F5202BE7E6E}"/>
 </file>
 
 <file path=ppt/notesMasters/notesMaster1.xml><?xml version="1.0" encoding="utf-8"?>
@@ -509,7 +688,7 @@
         </p:nvSpPr>
         <p:spPr>
           <a:xfrm>
-            <a:off x="1524000" y="1122363"/>
+            <a:off x="1524000" y="1465263"/>
             <a:ext cx="9144000" cy="2387600"/>
           </a:xfrm>
         </p:spPr>
@@ -517,7 +696,7 @@
           <a:bodyPr anchor="b"/>
           <a:lstStyle>
             <a:lvl1pPr algn="ctr">
-              <a:defRPr sz="6000"/>
+              <a:defRPr sz="4800"/>
             </a:lvl1pPr>
           </a:lstStyle>
           <a:p>
@@ -546,7 +725,7 @@
         </p:nvSpPr>
         <p:spPr>
           <a:xfrm>
-            <a:off x="1524000" y="3602038"/>
+            <a:off x="1524000" y="3944938"/>
             <a:ext cx="9144000" cy="1655762"/>
           </a:xfrm>
         </p:spPr>
@@ -555,39 +734,39 @@
           <a:lstStyle>
             <a:lvl1pPr marL="0" indent="0" algn="ctr">
               <a:buNone/>
-              <a:defRPr sz="2400"/>
+              <a:defRPr sz="1920"/>
             </a:lvl1pPr>
             <a:lvl2pPr marL="457200" indent="0" algn="ctr">
               <a:buNone/>
-              <a:defRPr sz="2000"/>
+              <a:defRPr sz="1600"/>
             </a:lvl2pPr>
             <a:lvl3pPr marL="914400" indent="0" algn="ctr">
               <a:buNone/>
-              <a:defRPr sz="1800"/>
+              <a:defRPr sz="1440"/>
             </a:lvl3pPr>
             <a:lvl4pPr marL="1371600" indent="0" algn="ctr">
               <a:buNone/>
-              <a:defRPr sz="1600"/>
+              <a:defRPr sz="1280"/>
             </a:lvl4pPr>
             <a:lvl5pPr marL="1828800" indent="0" algn="ctr">
               <a:buNone/>
-              <a:defRPr sz="1600"/>
+              <a:defRPr sz="1280"/>
             </a:lvl5pPr>
             <a:lvl6pPr marL="2286000" indent="0" algn="ctr">
               <a:buNone/>
-              <a:defRPr sz="1600"/>
+              <a:defRPr sz="1280"/>
             </a:lvl6pPr>
             <a:lvl7pPr marL="2743200" indent="0" algn="ctr">
               <a:buNone/>
-              <a:defRPr sz="1600"/>
+              <a:defRPr sz="1280"/>
             </a:lvl7pPr>
             <a:lvl8pPr marL="3200400" indent="0" algn="ctr">
               <a:buNone/>
-              <a:defRPr sz="1600"/>
+              <a:defRPr sz="1280"/>
             </a:lvl8pPr>
             <a:lvl9pPr marL="3657600" indent="0" algn="ctr">
               <a:buNone/>
-              <a:defRPr sz="1600"/>
+              <a:defRPr sz="1280"/>
             </a:lvl9pPr>
           </a:lstStyle>
           <a:p>
@@ -648,35 +827,6 @@
           <a:bodyPr/>
           <a:lstStyle/>
           <a:p>
-            <a:endParaRPr lang="en-US"/>
-          </a:p>
-        </p:txBody>
-      </p:sp>
-      <p:sp>
-        <p:nvSpPr>
-          <p:cNvPr id="6" name="Slide Number Placeholder 5">
-            <a:extLst>
-              <a:ext uri="{FF2B5EF4-FFF2-40B4-BE49-F238E27FC236}">
-                <a16:creationId xmlns:a16="http://schemas.microsoft.com/office/drawing/2014/main" id="{F525907B-992D-405A-8A66-43E86D4AB27E}"/>
-              </a:ext>
-            </a:extLst>
-          </p:cNvPr>
-          <p:cNvSpPr>
-            <a:spLocks noGrp="1"/>
-          </p:cNvSpPr>
-          <p:nvPr>
-            <p:ph type="sldNum" sz="quarter" idx="12"/>
-          </p:nvPr>
-        </p:nvSpPr>
-        <p:spPr/>
-        <p:txBody>
-          <a:bodyPr/>
-          <a:lstStyle/>
-          <a:p>
-            <a:fld id="{1CEDF748-80AB-48FE-8ADB-9504DB224582}" type="slidenum">
-              <a:rPr lang="en-US" smtClean="0"/>
-              <a:t>‹#›</a:t>
-            </a:fld>
             <a:endParaRPr lang="en-US"/>
           </a:p>
         </p:txBody>
@@ -850,35 +1000,6 @@
           </a:p>
         </p:txBody>
       </p:sp>
-      <p:sp>
-        <p:nvSpPr>
-          <p:cNvPr id="6" name="Slide Number Placeholder 5">
-            <a:extLst>
-              <a:ext uri="{FF2B5EF4-FFF2-40B4-BE49-F238E27FC236}">
-                <a16:creationId xmlns:a16="http://schemas.microsoft.com/office/drawing/2014/main" id="{9D85DA53-9B16-489A-A026-F4C0AA3FDFDE}"/>
-              </a:ext>
-            </a:extLst>
-          </p:cNvPr>
-          <p:cNvSpPr>
-            <a:spLocks noGrp="1"/>
-          </p:cNvSpPr>
-          <p:nvPr>
-            <p:ph type="sldNum" sz="quarter" idx="12"/>
-          </p:nvPr>
-        </p:nvSpPr>
-        <p:spPr/>
-        <p:txBody>
-          <a:bodyPr/>
-          <a:lstStyle/>
-          <a:p>
-            <a:fld id="{1CEDF748-80AB-48FE-8ADB-9504DB224582}" type="slidenum">
-              <a:rPr lang="en-US" smtClean="0"/>
-              <a:t>‹#›</a:t>
-            </a:fld>
-            <a:endParaRPr lang="en-US"/>
-          </a:p>
-        </p:txBody>
-      </p:sp>
     </p:spTree>
     <p:extLst>
       <p:ext uri="{BB962C8B-B14F-4D97-AF65-F5344CB8AC3E}">
@@ -927,7 +1048,7 @@
         </p:nvSpPr>
         <p:spPr>
           <a:xfrm>
-            <a:off x="8724900" y="365125"/>
+            <a:off x="8724900" y="708025"/>
             <a:ext cx="2628900" cy="5811838"/>
           </a:xfrm>
         </p:spPr>
@@ -960,7 +1081,7 @@
         </p:nvSpPr>
         <p:spPr>
           <a:xfrm>
-            <a:off x="838200" y="365125"/>
+            <a:off x="838200" y="708025"/>
             <a:ext cx="7734300" cy="5811838"/>
           </a:xfrm>
         </p:spPr>
@@ -1054,35 +1175,6 @@
           <a:bodyPr/>
           <a:lstStyle/>
           <a:p>
-            <a:endParaRPr lang="en-US"/>
-          </a:p>
-        </p:txBody>
-      </p:sp>
-      <p:sp>
-        <p:nvSpPr>
-          <p:cNvPr id="6" name="Slide Number Placeholder 5">
-            <a:extLst>
-              <a:ext uri="{FF2B5EF4-FFF2-40B4-BE49-F238E27FC236}">
-                <a16:creationId xmlns:a16="http://schemas.microsoft.com/office/drawing/2014/main" id="{6C2C3B3E-4398-4D22-9689-780E960F6E78}"/>
-              </a:ext>
-            </a:extLst>
-          </p:cNvPr>
-          <p:cNvSpPr>
-            <a:spLocks noGrp="1"/>
-          </p:cNvSpPr>
-          <p:nvPr>
-            <p:ph type="sldNum" sz="quarter" idx="12"/>
-          </p:nvPr>
-        </p:nvSpPr>
-        <p:spPr/>
-        <p:txBody>
-          <a:bodyPr/>
-          <a:lstStyle/>
-          <a:p>
-            <a:fld id="{1CEDF748-80AB-48FE-8ADB-9504DB224582}" type="slidenum">
-              <a:rPr lang="en-US" smtClean="0"/>
-              <a:t>‹#›</a:t>
-            </a:fld>
             <a:endParaRPr lang="en-US"/>
           </a:p>
         </p:txBody>
@@ -1256,35 +1348,6 @@
           </a:p>
         </p:txBody>
       </p:sp>
-      <p:sp>
-        <p:nvSpPr>
-          <p:cNvPr id="6" name="Slide Number Placeholder 5">
-            <a:extLst>
-              <a:ext uri="{FF2B5EF4-FFF2-40B4-BE49-F238E27FC236}">
-                <a16:creationId xmlns:a16="http://schemas.microsoft.com/office/drawing/2014/main" id="{0BC596B9-390B-4BC9-8ADD-EC76F7CA8D25}"/>
-              </a:ext>
-            </a:extLst>
-          </p:cNvPr>
-          <p:cNvSpPr>
-            <a:spLocks noGrp="1"/>
-          </p:cNvSpPr>
-          <p:nvPr>
-            <p:ph type="sldNum" sz="quarter" idx="12"/>
-          </p:nvPr>
-        </p:nvSpPr>
-        <p:spPr/>
-        <p:txBody>
-          <a:bodyPr/>
-          <a:lstStyle/>
-          <a:p>
-            <a:fld id="{1CEDF748-80AB-48FE-8ADB-9504DB224582}" type="slidenum">
-              <a:rPr lang="en-US" smtClean="0"/>
-              <a:t>‹#›</a:t>
-            </a:fld>
-            <a:endParaRPr lang="en-US"/>
-          </a:p>
-        </p:txBody>
-      </p:sp>
     </p:spTree>
     <p:extLst>
       <p:ext uri="{BB962C8B-B14F-4D97-AF65-F5344CB8AC3E}">
@@ -1333,7 +1396,7 @@
         </p:nvSpPr>
         <p:spPr>
           <a:xfrm>
-            <a:off x="831850" y="1709738"/>
+            <a:off x="831850" y="2052638"/>
             <a:ext cx="10515600" cy="2852737"/>
           </a:xfrm>
         </p:spPr>
@@ -1341,7 +1404,7 @@
           <a:bodyPr anchor="b"/>
           <a:lstStyle>
             <a:lvl1pPr>
-              <a:defRPr sz="6000"/>
+              <a:defRPr sz="4800"/>
             </a:lvl1pPr>
           </a:lstStyle>
           <a:p>
@@ -1370,7 +1433,7 @@
         </p:nvSpPr>
         <p:spPr>
           <a:xfrm>
-            <a:off x="831850" y="4589463"/>
+            <a:off x="831850" y="4932363"/>
             <a:ext cx="10515600" cy="1500187"/>
           </a:xfrm>
         </p:spPr>
@@ -1379,7 +1442,7 @@
           <a:lstStyle>
             <a:lvl1pPr marL="0" indent="0">
               <a:buNone/>
-              <a:defRPr sz="2400">
+              <a:defRPr sz="1920">
                 <a:solidFill>
                   <a:schemeClr val="tx1">
                     <a:tint val="75000"/>
@@ -1389,7 +1452,7 @@
             </a:lvl1pPr>
             <a:lvl2pPr marL="457200" indent="0">
               <a:buNone/>
-              <a:defRPr sz="2000">
+              <a:defRPr sz="1600">
                 <a:solidFill>
                   <a:schemeClr val="tx1">
                     <a:tint val="75000"/>
@@ -1399,7 +1462,7 @@
             </a:lvl2pPr>
             <a:lvl3pPr marL="914400" indent="0">
               <a:buNone/>
-              <a:defRPr sz="1800">
+              <a:defRPr sz="1440">
                 <a:solidFill>
                   <a:schemeClr val="tx1">
                     <a:tint val="75000"/>
@@ -1409,7 +1472,7 @@
             </a:lvl3pPr>
             <a:lvl4pPr marL="1371600" indent="0">
               <a:buNone/>
-              <a:defRPr sz="1600">
+              <a:defRPr sz="1280">
                 <a:solidFill>
                   <a:schemeClr val="tx1">
                     <a:tint val="75000"/>
@@ -1419,7 +1482,7 @@
             </a:lvl4pPr>
             <a:lvl5pPr marL="1828800" indent="0">
               <a:buNone/>
-              <a:defRPr sz="1600">
+              <a:defRPr sz="1280">
                 <a:solidFill>
                   <a:schemeClr val="tx1">
                     <a:tint val="75000"/>
@@ -1429,7 +1492,7 @@
             </a:lvl5pPr>
             <a:lvl6pPr marL="2286000" indent="0">
               <a:buNone/>
-              <a:defRPr sz="1600">
+              <a:defRPr sz="1280">
                 <a:solidFill>
                   <a:schemeClr val="tx1">
                     <a:tint val="75000"/>
@@ -1439,7 +1502,7 @@
             </a:lvl6pPr>
             <a:lvl7pPr marL="2743200" indent="0">
               <a:buNone/>
-              <a:defRPr sz="1600">
+              <a:defRPr sz="1280">
                 <a:solidFill>
                   <a:schemeClr val="tx1">
                     <a:tint val="75000"/>
@@ -1449,7 +1512,7 @@
             </a:lvl7pPr>
             <a:lvl8pPr marL="3200400" indent="0">
               <a:buNone/>
-              <a:defRPr sz="1600">
+              <a:defRPr sz="1280">
                 <a:solidFill>
                   <a:schemeClr val="tx1">
                     <a:tint val="75000"/>
@@ -1459,7 +1522,7 @@
             </a:lvl8pPr>
             <a:lvl9pPr marL="3657600" indent="0">
               <a:buNone/>
-              <a:defRPr sz="1600">
+              <a:defRPr sz="1280">
                 <a:solidFill>
                   <a:schemeClr val="tx1">
                     <a:tint val="75000"/>
@@ -1527,35 +1590,6 @@
           <a:bodyPr/>
           <a:lstStyle/>
           <a:p>
-            <a:endParaRPr lang="en-US"/>
-          </a:p>
-        </p:txBody>
-      </p:sp>
-      <p:sp>
-        <p:nvSpPr>
-          <p:cNvPr id="6" name="Slide Number Placeholder 5">
-            <a:extLst>
-              <a:ext uri="{FF2B5EF4-FFF2-40B4-BE49-F238E27FC236}">
-                <a16:creationId xmlns:a16="http://schemas.microsoft.com/office/drawing/2014/main" id="{B2C84952-EE08-465E-B29C-8AA462E0BE06}"/>
-              </a:ext>
-            </a:extLst>
-          </p:cNvPr>
-          <p:cNvSpPr>
-            <a:spLocks noGrp="1"/>
-          </p:cNvSpPr>
-          <p:nvPr>
-            <p:ph type="sldNum" sz="quarter" idx="12"/>
-          </p:nvPr>
-        </p:nvSpPr>
-        <p:spPr/>
-        <p:txBody>
-          <a:bodyPr/>
-          <a:lstStyle/>
-          <a:p>
-            <a:fld id="{1CEDF748-80AB-48FE-8ADB-9504DB224582}" type="slidenum">
-              <a:rPr lang="en-US" smtClean="0"/>
-              <a:t>‹#›</a:t>
-            </a:fld>
             <a:endParaRPr lang="en-US"/>
           </a:p>
         </p:txBody>
@@ -1636,7 +1670,7 @@
         </p:nvSpPr>
         <p:spPr>
           <a:xfrm>
-            <a:off x="838200" y="1825625"/>
+            <a:off x="838200" y="2168525"/>
             <a:ext cx="5181600" cy="4351338"/>
           </a:xfrm>
         </p:spPr>
@@ -1698,7 +1732,7 @@
         </p:nvSpPr>
         <p:spPr>
           <a:xfrm>
-            <a:off x="6172200" y="1825625"/>
+            <a:off x="6172200" y="2168525"/>
             <a:ext cx="5181600" cy="4351338"/>
           </a:xfrm>
         </p:spPr>
@@ -1792,35 +1826,6 @@
           <a:bodyPr/>
           <a:lstStyle/>
           <a:p>
-            <a:endParaRPr lang="en-US"/>
-          </a:p>
-        </p:txBody>
-      </p:sp>
-      <p:sp>
-        <p:nvSpPr>
-          <p:cNvPr id="7" name="Slide Number Placeholder 6">
-            <a:extLst>
-              <a:ext uri="{FF2B5EF4-FFF2-40B4-BE49-F238E27FC236}">
-                <a16:creationId xmlns:a16="http://schemas.microsoft.com/office/drawing/2014/main" id="{39296D50-633A-4A94-9DAD-EC8D936C3184}"/>
-              </a:ext>
-            </a:extLst>
-          </p:cNvPr>
-          <p:cNvSpPr>
-            <a:spLocks noGrp="1"/>
-          </p:cNvSpPr>
-          <p:nvPr>
-            <p:ph type="sldNum" sz="quarter" idx="12"/>
-          </p:nvPr>
-        </p:nvSpPr>
-        <p:spPr/>
-        <p:txBody>
-          <a:bodyPr/>
-          <a:lstStyle/>
-          <a:p>
-            <a:fld id="{1CEDF748-80AB-48FE-8ADB-9504DB224582}" type="slidenum">
-              <a:rPr lang="en-US" smtClean="0"/>
-              <a:t>‹#›</a:t>
-            </a:fld>
             <a:endParaRPr lang="en-US"/>
           </a:p>
         </p:txBody>
@@ -1873,7 +1878,7 @@
         </p:nvSpPr>
         <p:spPr>
           <a:xfrm>
-            <a:off x="839788" y="365125"/>
+            <a:off x="839788" y="708025"/>
             <a:ext cx="10515600" cy="1325563"/>
           </a:xfrm>
         </p:spPr>
@@ -1906,7 +1911,7 @@
         </p:nvSpPr>
         <p:spPr>
           <a:xfrm>
-            <a:off x="839788" y="1681163"/>
+            <a:off x="839788" y="2024063"/>
             <a:ext cx="5157787" cy="823912"/>
           </a:xfrm>
         </p:spPr>
@@ -1915,39 +1920,39 @@
           <a:lstStyle>
             <a:lvl1pPr marL="0" indent="0">
               <a:buNone/>
-              <a:defRPr sz="2400" b="1"/>
+              <a:defRPr sz="1920" b="1"/>
             </a:lvl1pPr>
             <a:lvl2pPr marL="457200" indent="0">
               <a:buNone/>
-              <a:defRPr sz="2000" b="1"/>
+              <a:defRPr sz="1600" b="1"/>
             </a:lvl2pPr>
             <a:lvl3pPr marL="914400" indent="0">
               <a:buNone/>
-              <a:defRPr sz="1800" b="1"/>
+              <a:defRPr sz="1440" b="1"/>
             </a:lvl3pPr>
             <a:lvl4pPr marL="1371600" indent="0">
               <a:buNone/>
-              <a:defRPr sz="1600" b="1"/>
+              <a:defRPr sz="1280" b="1"/>
             </a:lvl4pPr>
             <a:lvl5pPr marL="1828800" indent="0">
               <a:buNone/>
-              <a:defRPr sz="1600" b="1"/>
+              <a:defRPr sz="1280" b="1"/>
             </a:lvl5pPr>
             <a:lvl6pPr marL="2286000" indent="0">
               <a:buNone/>
-              <a:defRPr sz="1600" b="1"/>
+              <a:defRPr sz="1280" b="1"/>
             </a:lvl6pPr>
             <a:lvl7pPr marL="2743200" indent="0">
               <a:buNone/>
-              <a:defRPr sz="1600" b="1"/>
+              <a:defRPr sz="1280" b="1"/>
             </a:lvl7pPr>
             <a:lvl8pPr marL="3200400" indent="0">
               <a:buNone/>
-              <a:defRPr sz="1600" b="1"/>
+              <a:defRPr sz="1280" b="1"/>
             </a:lvl8pPr>
             <a:lvl9pPr marL="3657600" indent="0">
               <a:buNone/>
-              <a:defRPr sz="1600" b="1"/>
+              <a:defRPr sz="1280" b="1"/>
             </a:lvl9pPr>
           </a:lstStyle>
           <a:p>
@@ -1977,7 +1982,7 @@
         </p:nvSpPr>
         <p:spPr>
           <a:xfrm>
-            <a:off x="839788" y="2505075"/>
+            <a:off x="839788" y="2847975"/>
             <a:ext cx="5157787" cy="3684588"/>
           </a:xfrm>
         </p:spPr>
@@ -2039,7 +2044,7 @@
         </p:nvSpPr>
         <p:spPr>
           <a:xfrm>
-            <a:off x="6172200" y="1681163"/>
+            <a:off x="6172200" y="2024063"/>
             <a:ext cx="5183188" cy="823912"/>
           </a:xfrm>
         </p:spPr>
@@ -2048,39 +2053,39 @@
           <a:lstStyle>
             <a:lvl1pPr marL="0" indent="0">
               <a:buNone/>
-              <a:defRPr sz="2400" b="1"/>
+              <a:defRPr sz="1920" b="1"/>
             </a:lvl1pPr>
             <a:lvl2pPr marL="457200" indent="0">
               <a:buNone/>
-              <a:defRPr sz="2000" b="1"/>
+              <a:defRPr sz="1600" b="1"/>
             </a:lvl2pPr>
             <a:lvl3pPr marL="914400" indent="0">
               <a:buNone/>
-              <a:defRPr sz="1800" b="1"/>
+              <a:defRPr sz="1440" b="1"/>
             </a:lvl3pPr>
             <a:lvl4pPr marL="1371600" indent="0">
               <a:buNone/>
-              <a:defRPr sz="1600" b="1"/>
+              <a:defRPr sz="1280" b="1"/>
             </a:lvl4pPr>
             <a:lvl5pPr marL="1828800" indent="0">
               <a:buNone/>
-              <a:defRPr sz="1600" b="1"/>
+              <a:defRPr sz="1280" b="1"/>
             </a:lvl5pPr>
             <a:lvl6pPr marL="2286000" indent="0">
               <a:buNone/>
-              <a:defRPr sz="1600" b="1"/>
+              <a:defRPr sz="1280" b="1"/>
             </a:lvl6pPr>
             <a:lvl7pPr marL="2743200" indent="0">
               <a:buNone/>
-              <a:defRPr sz="1600" b="1"/>
+              <a:defRPr sz="1280" b="1"/>
             </a:lvl7pPr>
             <a:lvl8pPr marL="3200400" indent="0">
               <a:buNone/>
-              <a:defRPr sz="1600" b="1"/>
+              <a:defRPr sz="1280" b="1"/>
             </a:lvl8pPr>
             <a:lvl9pPr marL="3657600" indent="0">
               <a:buNone/>
-              <a:defRPr sz="1600" b="1"/>
+              <a:defRPr sz="1280" b="1"/>
             </a:lvl9pPr>
           </a:lstStyle>
           <a:p>
@@ -2110,7 +2115,7 @@
         </p:nvSpPr>
         <p:spPr>
           <a:xfrm>
-            <a:off x="6172200" y="2505075"/>
+            <a:off x="6172200" y="2847975"/>
             <a:ext cx="5183188" cy="3684588"/>
           </a:xfrm>
         </p:spPr>
@@ -2204,35 +2209,6 @@
           <a:bodyPr/>
           <a:lstStyle/>
           <a:p>
-            <a:endParaRPr lang="en-US"/>
-          </a:p>
-        </p:txBody>
-      </p:sp>
-      <p:sp>
-        <p:nvSpPr>
-          <p:cNvPr id="9" name="Slide Number Placeholder 8">
-            <a:extLst>
-              <a:ext uri="{FF2B5EF4-FFF2-40B4-BE49-F238E27FC236}">
-                <a16:creationId xmlns:a16="http://schemas.microsoft.com/office/drawing/2014/main" id="{9FCFE578-F4F5-4F00-B35E-20CF07FE9120}"/>
-              </a:ext>
-            </a:extLst>
-          </p:cNvPr>
-          <p:cNvSpPr>
-            <a:spLocks noGrp="1"/>
-          </p:cNvSpPr>
-          <p:nvPr>
-            <p:ph type="sldNum" sz="quarter" idx="12"/>
-          </p:nvPr>
-        </p:nvSpPr>
-        <p:spPr/>
-        <p:txBody>
-          <a:bodyPr/>
-          <a:lstStyle/>
-          <a:p>
-            <a:fld id="{1CEDF748-80AB-48FE-8ADB-9504DB224582}" type="slidenum">
-              <a:rPr lang="en-US" smtClean="0"/>
-              <a:t>‹#›</a:t>
-            </a:fld>
             <a:endParaRPr lang="en-US"/>
           </a:p>
         </p:txBody>
@@ -2349,35 +2325,6 @@
           </a:p>
         </p:txBody>
       </p:sp>
-      <p:sp>
-        <p:nvSpPr>
-          <p:cNvPr id="5" name="Slide Number Placeholder 4">
-            <a:extLst>
-              <a:ext uri="{FF2B5EF4-FFF2-40B4-BE49-F238E27FC236}">
-                <a16:creationId xmlns:a16="http://schemas.microsoft.com/office/drawing/2014/main" id="{BF134C83-9DA5-4D3F-8CE3-D9373CCA025C}"/>
-              </a:ext>
-            </a:extLst>
-          </p:cNvPr>
-          <p:cNvSpPr>
-            <a:spLocks noGrp="1"/>
-          </p:cNvSpPr>
-          <p:nvPr>
-            <p:ph type="sldNum" sz="quarter" idx="12"/>
-          </p:nvPr>
-        </p:nvSpPr>
-        <p:spPr/>
-        <p:txBody>
-          <a:bodyPr/>
-          <a:lstStyle/>
-          <a:p>
-            <a:fld id="{1CEDF748-80AB-48FE-8ADB-9504DB224582}" type="slidenum">
-              <a:rPr lang="en-US" smtClean="0"/>
-              <a:t>‹#›</a:t>
-            </a:fld>
-            <a:endParaRPr lang="en-US"/>
-          </a:p>
-        </p:txBody>
-      </p:sp>
     </p:spTree>
     <p:extLst>
       <p:ext uri="{BB962C8B-B14F-4D97-AF65-F5344CB8AC3E}">
@@ -2462,35 +2409,6 @@
           </a:p>
         </p:txBody>
       </p:sp>
-      <p:sp>
-        <p:nvSpPr>
-          <p:cNvPr id="4" name="Slide Number Placeholder 3">
-            <a:extLst>
-              <a:ext uri="{FF2B5EF4-FFF2-40B4-BE49-F238E27FC236}">
-                <a16:creationId xmlns:a16="http://schemas.microsoft.com/office/drawing/2014/main" id="{648F6079-2576-43D5-AE47-19C562B302CE}"/>
-              </a:ext>
-            </a:extLst>
-          </p:cNvPr>
-          <p:cNvSpPr>
-            <a:spLocks noGrp="1"/>
-          </p:cNvSpPr>
-          <p:nvPr>
-            <p:ph type="sldNum" sz="quarter" idx="12"/>
-          </p:nvPr>
-        </p:nvSpPr>
-        <p:spPr/>
-        <p:txBody>
-          <a:bodyPr/>
-          <a:lstStyle/>
-          <a:p>
-            <a:fld id="{1CEDF748-80AB-48FE-8ADB-9504DB224582}" type="slidenum">
-              <a:rPr lang="en-US" smtClean="0"/>
-              <a:t>‹#›</a:t>
-            </a:fld>
-            <a:endParaRPr lang="en-US"/>
-          </a:p>
-        </p:txBody>
-      </p:sp>
     </p:spTree>
     <p:extLst>
       <p:ext uri="{BB962C8B-B14F-4D97-AF65-F5344CB8AC3E}">
@@ -2539,7 +2457,7 @@
         </p:nvSpPr>
         <p:spPr>
           <a:xfrm>
-            <a:off x="839788" y="457200"/>
+            <a:off x="839788" y="800100"/>
             <a:ext cx="3932237" cy="1600200"/>
           </a:xfrm>
         </p:spPr>
@@ -2547,7 +2465,7 @@
           <a:bodyPr anchor="b"/>
           <a:lstStyle>
             <a:lvl1pPr>
-              <a:defRPr sz="3200"/>
+              <a:defRPr sz="2560"/>
             </a:lvl1pPr>
           </a:lstStyle>
           <a:p>
@@ -2576,7 +2494,7 @@
         </p:nvSpPr>
         <p:spPr>
           <a:xfrm>
-            <a:off x="5183188" y="987425"/>
+            <a:off x="5183188" y="1330325"/>
             <a:ext cx="6172200" cy="4873625"/>
           </a:xfrm>
         </p:spPr>
@@ -2584,31 +2502,31 @@
           <a:bodyPr/>
           <a:lstStyle>
             <a:lvl1pPr>
-              <a:defRPr sz="3200"/>
+              <a:defRPr sz="2560"/>
             </a:lvl1pPr>
             <a:lvl2pPr>
-              <a:defRPr sz="2800"/>
+              <a:defRPr sz="2240"/>
             </a:lvl2pPr>
             <a:lvl3pPr>
-              <a:defRPr sz="2400"/>
+              <a:defRPr sz="1920"/>
             </a:lvl3pPr>
             <a:lvl4pPr>
-              <a:defRPr sz="2000"/>
+              <a:defRPr sz="1600"/>
             </a:lvl4pPr>
             <a:lvl5pPr>
-              <a:defRPr sz="2000"/>
+              <a:defRPr sz="1600"/>
             </a:lvl5pPr>
             <a:lvl6pPr>
-              <a:defRPr sz="2000"/>
+              <a:defRPr sz="1600"/>
             </a:lvl6pPr>
             <a:lvl7pPr>
-              <a:defRPr sz="2000"/>
+              <a:defRPr sz="1600"/>
             </a:lvl7pPr>
             <a:lvl8pPr>
-              <a:defRPr sz="2000"/>
+              <a:defRPr sz="1600"/>
             </a:lvl8pPr>
             <a:lvl9pPr>
-              <a:defRPr sz="2000"/>
+              <a:defRPr sz="1600"/>
             </a:lvl9pPr>
           </a:lstStyle>
           <a:p>
@@ -2666,7 +2584,7 @@
         </p:nvSpPr>
         <p:spPr>
           <a:xfrm>
-            <a:off x="839788" y="2057400"/>
+            <a:off x="839788" y="2400300"/>
             <a:ext cx="3932237" cy="3811588"/>
           </a:xfrm>
         </p:spPr>
@@ -2675,39 +2593,39 @@
           <a:lstStyle>
             <a:lvl1pPr marL="0" indent="0">
               <a:buNone/>
-              <a:defRPr sz="1600"/>
+              <a:defRPr sz="1280"/>
             </a:lvl1pPr>
             <a:lvl2pPr marL="457200" indent="0">
               <a:buNone/>
-              <a:defRPr sz="1400"/>
+              <a:defRPr sz="1120"/>
             </a:lvl2pPr>
             <a:lvl3pPr marL="914400" indent="0">
               <a:buNone/>
-              <a:defRPr sz="1200"/>
+              <a:defRPr sz="960"/>
             </a:lvl3pPr>
             <a:lvl4pPr marL="1371600" indent="0">
               <a:buNone/>
-              <a:defRPr sz="1000"/>
+              <a:defRPr sz="800"/>
             </a:lvl4pPr>
             <a:lvl5pPr marL="1828800" indent="0">
               <a:buNone/>
-              <a:defRPr sz="1000"/>
+              <a:defRPr sz="800"/>
             </a:lvl5pPr>
             <a:lvl6pPr marL="2286000" indent="0">
               <a:buNone/>
-              <a:defRPr sz="1000"/>
+              <a:defRPr sz="800"/>
             </a:lvl6pPr>
             <a:lvl7pPr marL="2743200" indent="0">
               <a:buNone/>
-              <a:defRPr sz="1000"/>
+              <a:defRPr sz="800"/>
             </a:lvl7pPr>
             <a:lvl8pPr marL="3200400" indent="0">
               <a:buNone/>
-              <a:defRPr sz="1000"/>
+              <a:defRPr sz="800"/>
             </a:lvl8pPr>
             <a:lvl9pPr marL="3657600" indent="0">
               <a:buNone/>
-              <a:defRPr sz="1000"/>
+              <a:defRPr sz="800"/>
             </a:lvl9pPr>
           </a:lstStyle>
           <a:p>
@@ -2769,35 +2687,6 @@
           <a:bodyPr/>
           <a:lstStyle/>
           <a:p>
-            <a:endParaRPr lang="en-US"/>
-          </a:p>
-        </p:txBody>
-      </p:sp>
-      <p:sp>
-        <p:nvSpPr>
-          <p:cNvPr id="7" name="Slide Number Placeholder 6">
-            <a:extLst>
-              <a:ext uri="{FF2B5EF4-FFF2-40B4-BE49-F238E27FC236}">
-                <a16:creationId xmlns:a16="http://schemas.microsoft.com/office/drawing/2014/main" id="{2343B268-163B-48F5-B662-F44167E7FE84}"/>
-              </a:ext>
-            </a:extLst>
-          </p:cNvPr>
-          <p:cNvSpPr>
-            <a:spLocks noGrp="1"/>
-          </p:cNvSpPr>
-          <p:nvPr>
-            <p:ph type="sldNum" sz="quarter" idx="12"/>
-          </p:nvPr>
-        </p:nvSpPr>
-        <p:spPr/>
-        <p:txBody>
-          <a:bodyPr/>
-          <a:lstStyle/>
-          <a:p>
-            <a:fld id="{1CEDF748-80AB-48FE-8ADB-9504DB224582}" type="slidenum">
-              <a:rPr lang="en-US" smtClean="0"/>
-              <a:t>‹#›</a:t>
-            </a:fld>
             <a:endParaRPr lang="en-US"/>
           </a:p>
         </p:txBody>
@@ -2850,7 +2739,7 @@
         </p:nvSpPr>
         <p:spPr>
           <a:xfrm>
-            <a:off x="839788" y="457200"/>
+            <a:off x="839788" y="800100"/>
             <a:ext cx="3932237" cy="1600200"/>
           </a:xfrm>
         </p:spPr>
@@ -2858,7 +2747,7 @@
           <a:bodyPr anchor="b"/>
           <a:lstStyle>
             <a:lvl1pPr>
-              <a:defRPr sz="3200"/>
+              <a:defRPr sz="2560"/>
             </a:lvl1pPr>
           </a:lstStyle>
           <a:p>
@@ -2887,7 +2776,7 @@
         </p:nvSpPr>
         <p:spPr>
           <a:xfrm>
-            <a:off x="5183188" y="987425"/>
+            <a:off x="5183188" y="1330325"/>
             <a:ext cx="6172200" cy="4873625"/>
           </a:xfrm>
         </p:spPr>
@@ -2896,39 +2785,39 @@
           <a:lstStyle>
             <a:lvl1pPr marL="0" indent="0">
               <a:buNone/>
-              <a:defRPr sz="3200"/>
+              <a:defRPr sz="2560"/>
             </a:lvl1pPr>
             <a:lvl2pPr marL="457200" indent="0">
               <a:buNone/>
-              <a:defRPr sz="2800"/>
+              <a:defRPr sz="2240"/>
             </a:lvl2pPr>
             <a:lvl3pPr marL="914400" indent="0">
               <a:buNone/>
-              <a:defRPr sz="2400"/>
+              <a:defRPr sz="1920"/>
             </a:lvl3pPr>
             <a:lvl4pPr marL="1371600" indent="0">
               <a:buNone/>
-              <a:defRPr sz="2000"/>
+              <a:defRPr sz="1600"/>
             </a:lvl4pPr>
             <a:lvl5pPr marL="1828800" indent="0">
               <a:buNone/>
-              <a:defRPr sz="2000"/>
+              <a:defRPr sz="1600"/>
             </a:lvl5pPr>
             <a:lvl6pPr marL="2286000" indent="0">
               <a:buNone/>
-              <a:defRPr sz="2000"/>
+              <a:defRPr sz="1600"/>
             </a:lvl6pPr>
             <a:lvl7pPr marL="2743200" indent="0">
               <a:buNone/>
-              <a:defRPr sz="2000"/>
+              <a:defRPr sz="1600"/>
             </a:lvl7pPr>
             <a:lvl8pPr marL="3200400" indent="0">
               <a:buNone/>
-              <a:defRPr sz="2000"/>
+              <a:defRPr sz="1600"/>
             </a:lvl8pPr>
             <a:lvl9pPr marL="3657600" indent="0">
               <a:buNone/>
-              <a:defRPr sz="2000"/>
+              <a:defRPr sz="1600"/>
             </a:lvl9pPr>
           </a:lstStyle>
           <a:p>
@@ -2954,7 +2843,7 @@
         </p:nvSpPr>
         <p:spPr>
           <a:xfrm>
-            <a:off x="839788" y="2057400"/>
+            <a:off x="839788" y="2400300"/>
             <a:ext cx="3932237" cy="3811588"/>
           </a:xfrm>
         </p:spPr>
@@ -2963,39 +2852,39 @@
           <a:lstStyle>
             <a:lvl1pPr marL="0" indent="0">
               <a:buNone/>
-              <a:defRPr sz="1600"/>
+              <a:defRPr sz="1280"/>
             </a:lvl1pPr>
             <a:lvl2pPr marL="457200" indent="0">
               <a:buNone/>
-              <a:defRPr sz="1400"/>
+              <a:defRPr sz="1120"/>
             </a:lvl2pPr>
             <a:lvl3pPr marL="914400" indent="0">
               <a:buNone/>
-              <a:defRPr sz="1200"/>
+              <a:defRPr sz="960"/>
             </a:lvl3pPr>
             <a:lvl4pPr marL="1371600" indent="0">
               <a:buNone/>
-              <a:defRPr sz="1000"/>
+              <a:defRPr sz="800"/>
             </a:lvl4pPr>
             <a:lvl5pPr marL="1828800" indent="0">
               <a:buNone/>
-              <a:defRPr sz="1000"/>
+              <a:defRPr sz="800"/>
             </a:lvl5pPr>
             <a:lvl6pPr marL="2286000" indent="0">
               <a:buNone/>
-              <a:defRPr sz="1000"/>
+              <a:defRPr sz="800"/>
             </a:lvl6pPr>
             <a:lvl7pPr marL="2743200" indent="0">
               <a:buNone/>
-              <a:defRPr sz="1000"/>
+              <a:defRPr sz="800"/>
             </a:lvl7pPr>
             <a:lvl8pPr marL="3200400" indent="0">
               <a:buNone/>
-              <a:defRPr sz="1000"/>
+              <a:defRPr sz="800"/>
             </a:lvl8pPr>
             <a:lvl9pPr marL="3657600" indent="0">
               <a:buNone/>
-              <a:defRPr sz="1000"/>
+              <a:defRPr sz="800"/>
             </a:lvl9pPr>
           </a:lstStyle>
           <a:p>
@@ -3057,35 +2946,6 @@
           <a:bodyPr/>
           <a:lstStyle/>
           <a:p>
-            <a:endParaRPr lang="en-US"/>
-          </a:p>
-        </p:txBody>
-      </p:sp>
-      <p:sp>
-        <p:nvSpPr>
-          <p:cNvPr id="7" name="Slide Number Placeholder 6">
-            <a:extLst>
-              <a:ext uri="{FF2B5EF4-FFF2-40B4-BE49-F238E27FC236}">
-                <a16:creationId xmlns:a16="http://schemas.microsoft.com/office/drawing/2014/main" id="{0393316C-3233-4E0C-B219-B5D7A708FEEE}"/>
-              </a:ext>
-            </a:extLst>
-          </p:cNvPr>
-          <p:cNvSpPr>
-            <a:spLocks noGrp="1"/>
-          </p:cNvSpPr>
-          <p:nvPr>
-            <p:ph type="sldNum" sz="quarter" idx="12"/>
-          </p:nvPr>
-        </p:nvSpPr>
-        <p:spPr/>
-        <p:txBody>
-          <a:bodyPr/>
-          <a:lstStyle/>
-          <a:p>
-            <a:fld id="{1CEDF748-80AB-48FE-8ADB-9504DB224582}" type="slidenum">
-              <a:rPr lang="en-US" smtClean="0"/>
-              <a:t>‹#›</a:t>
-            </a:fld>
             <a:endParaRPr lang="en-US"/>
           </a:p>
         </p:txBody>
@@ -3143,7 +3003,7 @@
         </p:nvSpPr>
         <p:spPr>
           <a:xfrm>
-            <a:off x="838200" y="365125"/>
+            <a:off x="838200" y="708025"/>
             <a:ext cx="10515600" cy="1325563"/>
           </a:xfrm>
           <a:prstGeom prst="rect">
@@ -3181,7 +3041,7 @@
         </p:nvSpPr>
         <p:spPr>
           <a:xfrm>
-            <a:off x="838200" y="1825625"/>
+            <a:off x="838200" y="2168525"/>
             <a:ext cx="10515600" cy="4351338"/>
           </a:xfrm>
           <a:prstGeom prst="rect">
@@ -3248,7 +3108,7 @@
         </p:nvSpPr>
         <p:spPr>
           <a:xfrm>
-            <a:off x="838200" y="6356350"/>
+            <a:off x="838200" y="6699250"/>
             <a:ext cx="2743200" cy="365125"/>
           </a:xfrm>
           <a:prstGeom prst="rect">
@@ -3259,7 +3119,7 @@
           <a:bodyPr vert="horz" lIns="91440" tIns="45720" rIns="91440" bIns="45720" rtlCol="0" anchor="ctr"/>
           <a:lstStyle>
             <a:lvl1pPr algn="l">
-              <a:defRPr sz="1200">
+              <a:defRPr sz="960">
                 <a:solidFill>
                   <a:schemeClr val="tx1">
                     <a:tint val="75000"/>
@@ -3295,7 +3155,7 @@
         </p:nvSpPr>
         <p:spPr>
           <a:xfrm>
-            <a:off x="4038600" y="6356350"/>
+            <a:off x="4038600" y="6699250"/>
             <a:ext cx="4114800" cy="365125"/>
           </a:xfrm>
           <a:prstGeom prst="rect">
@@ -3306,7 +3166,7 @@
           <a:bodyPr vert="horz" lIns="91440" tIns="45720" rIns="91440" bIns="45720" rtlCol="0" anchor="ctr"/>
           <a:lstStyle>
             <a:lvl1pPr algn="ctr">
-              <a:defRPr sz="1200">
+              <a:defRPr sz="960">
                 <a:solidFill>
                   <a:schemeClr val="tx1">
                     <a:tint val="75000"/>
@@ -3316,53 +3176,6 @@
             </a:lvl1pPr>
           </a:lstStyle>
           <a:p>
-            <a:endParaRPr lang="en-US"/>
-          </a:p>
-        </p:txBody>
-      </p:sp>
-      <p:sp>
-        <p:nvSpPr>
-          <p:cNvPr id="6" name="Slide Number Placeholder 5">
-            <a:extLst>
-              <a:ext uri="{FF2B5EF4-FFF2-40B4-BE49-F238E27FC236}">
-                <a16:creationId xmlns:a16="http://schemas.microsoft.com/office/drawing/2014/main" id="{03ED22A8-8C7D-41C2-A967-5A6446CC6D72}"/>
-              </a:ext>
-            </a:extLst>
-          </p:cNvPr>
-          <p:cNvSpPr>
-            <a:spLocks noGrp="1"/>
-          </p:cNvSpPr>
-          <p:nvPr>
-            <p:ph type="sldNum" sz="quarter" idx="4"/>
-          </p:nvPr>
-        </p:nvSpPr>
-        <p:spPr>
-          <a:xfrm>
-            <a:off x="8610600" y="6356350"/>
-            <a:ext cx="2743200" cy="365125"/>
-          </a:xfrm>
-          <a:prstGeom prst="rect">
-            <a:avLst/>
-          </a:prstGeom>
-        </p:spPr>
-        <p:txBody>
-          <a:bodyPr vert="horz" lIns="91440" tIns="45720" rIns="91440" bIns="45720" rtlCol="0" anchor="ctr"/>
-          <a:lstStyle>
-            <a:lvl1pPr algn="r">
-              <a:defRPr sz="1200">
-                <a:solidFill>
-                  <a:schemeClr val="tx1">
-                    <a:tint val="75000"/>
-                  </a:schemeClr>
-                </a:solidFill>
-              </a:defRPr>
-            </a:lvl1pPr>
-          </a:lstStyle>
-          <a:p>
-            <a:fld id="{1CEDF748-80AB-48FE-8ADB-9504DB224582}" type="slidenum">
-              <a:rPr lang="en-US" smtClean="0"/>
-              <a:t>‹#›</a:t>
-            </a:fld>
             <a:endParaRPr lang="en-US"/>
           </a:p>
         </p:txBody>
@@ -3399,11 +3212,11 @@
           <a:spcPct val="0"/>
         </a:spcBef>
         <a:buNone/>
-        <a:defRPr sz="4400" kern="1200">
+        <a:defRPr sz="3520" kern="1200">
           <a:solidFill>
             <a:schemeClr val="tx1"/>
           </a:solidFill>
-          <a:latin typeface="+mj-lt"/>
+          <a:latin typeface="Arial"/>
           <a:ea typeface="+mj-ea"/>
           <a:cs typeface="+mj-cs"/>
         </a:defRPr>
@@ -3419,11 +3232,11 @@
         </a:spcBef>
         <a:buFont typeface="Arial" panose="020B0604020202020204" pitchFamily="34" charset="0"/>
         <a:buChar char="•"/>
-        <a:defRPr sz="2800" kern="1200">
+        <a:defRPr sz="2240" kern="1200">
           <a:solidFill>
             <a:schemeClr val="tx1"/>
           </a:solidFill>
-          <a:latin typeface="+mn-lt"/>
+          <a:latin typeface="Arial"/>
           <a:ea typeface="+mn-ea"/>
           <a:cs typeface="+mn-cs"/>
         </a:defRPr>
@@ -3437,11 +3250,11 @@
         </a:spcBef>
         <a:buFont typeface="Arial" panose="020B0604020202020204" pitchFamily="34" charset="0"/>
         <a:buChar char="•"/>
-        <a:defRPr sz="2400" kern="1200">
+        <a:defRPr sz="1920" kern="1200">
           <a:solidFill>
             <a:schemeClr val="tx1"/>
           </a:solidFill>
-          <a:latin typeface="+mn-lt"/>
+          <a:latin typeface="Arial"/>
           <a:ea typeface="+mn-ea"/>
           <a:cs typeface="+mn-cs"/>
         </a:defRPr>
@@ -3455,11 +3268,11 @@
         </a:spcBef>
         <a:buFont typeface="Arial" panose="020B0604020202020204" pitchFamily="34" charset="0"/>
         <a:buChar char="•"/>
-        <a:defRPr sz="2000" kern="1200">
+        <a:defRPr sz="1600" kern="1200">
           <a:solidFill>
             <a:schemeClr val="tx1"/>
           </a:solidFill>
-          <a:latin typeface="+mn-lt"/>
+          <a:latin typeface="Arial"/>
           <a:ea typeface="+mn-ea"/>
           <a:cs typeface="+mn-cs"/>
         </a:defRPr>
@@ -3473,11 +3286,11 @@
         </a:spcBef>
         <a:buFont typeface="Arial" panose="020B0604020202020204" pitchFamily="34" charset="0"/>
         <a:buChar char="•"/>
-        <a:defRPr sz="1800" kern="1200">
+        <a:defRPr sz="1440" kern="1200">
           <a:solidFill>
             <a:schemeClr val="tx1"/>
           </a:solidFill>
-          <a:latin typeface="+mn-lt"/>
+          <a:latin typeface="Arial"/>
           <a:ea typeface="+mn-ea"/>
           <a:cs typeface="+mn-cs"/>
         </a:defRPr>
@@ -3491,11 +3304,11 @@
         </a:spcBef>
         <a:buFont typeface="Arial" panose="020B0604020202020204" pitchFamily="34" charset="0"/>
         <a:buChar char="•"/>
-        <a:defRPr sz="1800" kern="1200">
+        <a:defRPr sz="1440" kern="1200">
           <a:solidFill>
             <a:schemeClr val="tx1"/>
           </a:solidFill>
-          <a:latin typeface="+mn-lt"/>
+          <a:latin typeface="Arial"/>
           <a:ea typeface="+mn-ea"/>
           <a:cs typeface="+mn-cs"/>
         </a:defRPr>
@@ -3509,11 +3322,11 @@
         </a:spcBef>
         <a:buFont typeface="Arial" panose="020B0604020202020204" pitchFamily="34" charset="0"/>
         <a:buChar char="•"/>
-        <a:defRPr sz="1800" kern="1200">
+        <a:defRPr sz="1440" kern="1200">
           <a:solidFill>
             <a:schemeClr val="tx1"/>
           </a:solidFill>
-          <a:latin typeface="+mn-lt"/>
+          <a:latin typeface="Arial"/>
           <a:ea typeface="+mn-ea"/>
           <a:cs typeface="+mn-cs"/>
         </a:defRPr>
@@ -3527,11 +3340,11 @@
         </a:spcBef>
         <a:buFont typeface="Arial" panose="020B0604020202020204" pitchFamily="34" charset="0"/>
         <a:buChar char="•"/>
-        <a:defRPr sz="1800" kern="1200">
+        <a:defRPr sz="1440" kern="1200">
           <a:solidFill>
             <a:schemeClr val="tx1"/>
           </a:solidFill>
-          <a:latin typeface="+mn-lt"/>
+          <a:latin typeface="Arial"/>
           <a:ea typeface="+mn-ea"/>
           <a:cs typeface="+mn-cs"/>
         </a:defRPr>
@@ -3545,11 +3358,11 @@
         </a:spcBef>
         <a:buFont typeface="Arial" panose="020B0604020202020204" pitchFamily="34" charset="0"/>
         <a:buChar char="•"/>
-        <a:defRPr sz="1800" kern="1200">
+        <a:defRPr sz="1440" kern="1200">
           <a:solidFill>
             <a:schemeClr val="tx1"/>
           </a:solidFill>
-          <a:latin typeface="+mn-lt"/>
+          <a:latin typeface="Arial"/>
           <a:ea typeface="+mn-ea"/>
           <a:cs typeface="+mn-cs"/>
         </a:defRPr>
@@ -3563,11 +3376,11 @@
         </a:spcBef>
         <a:buFont typeface="Arial" panose="020B0604020202020204" pitchFamily="34" charset="0"/>
         <a:buChar char="•"/>
-        <a:defRPr sz="1800" kern="1200">
+        <a:defRPr sz="1440" kern="1200">
           <a:solidFill>
             <a:schemeClr val="tx1"/>
           </a:solidFill>
-          <a:latin typeface="+mn-lt"/>
+          <a:latin typeface="Arial"/>
           <a:ea typeface="+mn-ea"/>
           <a:cs typeface="+mn-cs"/>
         </a:defRPr>
@@ -3578,91 +3391,91 @@
         <a:defRPr lang="en-US"/>
       </a:defPPr>
       <a:lvl1pPr marL="0" algn="l" defTabSz="914400" rtl="0" eaLnBrk="1" latinLnBrk="0" hangingPunct="1">
-        <a:defRPr sz="1800" kern="1200">
+        <a:defRPr sz="1440" kern="1200">
           <a:solidFill>
             <a:schemeClr val="tx1"/>
           </a:solidFill>
-          <a:latin typeface="+mn-lt"/>
+          <a:latin typeface="Arial"/>
           <a:ea typeface="+mn-ea"/>
           <a:cs typeface="+mn-cs"/>
         </a:defRPr>
       </a:lvl1pPr>
       <a:lvl2pPr marL="457200" algn="l" defTabSz="914400" rtl="0" eaLnBrk="1" latinLnBrk="0" hangingPunct="1">
-        <a:defRPr sz="1800" kern="1200">
+        <a:defRPr sz="1440" kern="1200">
           <a:solidFill>
             <a:schemeClr val="tx1"/>
           </a:solidFill>
-          <a:latin typeface="+mn-lt"/>
+          <a:latin typeface="Arial"/>
           <a:ea typeface="+mn-ea"/>
           <a:cs typeface="+mn-cs"/>
         </a:defRPr>
       </a:lvl2pPr>
       <a:lvl3pPr marL="914400" algn="l" defTabSz="914400" rtl="0" eaLnBrk="1" latinLnBrk="0" hangingPunct="1">
-        <a:defRPr sz="1800" kern="1200">
+        <a:defRPr sz="1440" kern="1200">
           <a:solidFill>
             <a:schemeClr val="tx1"/>
           </a:solidFill>
-          <a:latin typeface="+mn-lt"/>
+          <a:latin typeface="Arial"/>
           <a:ea typeface="+mn-ea"/>
           <a:cs typeface="+mn-cs"/>
         </a:defRPr>
       </a:lvl3pPr>
       <a:lvl4pPr marL="1371600" algn="l" defTabSz="914400" rtl="0" eaLnBrk="1" latinLnBrk="0" hangingPunct="1">
-        <a:defRPr sz="1800" kern="1200">
+        <a:defRPr sz="1440" kern="1200">
           <a:solidFill>
             <a:schemeClr val="tx1"/>
           </a:solidFill>
-          <a:latin typeface="+mn-lt"/>
+          <a:latin typeface="Arial"/>
           <a:ea typeface="+mn-ea"/>
           <a:cs typeface="+mn-cs"/>
         </a:defRPr>
       </a:lvl4pPr>
       <a:lvl5pPr marL="1828800" algn="l" defTabSz="914400" rtl="0" eaLnBrk="1" latinLnBrk="0" hangingPunct="1">
-        <a:defRPr sz="1800" kern="1200">
+        <a:defRPr sz="1440" kern="1200">
           <a:solidFill>
             <a:schemeClr val="tx1"/>
           </a:solidFill>
-          <a:latin typeface="+mn-lt"/>
+          <a:latin typeface="Arial"/>
           <a:ea typeface="+mn-ea"/>
           <a:cs typeface="+mn-cs"/>
         </a:defRPr>
       </a:lvl5pPr>
       <a:lvl6pPr marL="2286000" algn="l" defTabSz="914400" rtl="0" eaLnBrk="1" latinLnBrk="0" hangingPunct="1">
-        <a:defRPr sz="1800" kern="1200">
+        <a:defRPr sz="1440" kern="1200">
           <a:solidFill>
             <a:schemeClr val="tx1"/>
           </a:solidFill>
-          <a:latin typeface="+mn-lt"/>
+          <a:latin typeface="Arial"/>
           <a:ea typeface="+mn-ea"/>
           <a:cs typeface="+mn-cs"/>
         </a:defRPr>
       </a:lvl6pPr>
       <a:lvl7pPr marL="2743200" algn="l" defTabSz="914400" rtl="0" eaLnBrk="1" latinLnBrk="0" hangingPunct="1">
-        <a:defRPr sz="1800" kern="1200">
+        <a:defRPr sz="1440" kern="1200">
           <a:solidFill>
             <a:schemeClr val="tx1"/>
           </a:solidFill>
-          <a:latin typeface="+mn-lt"/>
+          <a:latin typeface="Arial"/>
           <a:ea typeface="+mn-ea"/>
           <a:cs typeface="+mn-cs"/>
         </a:defRPr>
       </a:lvl7pPr>
       <a:lvl8pPr marL="3200400" algn="l" defTabSz="914400" rtl="0" eaLnBrk="1" latinLnBrk="0" hangingPunct="1">
-        <a:defRPr sz="1800" kern="1200">
+        <a:defRPr sz="1440" kern="1200">
           <a:solidFill>
             <a:schemeClr val="tx1"/>
           </a:solidFill>
-          <a:latin typeface="+mn-lt"/>
+          <a:latin typeface="Arial"/>
           <a:ea typeface="+mn-ea"/>
           <a:cs typeface="+mn-cs"/>
         </a:defRPr>
       </a:lvl8pPr>
       <a:lvl9pPr marL="3657600" algn="l" defTabSz="914400" rtl="0" eaLnBrk="1" latinLnBrk="0" hangingPunct="1">
-        <a:defRPr sz="1800" kern="1200">
+        <a:defRPr sz="1440" kern="1200">
           <a:solidFill>
             <a:schemeClr val="tx1"/>
           </a:solidFill>
-          <a:latin typeface="+mn-lt"/>
+          <a:latin typeface="Arial"/>
           <a:ea typeface="+mn-ea"/>
           <a:cs typeface="+mn-cs"/>
         </a:defRPr>
@@ -3772,30 +3585,202 @@
       </p:sp>
       <p:sp>
         <p:nvSpPr>
-          <p:cNvPr id="5" name="Slide Number Placeholder 4">
-            <a:extLst>
-              <a:ext uri="{FF2B5EF4-FFF2-40B4-BE49-F238E27FC236}">
-                <a16:creationId xmlns:a16="http://schemas.microsoft.com/office/drawing/2014/main" id="{93C7D666-0377-450B-B8D2-4328DFCF6D30}"/>
-              </a:ext>
-            </a:extLst>
-          </p:cNvPr>
-          <p:cNvSpPr>
-            <a:spLocks noGrp="1"/>
-          </p:cNvSpPr>
-          <p:nvPr>
-            <p:ph type="sldNum" sz="quarter" idx="12"/>
-          </p:nvPr>
-        </p:nvSpPr>
-        <p:spPr/>
-        <p:txBody>
-          <a:bodyPr/>
-          <a:lstStyle/>
-          <a:p>
-            <a:fld id="{1CEDF748-80AB-48FE-8ADB-9504DB224582}" type="slidenum">
-              <a:rPr lang="en-US" smtClean="0"/>
-              <a:t>1</a:t>
-            </a:fld>
-            <a:endParaRPr lang="en-US"/>
+          <p:cNvPr id="5" name="DSPIRA 1"/>
+          <p:cNvSpPr>
+            <a:spLocks noGrp="1"/>
+          </p:cNvSpPr>
+          <p:nvPr/>
+        </p:nvSpPr>
+        <p:spPr>
+          <a:xfrm>
+            <a:off x="0" y="0"/>
+            <a:ext cx="12192000" cy="342900"/>
+          </a:xfrm>
+          <a:prstGeom prst="rect">
+            <a:avLst/>
+          </a:prstGeom>
+          <a:solidFill>
+            <a:srgbClr val="FFFFFF"/>
+          </a:solidFill>
+          <a:ln w="0">
+            <a:noFill/>
+          </a:ln>
+        </p:spPr>
+      </p:sp>
+      <p:sp>
+        <p:nvSpPr>
+          <p:cNvPr id="6" name="DSPIRA 2"/>
+          <p:cNvSpPr>
+            <a:spLocks noGrp="1"/>
+          </p:cNvSpPr>
+          <p:nvPr/>
+        </p:nvSpPr>
+        <p:spPr>
+          <a:xfrm>
+            <a:off x="0" y="7200900"/>
+            <a:ext cx="12192000" cy="342900"/>
+          </a:xfrm>
+          <a:prstGeom prst="rect">
+            <a:avLst/>
+          </a:prstGeom>
+          <a:solidFill>
+            <a:srgbClr val="FFFFFF"/>
+          </a:solidFill>
+          <a:ln w="0">
+            <a:noFill/>
+          </a:ln>
+        </p:spPr>
+      </p:sp>
+      <p:sp>
+        <p:nvSpPr>
+          <p:cNvPr id="7" name="DSPIRA 3"/>
+          <p:cNvSpPr>
+            <a:spLocks noGrp="1"/>
+          </p:cNvSpPr>
+          <p:nvPr/>
+        </p:nvSpPr>
+        <p:spPr>
+          <a:xfrm>
+            <a:off x="228600" y="76200"/>
+            <a:ext cx="4762500" cy="228600"/>
+          </a:xfrm>
+          <a:prstGeom prst="rect">
+            <a:avLst/>
+          </a:prstGeom>
+          <a:noFill/>
+          <a:ln w="0">
+            <a:noFill/>
+          </a:ln>
+        </p:spPr>
+        <p:txBody>
+          <a:bodyPr>
+            <a:noAutofit/>
+          </a:bodyPr>
+          <a:lstStyle/>
+          <a:p>
+            <a:pPr>
+              <a:defRPr sz="1200" b="1">
+                <a:solidFill>
+                  <a:srgbClr val="002855"/>
+                </a:solidFill>
+                <a:latin typeface="Arial"/>
+                <a:ea typeface="Arial"/>
+                <a:cs typeface="Arial"/>
+              </a:defRPr>
+            </a:pPr>
+            <a:r>
+              <a:rPr sz="1200" b="1">
+                <a:solidFill>
+                  <a:srgbClr val="002855"/>
+                </a:solidFill>
+                <a:latin typeface="Arial"/>
+                <a:ea typeface="Arial"/>
+                <a:cs typeface="Arial"/>
+              </a:rPr>
+              <a:t>WVU DSPIRA</a:t>
+            </a:r>
+          </a:p>
+        </p:txBody>
+      </p:sp>
+      <p:sp>
+        <p:nvSpPr>
+          <p:cNvPr id="8" name="DSPIRA 4"/>
+          <p:cNvSpPr>
+            <a:spLocks noGrp="1"/>
+          </p:cNvSpPr>
+          <p:nvPr/>
+        </p:nvSpPr>
+        <p:spPr>
+          <a:xfrm>
+            <a:off x="228600" y="7277100"/>
+            <a:ext cx="6667500" cy="228600"/>
+          </a:xfrm>
+          <a:prstGeom prst="rect">
+            <a:avLst/>
+          </a:prstGeom>
+          <a:noFill/>
+          <a:ln w="0">
+            <a:noFill/>
+          </a:ln>
+        </p:spPr>
+        <p:txBody>
+          <a:bodyPr>
+            <a:noAutofit/>
+          </a:bodyPr>
+          <a:lstStyle/>
+          <a:p>
+            <a:pPr>
+              <a:defRPr sz="900" b="0">
+                <a:solidFill>
+                  <a:srgbClr val="002855"/>
+                </a:solidFill>
+                <a:latin typeface="Arial"/>
+                <a:ea typeface="Arial"/>
+                <a:cs typeface="Arial"/>
+              </a:defRPr>
+            </a:pPr>
+            <a:r>
+              <a:rPr sz="900" b="0">
+                <a:solidFill>
+                  <a:srgbClr val="002855"/>
+                </a:solidFill>
+                <a:latin typeface="Arial"/>
+                <a:ea typeface="Arial"/>
+                <a:cs typeface="Arial"/>
+              </a:rPr>
+              <a:t>wvurail.org/dspira</a:t>
+            </a:r>
+          </a:p>
+        </p:txBody>
+      </p:sp>
+      <p:sp>
+        <p:nvSpPr>
+          <p:cNvPr id="9" name="DSPIRA 5"/>
+          <p:cNvSpPr>
+            <a:spLocks noGrp="1"/>
+          </p:cNvSpPr>
+          <p:nvPr/>
+        </p:nvSpPr>
+        <p:spPr>
+          <a:xfrm>
+            <a:off x="11191875" y="7277100"/>
+            <a:ext cx="762000" cy="228600"/>
+          </a:xfrm>
+          <a:prstGeom prst="rect">
+            <a:avLst/>
+          </a:prstGeom>
+          <a:noFill/>
+          <a:ln w="0">
+            <a:noFill/>
+          </a:ln>
+        </p:spPr>
+        <p:txBody>
+          <a:bodyPr>
+            <a:noAutofit/>
+          </a:bodyPr>
+          <a:lstStyle/>
+          <a:p>
+            <a:pPr>
+              <a:defRPr sz="900" b="0">
+                <a:solidFill>
+                  <a:srgbClr val="002855"/>
+                </a:solidFill>
+                <a:latin typeface="Arial"/>
+                <a:ea typeface="Arial"/>
+                <a:cs typeface="Arial"/>
+              </a:defRPr>
+            </a:pPr>
+            <a:r>
+              <a:rPr sz="900" b="0">
+                <a:solidFill>
+                  <a:srgbClr val="002855"/>
+                </a:solidFill>
+                <a:latin typeface="Arial"/>
+                <a:ea typeface="Arial"/>
+                <a:cs typeface="Arial"/>
+              </a:rPr>
+              <a:t>1 of 11</a:t>
+            </a:r>
           </a:p>
         </p:txBody>
       </p:sp>
@@ -3865,7 +3850,7 @@
         </p:blipFill>
         <p:spPr>
           <a:xfrm>
-            <a:off x="5153822" y="713250"/>
+            <a:off x="5153822" y="1056150"/>
             <a:ext cx="6553545" cy="5439441"/>
           </a:xfrm>
           <a:prstGeom prst="rect">
@@ -3898,7 +3883,7 @@
         </p:nvSpPr>
         <p:spPr bwMode="ltGray">
           <a:xfrm>
-            <a:off x="336884" y="321177"/>
+            <a:off x="336884" y="664077"/>
             <a:ext cx="4332307" cy="6179552"/>
           </a:xfrm>
           <a:prstGeom prst="rect">
@@ -3967,7 +3952,7 @@
         </p:nvCxnSpPr>
         <p:spPr>
           <a:xfrm>
-            <a:off x="1191126" y="3910267"/>
+            <a:off x="1191126" y="4253167"/>
             <a:ext cx="2586790" cy="0"/>
           </a:xfrm>
           <a:prstGeom prst="line">
@@ -4012,7 +3997,7 @@
         </p:nvSpPr>
         <p:spPr>
           <a:xfrm>
-            <a:off x="674237" y="914400"/>
+            <a:off x="674237" y="1257300"/>
             <a:ext cx="3657600" cy="2887579"/>
           </a:xfrm>
         </p:spPr>
@@ -4024,11 +4009,11 @@
           <a:p>
             <a:pPr algn="ctr"/>
             <a:r>
-              <a:rPr lang="en-US" sz="4800" kern="1200">
+              <a:rPr lang="en-US" sz="3840" kern="1200">
                 <a:solidFill>
                   <a:srgbClr val="FFFFFF"/>
                 </a:solidFill>
-                <a:latin typeface="+mj-lt"/>
+                <a:latin typeface="Arial"/>
                 <a:ea typeface="+mj-ea"/>
                 <a:cs typeface="+mj-cs"/>
               </a:rPr>
@@ -4039,55 +4024,202 @@
       </p:sp>
       <p:sp>
         <p:nvSpPr>
-          <p:cNvPr id="3" name="Slide Number Placeholder 2">
-            <a:extLst>
-              <a:ext uri="{FF2B5EF4-FFF2-40B4-BE49-F238E27FC236}">
-                <a16:creationId xmlns:a16="http://schemas.microsoft.com/office/drawing/2014/main" id="{F9DB4CDC-2291-4E6A-B876-8D397F16ADAB}"/>
-              </a:ext>
-            </a:extLst>
-          </p:cNvPr>
-          <p:cNvSpPr>
-            <a:spLocks noGrp="1"/>
-          </p:cNvSpPr>
-          <p:nvPr>
-            <p:ph type="sldNum" sz="quarter" idx="12"/>
-          </p:nvPr>
-        </p:nvSpPr>
-        <p:spPr>
-          <a:xfrm>
-            <a:off x="9991022" y="6356350"/>
-            <a:ext cx="1362777" cy="365125"/>
-          </a:xfrm>
-        </p:spPr>
-        <p:txBody>
-          <a:bodyPr vert="horz" lIns="91440" tIns="45720" rIns="91440" bIns="45720" rtlCol="0" anchor="ctr">
-            <a:normAutofit/>
+          <p:cNvPr id="13" name="DSPIRA 1"/>
+          <p:cNvSpPr>
+            <a:spLocks noGrp="1"/>
+          </p:cNvSpPr>
+          <p:nvPr/>
+        </p:nvSpPr>
+        <p:spPr>
+          <a:xfrm>
+            <a:off x="0" y="0"/>
+            <a:ext cx="12192000" cy="342900"/>
+          </a:xfrm>
+          <a:prstGeom prst="rect">
+            <a:avLst/>
+          </a:prstGeom>
+          <a:solidFill>
+            <a:srgbClr val="FFFFFF"/>
+          </a:solidFill>
+          <a:ln w="0">
+            <a:noFill/>
+          </a:ln>
+        </p:spPr>
+      </p:sp>
+      <p:sp>
+        <p:nvSpPr>
+          <p:cNvPr id="14" name="DSPIRA 2"/>
+          <p:cNvSpPr>
+            <a:spLocks noGrp="1"/>
+          </p:cNvSpPr>
+          <p:nvPr/>
+        </p:nvSpPr>
+        <p:spPr>
+          <a:xfrm>
+            <a:off x="0" y="7200900"/>
+            <a:ext cx="12192000" cy="342900"/>
+          </a:xfrm>
+          <a:prstGeom prst="rect">
+            <a:avLst/>
+          </a:prstGeom>
+          <a:solidFill>
+            <a:srgbClr val="FFFFFF"/>
+          </a:solidFill>
+          <a:ln w="0">
+            <a:noFill/>
+          </a:ln>
+        </p:spPr>
+      </p:sp>
+      <p:sp>
+        <p:nvSpPr>
+          <p:cNvPr id="15" name="DSPIRA 3"/>
+          <p:cNvSpPr>
+            <a:spLocks noGrp="1"/>
+          </p:cNvSpPr>
+          <p:nvPr/>
+        </p:nvSpPr>
+        <p:spPr>
+          <a:xfrm>
+            <a:off x="228600" y="76200"/>
+            <a:ext cx="4762500" cy="228600"/>
+          </a:xfrm>
+          <a:prstGeom prst="rect">
+            <a:avLst/>
+          </a:prstGeom>
+          <a:noFill/>
+          <a:ln w="0">
+            <a:noFill/>
+          </a:ln>
+        </p:spPr>
+        <p:txBody>
+          <a:bodyPr>
+            <a:noAutofit/>
           </a:bodyPr>
           <a:lstStyle/>
           <a:p>
             <a:pPr>
-              <a:spcAft>
-                <a:spcPts val="600"/>
-              </a:spcAft>
+              <a:defRPr sz="1200" b="1">
+                <a:solidFill>
+                  <a:srgbClr val="002855"/>
+                </a:solidFill>
+                <a:latin typeface="Arial"/>
+                <a:ea typeface="Arial"/>
+                <a:cs typeface="Arial"/>
+              </a:defRPr>
             </a:pPr>
-            <a:fld id="{1CEDF748-80AB-48FE-8ADB-9504DB224582}" type="slidenum">
-              <a:rPr lang="en-US">
+            <a:r>
+              <a:rPr sz="1200" b="1">
                 <a:solidFill>
-                  <a:srgbClr val="595959"/>
+                  <a:srgbClr val="002855"/>
                 </a:solidFill>
+                <a:latin typeface="Arial"/>
+                <a:ea typeface="Arial"/>
+                <a:cs typeface="Arial"/>
               </a:rPr>
-              <a:pPr>
-                <a:spcAft>
-                  <a:spcPts val="600"/>
-                </a:spcAft>
-              </a:pPr>
-              <a:t>10</a:t>
-            </a:fld>
-            <a:endParaRPr lang="en-US">
-              <a:solidFill>
-                <a:srgbClr val="595959"/>
-              </a:solidFill>
-            </a:endParaRPr>
+              <a:t>WVU DSPIRA</a:t>
+            </a:r>
+          </a:p>
+        </p:txBody>
+      </p:sp>
+      <p:sp>
+        <p:nvSpPr>
+          <p:cNvPr id="16" name="DSPIRA 4"/>
+          <p:cNvSpPr>
+            <a:spLocks noGrp="1"/>
+          </p:cNvSpPr>
+          <p:nvPr/>
+        </p:nvSpPr>
+        <p:spPr>
+          <a:xfrm>
+            <a:off x="228600" y="7277100"/>
+            <a:ext cx="6667500" cy="228600"/>
+          </a:xfrm>
+          <a:prstGeom prst="rect">
+            <a:avLst/>
+          </a:prstGeom>
+          <a:noFill/>
+          <a:ln w="0">
+            <a:noFill/>
+          </a:ln>
+        </p:spPr>
+        <p:txBody>
+          <a:bodyPr>
+            <a:noAutofit/>
+          </a:bodyPr>
+          <a:lstStyle/>
+          <a:p>
+            <a:pPr>
+              <a:defRPr sz="900" b="0">
+                <a:solidFill>
+                  <a:srgbClr val="002855"/>
+                </a:solidFill>
+                <a:latin typeface="Arial"/>
+                <a:ea typeface="Arial"/>
+                <a:cs typeface="Arial"/>
+              </a:defRPr>
+            </a:pPr>
+            <a:r>
+              <a:rPr sz="900" b="0">
+                <a:solidFill>
+                  <a:srgbClr val="002855"/>
+                </a:solidFill>
+                <a:latin typeface="Arial"/>
+                <a:ea typeface="Arial"/>
+                <a:cs typeface="Arial"/>
+              </a:rPr>
+              <a:t>wvurail.org/dspira</a:t>
+            </a:r>
+          </a:p>
+        </p:txBody>
+      </p:sp>
+      <p:sp>
+        <p:nvSpPr>
+          <p:cNvPr id="17" name="DSPIRA 5"/>
+          <p:cNvSpPr>
+            <a:spLocks noGrp="1"/>
+          </p:cNvSpPr>
+          <p:nvPr/>
+        </p:nvSpPr>
+        <p:spPr>
+          <a:xfrm>
+            <a:off x="11191875" y="7277100"/>
+            <a:ext cx="762000" cy="228600"/>
+          </a:xfrm>
+          <a:prstGeom prst="rect">
+            <a:avLst/>
+          </a:prstGeom>
+          <a:noFill/>
+          <a:ln w="0">
+            <a:noFill/>
+          </a:ln>
+        </p:spPr>
+        <p:txBody>
+          <a:bodyPr>
+            <a:noAutofit/>
+          </a:bodyPr>
+          <a:lstStyle/>
+          <a:p>
+            <a:pPr>
+              <a:defRPr sz="900" b="0">
+                <a:solidFill>
+                  <a:srgbClr val="002855"/>
+                </a:solidFill>
+                <a:latin typeface="Arial"/>
+                <a:ea typeface="Arial"/>
+                <a:cs typeface="Arial"/>
+              </a:defRPr>
+            </a:pPr>
+            <a:r>
+              <a:rPr sz="900" b="0">
+                <a:solidFill>
+                  <a:srgbClr val="002855"/>
+                </a:solidFill>
+                <a:latin typeface="Arial"/>
+                <a:ea typeface="Arial"/>
+                <a:cs typeface="Arial"/>
+              </a:rPr>
+              <a:t>10 of 11</a:t>
+            </a:r>
           </a:p>
         </p:txBody>
       </p:sp>
@@ -4154,7 +4286,7 @@
         </p:nvSpPr>
         <p:spPr>
           <a:xfrm>
-            <a:off x="4639056" y="0"/>
+            <a:off x="4639056" y="342900"/>
             <a:ext cx="7552944" cy="6858000"/>
           </a:xfrm>
           <a:prstGeom prst="rect">
@@ -4217,7 +4349,7 @@
         </p:nvSpPr>
         <p:spPr>
           <a:xfrm>
-            <a:off x="5118267" y="559407"/>
+            <a:off x="5118267" y="902307"/>
             <a:ext cx="6594522" cy="5739187"/>
           </a:xfrm>
           <a:prstGeom prst="roundRect">
@@ -4293,7 +4425,7 @@
         </p:blipFill>
         <p:spPr>
           <a:xfrm>
-            <a:off x="5118267" y="579396"/>
+            <a:off x="5118267" y="922296"/>
             <a:ext cx="6640781" cy="5739186"/>
           </a:xfrm>
           <a:prstGeom prst="rect">
@@ -4320,7 +4452,7 @@
         </p:nvSpPr>
         <p:spPr>
           <a:xfrm>
-            <a:off x="648929" y="629266"/>
+            <a:off x="648929" y="972166"/>
             <a:ext cx="3667039" cy="1676603"/>
           </a:xfrm>
         </p:spPr>
@@ -4331,7 +4463,7 @@
           <a:lstStyle/>
           <a:p>
             <a:r>
-              <a:rPr lang="en-US" sz="4000"/>
+              <a:rPr lang="en-US" sz="3200"/>
               <a:t>Filtering in 2D</a:t>
             </a:r>
           </a:p>
@@ -4355,7 +4487,7 @@
         </p:nvSpPr>
         <p:spPr>
           <a:xfrm>
-            <a:off x="648931" y="2438401"/>
+            <a:off x="648931" y="2781301"/>
             <a:ext cx="3667036" cy="3779520"/>
           </a:xfrm>
         </p:spPr>
@@ -4366,36 +4498,36 @@
           <a:lstStyle/>
           <a:p>
             <a:r>
-              <a:rPr lang="en-US" sz="2000" dirty="0"/>
+              <a:rPr lang="en-US" sz="1600" dirty="0"/>
               <a:t>Simulated pulse in filter-bank format (image)</a:t>
             </a:r>
           </a:p>
           <a:p>
             <a:r>
-              <a:rPr lang="en-US" sz="2000" dirty="0"/>
+              <a:rPr lang="en-US" sz="1600" dirty="0"/>
               <a:t>DM = 375</a:t>
             </a:r>
           </a:p>
           <a:p>
             <a:r>
-              <a:rPr lang="en-US" sz="2000" dirty="0"/>
+              <a:rPr lang="en-US" sz="1600" dirty="0"/>
               <a:t>S/N = 25</a:t>
             </a:r>
           </a:p>
           <a:p>
             <a:r>
-              <a:rPr lang="en-US" sz="2000" dirty="0"/>
+              <a:rPr lang="en-US" sz="1600" dirty="0"/>
               <a:t>Pulse width T = 50 </a:t>
             </a:r>
             <a:r>
-              <a:rPr lang="en-US" sz="2000" dirty="0" err="1"/>
+              <a:rPr lang="en-US" sz="1600" dirty="0" err="1"/>
               <a:t>ms</a:t>
             </a:r>
-            <a:endParaRPr lang="en-US" sz="2000" dirty="0"/>
-          </a:p>
-          <a:p>
-            <a:r>
-              <a:rPr lang="en-US" sz="2000" dirty="0"/>
+            <a:endParaRPr lang="en-US" sz="1600" dirty="0"/>
+          </a:p>
+          <a:p>
+            <a:r>
+              <a:rPr lang="en-US" sz="1600" dirty="0"/>
               <a:t>Apply low-pass filter in 2d FT space</a:t>
             </a:r>
           </a:p>
@@ -4403,63 +4535,202 @@
       </p:sp>
       <p:sp>
         <p:nvSpPr>
-          <p:cNvPr id="5" name="Slide Number Placeholder 4">
-            <a:extLst>
-              <a:ext uri="{FF2B5EF4-FFF2-40B4-BE49-F238E27FC236}">
-                <a16:creationId xmlns:a16="http://schemas.microsoft.com/office/drawing/2014/main" id="{7188AE2F-0822-416D-A6A6-4130E0A1AC4E}"/>
-              </a:ext>
-            </a:extLst>
-          </p:cNvPr>
-          <p:cNvSpPr>
-            <a:spLocks noGrp="1"/>
-          </p:cNvSpPr>
-          <p:nvPr>
-            <p:ph type="sldNum" sz="quarter" idx="12"/>
-          </p:nvPr>
-        </p:nvSpPr>
-        <p:spPr>
-          <a:xfrm>
-            <a:off x="292608" y="6356350"/>
-            <a:ext cx="685800" cy="365125"/>
-          </a:xfrm>
-        </p:spPr>
-        <p:txBody>
-          <a:bodyPr vert="horz" lIns="91440" tIns="45720" rIns="91440" bIns="45720" rtlCol="0" anchor="ctr">
-            <a:normAutofit/>
+          <p:cNvPr id="15" name="DSPIRA 1"/>
+          <p:cNvSpPr>
+            <a:spLocks noGrp="1"/>
+          </p:cNvSpPr>
+          <p:nvPr/>
+        </p:nvSpPr>
+        <p:spPr>
+          <a:xfrm>
+            <a:off x="0" y="0"/>
+            <a:ext cx="12192000" cy="342900"/>
+          </a:xfrm>
+          <a:prstGeom prst="rect">
+            <a:avLst/>
+          </a:prstGeom>
+          <a:solidFill>
+            <a:srgbClr val="FFFFFF"/>
+          </a:solidFill>
+          <a:ln w="0">
+            <a:noFill/>
+          </a:ln>
+        </p:spPr>
+      </p:sp>
+      <p:sp>
+        <p:nvSpPr>
+          <p:cNvPr id="16" name="DSPIRA 2"/>
+          <p:cNvSpPr>
+            <a:spLocks noGrp="1"/>
+          </p:cNvSpPr>
+          <p:nvPr/>
+        </p:nvSpPr>
+        <p:spPr>
+          <a:xfrm>
+            <a:off x="0" y="7200900"/>
+            <a:ext cx="12192000" cy="342900"/>
+          </a:xfrm>
+          <a:prstGeom prst="rect">
+            <a:avLst/>
+          </a:prstGeom>
+          <a:solidFill>
+            <a:srgbClr val="FFFFFF"/>
+          </a:solidFill>
+          <a:ln w="0">
+            <a:noFill/>
+          </a:ln>
+        </p:spPr>
+      </p:sp>
+      <p:sp>
+        <p:nvSpPr>
+          <p:cNvPr id="17" name="DSPIRA 3"/>
+          <p:cNvSpPr>
+            <a:spLocks noGrp="1"/>
+          </p:cNvSpPr>
+          <p:nvPr/>
+        </p:nvSpPr>
+        <p:spPr>
+          <a:xfrm>
+            <a:off x="228600" y="76200"/>
+            <a:ext cx="4762500" cy="228600"/>
+          </a:xfrm>
+          <a:prstGeom prst="rect">
+            <a:avLst/>
+          </a:prstGeom>
+          <a:noFill/>
+          <a:ln w="0">
+            <a:noFill/>
+          </a:ln>
+        </p:spPr>
+        <p:txBody>
+          <a:bodyPr>
+            <a:noAutofit/>
           </a:bodyPr>
           <a:lstStyle/>
           <a:p>
             <a:pPr>
-              <a:spcAft>
-                <a:spcPts val="600"/>
-              </a:spcAft>
-              <a:defRPr/>
+              <a:defRPr sz="1200" b="1">
+                <a:solidFill>
+                  <a:srgbClr val="002855"/>
+                </a:solidFill>
+                <a:latin typeface="Arial"/>
+                <a:ea typeface="Arial"/>
+                <a:cs typeface="Arial"/>
+              </a:defRPr>
             </a:pPr>
-            <a:fld id="{1CEDF748-80AB-48FE-8ADB-9504DB224582}" type="slidenum">
-              <a:rPr lang="en-US" smtClean="0">
+            <a:r>
+              <a:rPr sz="1200" b="1">
                 <a:solidFill>
-                  <a:prstClr val="black">
-                    <a:tint val="75000"/>
-                  </a:prstClr>
+                  <a:srgbClr val="002855"/>
                 </a:solidFill>
-                <a:latin typeface="Calibri" panose="020F0502020204030204"/>
+                <a:latin typeface="Arial"/>
+                <a:ea typeface="Arial"/>
+                <a:cs typeface="Arial"/>
               </a:rPr>
-              <a:pPr>
-                <a:spcAft>
-                  <a:spcPts val="600"/>
-                </a:spcAft>
-                <a:defRPr/>
-              </a:pPr>
-              <a:t>11</a:t>
-            </a:fld>
-            <a:endParaRPr lang="en-US">
-              <a:solidFill>
-                <a:prstClr val="black">
-                  <a:tint val="75000"/>
-                </a:prstClr>
-              </a:solidFill>
-              <a:latin typeface="Calibri" panose="020F0502020204030204"/>
-            </a:endParaRPr>
+              <a:t>WVU DSPIRA</a:t>
+            </a:r>
+          </a:p>
+        </p:txBody>
+      </p:sp>
+      <p:sp>
+        <p:nvSpPr>
+          <p:cNvPr id="18" name="DSPIRA 4"/>
+          <p:cNvSpPr>
+            <a:spLocks noGrp="1"/>
+          </p:cNvSpPr>
+          <p:nvPr/>
+        </p:nvSpPr>
+        <p:spPr>
+          <a:xfrm>
+            <a:off x="228600" y="7277100"/>
+            <a:ext cx="6667500" cy="228600"/>
+          </a:xfrm>
+          <a:prstGeom prst="rect">
+            <a:avLst/>
+          </a:prstGeom>
+          <a:noFill/>
+          <a:ln w="0">
+            <a:noFill/>
+          </a:ln>
+        </p:spPr>
+        <p:txBody>
+          <a:bodyPr>
+            <a:noAutofit/>
+          </a:bodyPr>
+          <a:lstStyle/>
+          <a:p>
+            <a:pPr>
+              <a:defRPr sz="900" b="0">
+                <a:solidFill>
+                  <a:srgbClr val="002855"/>
+                </a:solidFill>
+                <a:latin typeface="Arial"/>
+                <a:ea typeface="Arial"/>
+                <a:cs typeface="Arial"/>
+              </a:defRPr>
+            </a:pPr>
+            <a:r>
+              <a:rPr sz="900" b="0">
+                <a:solidFill>
+                  <a:srgbClr val="002855"/>
+                </a:solidFill>
+                <a:latin typeface="Arial"/>
+                <a:ea typeface="Arial"/>
+                <a:cs typeface="Arial"/>
+              </a:rPr>
+              <a:t>wvurail.org/dspira</a:t>
+            </a:r>
+          </a:p>
+        </p:txBody>
+      </p:sp>
+      <p:sp>
+        <p:nvSpPr>
+          <p:cNvPr id="19" name="DSPIRA 5"/>
+          <p:cNvSpPr>
+            <a:spLocks noGrp="1"/>
+          </p:cNvSpPr>
+          <p:nvPr/>
+        </p:nvSpPr>
+        <p:spPr>
+          <a:xfrm>
+            <a:off x="11191875" y="7277100"/>
+            <a:ext cx="762000" cy="228600"/>
+          </a:xfrm>
+          <a:prstGeom prst="rect">
+            <a:avLst/>
+          </a:prstGeom>
+          <a:noFill/>
+          <a:ln w="0">
+            <a:noFill/>
+          </a:ln>
+        </p:spPr>
+        <p:txBody>
+          <a:bodyPr>
+            <a:noAutofit/>
+          </a:bodyPr>
+          <a:lstStyle/>
+          <a:p>
+            <a:pPr>
+              <a:defRPr sz="900" b="0">
+                <a:solidFill>
+                  <a:srgbClr val="002855"/>
+                </a:solidFill>
+                <a:latin typeface="Arial"/>
+                <a:ea typeface="Arial"/>
+                <a:cs typeface="Arial"/>
+              </a:defRPr>
+            </a:pPr>
+            <a:r>
+              <a:rPr sz="900" b="0">
+                <a:solidFill>
+                  <a:srgbClr val="002855"/>
+                </a:solidFill>
+                <a:latin typeface="Arial"/>
+                <a:ea typeface="Arial"/>
+                <a:cs typeface="Arial"/>
+              </a:rPr>
+              <a:t>11 of 11</a:t>
+            </a:r>
           </a:p>
         </p:txBody>
       </p:sp>
@@ -4526,7 +4797,7 @@
         </p:nvSpPr>
         <p:spPr bwMode="ltGray">
           <a:xfrm>
-            <a:off x="336883" y="321176"/>
+            <a:off x="336883" y="664076"/>
             <a:ext cx="7174247" cy="5896743"/>
           </a:xfrm>
           <a:prstGeom prst="rect">
@@ -4598,7 +4869,7 @@
         </p:blipFill>
         <p:spPr>
           <a:xfrm>
-            <a:off x="8021956" y="306909"/>
+            <a:off x="8021956" y="649809"/>
             <a:ext cx="3657599" cy="2286000"/>
           </a:xfrm>
           <a:prstGeom prst="rect">
@@ -4634,7 +4905,7 @@
         </p:blipFill>
         <p:spPr>
           <a:xfrm>
-            <a:off x="8579883" y="2828925"/>
+            <a:off x="8579883" y="3171825"/>
             <a:ext cx="2541745" cy="3388994"/>
           </a:xfrm>
           <a:prstGeom prst="rect">
@@ -4660,7 +4931,7 @@
         </p:nvSpPr>
         <p:spPr>
           <a:xfrm>
-            <a:off x="821516" y="640263"/>
+            <a:off x="821516" y="983163"/>
             <a:ext cx="6204984" cy="1344975"/>
           </a:xfrm>
         </p:spPr>
@@ -4671,7 +4942,7 @@
           <a:lstStyle/>
           <a:p>
             <a:r>
-              <a:rPr lang="en-US" sz="4000"/>
+              <a:rPr lang="en-US" sz="3200"/>
               <a:t>Filters</a:t>
             </a:r>
           </a:p>
@@ -4695,7 +4966,7 @@
         </p:nvSpPr>
         <p:spPr>
           <a:xfrm>
-            <a:off x="821515" y="2121762"/>
+            <a:off x="821515" y="2464662"/>
             <a:ext cx="6204984" cy="3626917"/>
           </a:xfrm>
         </p:spPr>
@@ -4706,19 +4977,19 @@
           <a:lstStyle/>
           <a:p>
             <a:r>
-              <a:rPr lang="en-US" sz="2400" dirty="0"/>
+              <a:rPr lang="en-US" sz="1920" dirty="0"/>
               <a:t>Coffee filter</a:t>
             </a:r>
           </a:p>
           <a:p>
             <a:r>
-              <a:rPr lang="en-US" sz="2400" dirty="0"/>
+              <a:rPr lang="en-US" sz="1920" dirty="0"/>
               <a:t>Particle filter (to measure pollutions)</a:t>
             </a:r>
           </a:p>
           <a:p>
             <a:r>
-              <a:rPr lang="en-US" sz="2400" dirty="0"/>
+              <a:rPr lang="en-US" sz="1920" dirty="0"/>
               <a:t>Filters in Signal Processing (remove or attenuate some frequencies while keeping the others without any change) </a:t>
             </a:r>
           </a:p>
@@ -4726,30 +4997,202 @@
       </p:sp>
       <p:sp>
         <p:nvSpPr>
-          <p:cNvPr id="13" name="Slide Number Placeholder 12">
-            <a:extLst>
-              <a:ext uri="{FF2B5EF4-FFF2-40B4-BE49-F238E27FC236}">
-                <a16:creationId xmlns:a16="http://schemas.microsoft.com/office/drawing/2014/main" id="{288E2E4A-5467-42D1-9C0F-3A326EFA3589}"/>
-              </a:ext>
-            </a:extLst>
-          </p:cNvPr>
-          <p:cNvSpPr>
-            <a:spLocks noGrp="1"/>
-          </p:cNvSpPr>
-          <p:nvPr>
-            <p:ph type="sldNum" sz="quarter" idx="12"/>
-          </p:nvPr>
-        </p:nvSpPr>
-        <p:spPr/>
-        <p:txBody>
-          <a:bodyPr/>
-          <a:lstStyle/>
-          <a:p>
-            <a:fld id="{1CEDF748-80AB-48FE-8ADB-9504DB224582}" type="slidenum">
-              <a:rPr lang="en-US" smtClean="0"/>
-              <a:t>2</a:t>
-            </a:fld>
-            <a:endParaRPr lang="en-US"/>
+          <p:cNvPr id="13" name="DSPIRA 1"/>
+          <p:cNvSpPr>
+            <a:spLocks noGrp="1"/>
+          </p:cNvSpPr>
+          <p:nvPr/>
+        </p:nvSpPr>
+        <p:spPr>
+          <a:xfrm>
+            <a:off x="0" y="0"/>
+            <a:ext cx="12192000" cy="342900"/>
+          </a:xfrm>
+          <a:prstGeom prst="rect">
+            <a:avLst/>
+          </a:prstGeom>
+          <a:solidFill>
+            <a:srgbClr val="FFFFFF"/>
+          </a:solidFill>
+          <a:ln w="0">
+            <a:noFill/>
+          </a:ln>
+        </p:spPr>
+      </p:sp>
+      <p:sp>
+        <p:nvSpPr>
+          <p:cNvPr id="14" name="DSPIRA 2"/>
+          <p:cNvSpPr>
+            <a:spLocks noGrp="1"/>
+          </p:cNvSpPr>
+          <p:nvPr/>
+        </p:nvSpPr>
+        <p:spPr>
+          <a:xfrm>
+            <a:off x="0" y="7200900"/>
+            <a:ext cx="12192000" cy="342900"/>
+          </a:xfrm>
+          <a:prstGeom prst="rect">
+            <a:avLst/>
+          </a:prstGeom>
+          <a:solidFill>
+            <a:srgbClr val="FFFFFF"/>
+          </a:solidFill>
+          <a:ln w="0">
+            <a:noFill/>
+          </a:ln>
+        </p:spPr>
+      </p:sp>
+      <p:sp>
+        <p:nvSpPr>
+          <p:cNvPr id="15" name="DSPIRA 3"/>
+          <p:cNvSpPr>
+            <a:spLocks noGrp="1"/>
+          </p:cNvSpPr>
+          <p:nvPr/>
+        </p:nvSpPr>
+        <p:spPr>
+          <a:xfrm>
+            <a:off x="228600" y="76200"/>
+            <a:ext cx="4762500" cy="228600"/>
+          </a:xfrm>
+          <a:prstGeom prst="rect">
+            <a:avLst/>
+          </a:prstGeom>
+          <a:noFill/>
+          <a:ln w="0">
+            <a:noFill/>
+          </a:ln>
+        </p:spPr>
+        <p:txBody>
+          <a:bodyPr>
+            <a:noAutofit/>
+          </a:bodyPr>
+          <a:lstStyle/>
+          <a:p>
+            <a:pPr>
+              <a:defRPr sz="1200" b="1">
+                <a:solidFill>
+                  <a:srgbClr val="002855"/>
+                </a:solidFill>
+                <a:latin typeface="Arial"/>
+                <a:ea typeface="Arial"/>
+                <a:cs typeface="Arial"/>
+              </a:defRPr>
+            </a:pPr>
+            <a:r>
+              <a:rPr sz="1200" b="1">
+                <a:solidFill>
+                  <a:srgbClr val="002855"/>
+                </a:solidFill>
+                <a:latin typeface="Arial"/>
+                <a:ea typeface="Arial"/>
+                <a:cs typeface="Arial"/>
+              </a:rPr>
+              <a:t>WVU DSPIRA</a:t>
+            </a:r>
+          </a:p>
+        </p:txBody>
+      </p:sp>
+      <p:sp>
+        <p:nvSpPr>
+          <p:cNvPr id="16" name="DSPIRA 4"/>
+          <p:cNvSpPr>
+            <a:spLocks noGrp="1"/>
+          </p:cNvSpPr>
+          <p:nvPr/>
+        </p:nvSpPr>
+        <p:spPr>
+          <a:xfrm>
+            <a:off x="228600" y="7277100"/>
+            <a:ext cx="6667500" cy="228600"/>
+          </a:xfrm>
+          <a:prstGeom prst="rect">
+            <a:avLst/>
+          </a:prstGeom>
+          <a:noFill/>
+          <a:ln w="0">
+            <a:noFill/>
+          </a:ln>
+        </p:spPr>
+        <p:txBody>
+          <a:bodyPr>
+            <a:noAutofit/>
+          </a:bodyPr>
+          <a:lstStyle/>
+          <a:p>
+            <a:pPr>
+              <a:defRPr sz="900" b="0">
+                <a:solidFill>
+                  <a:srgbClr val="002855"/>
+                </a:solidFill>
+                <a:latin typeface="Arial"/>
+                <a:ea typeface="Arial"/>
+                <a:cs typeface="Arial"/>
+              </a:defRPr>
+            </a:pPr>
+            <a:r>
+              <a:rPr sz="900" b="0">
+                <a:solidFill>
+                  <a:srgbClr val="002855"/>
+                </a:solidFill>
+                <a:latin typeface="Arial"/>
+                <a:ea typeface="Arial"/>
+                <a:cs typeface="Arial"/>
+              </a:rPr>
+              <a:t>wvurail.org/dspira</a:t>
+            </a:r>
+          </a:p>
+        </p:txBody>
+      </p:sp>
+      <p:sp>
+        <p:nvSpPr>
+          <p:cNvPr id="17" name="DSPIRA 5"/>
+          <p:cNvSpPr>
+            <a:spLocks noGrp="1"/>
+          </p:cNvSpPr>
+          <p:nvPr/>
+        </p:nvSpPr>
+        <p:spPr>
+          <a:xfrm>
+            <a:off x="11191875" y="7277100"/>
+            <a:ext cx="762000" cy="228600"/>
+          </a:xfrm>
+          <a:prstGeom prst="rect">
+            <a:avLst/>
+          </a:prstGeom>
+          <a:noFill/>
+          <a:ln w="0">
+            <a:noFill/>
+          </a:ln>
+        </p:spPr>
+        <p:txBody>
+          <a:bodyPr>
+            <a:noAutofit/>
+          </a:bodyPr>
+          <a:lstStyle/>
+          <a:p>
+            <a:pPr>
+              <a:defRPr sz="900" b="0">
+                <a:solidFill>
+                  <a:srgbClr val="002855"/>
+                </a:solidFill>
+                <a:latin typeface="Arial"/>
+                <a:ea typeface="Arial"/>
+                <a:cs typeface="Arial"/>
+              </a:defRPr>
+            </a:pPr>
+            <a:r>
+              <a:rPr sz="900" b="0">
+                <a:solidFill>
+                  <a:srgbClr val="002855"/>
+                </a:solidFill>
+                <a:latin typeface="Arial"/>
+                <a:ea typeface="Arial"/>
+                <a:cs typeface="Arial"/>
+              </a:rPr>
+              <a:t>2 of 11</a:t>
+            </a:r>
           </a:p>
         </p:txBody>
       </p:sp>
@@ -4816,7 +5259,7 @@
         </p:nvSpPr>
         <p:spPr bwMode="ltGray">
           <a:xfrm>
-            <a:off x="336883" y="321176"/>
+            <a:off x="336883" y="664076"/>
             <a:ext cx="7174247" cy="5896743"/>
           </a:xfrm>
           <a:prstGeom prst="rect">
@@ -4888,7 +5331,7 @@
         </p:blipFill>
         <p:spPr>
           <a:xfrm>
-            <a:off x="8134874" y="3173218"/>
+            <a:off x="8134874" y="3516118"/>
             <a:ext cx="3371535" cy="2798374"/>
           </a:xfrm>
           <a:prstGeom prst="rect">
@@ -4924,7 +5367,7 @@
         </p:blipFill>
         <p:spPr>
           <a:xfrm>
-            <a:off x="7995762" y="270361"/>
+            <a:off x="7995762" y="613261"/>
             <a:ext cx="3497419" cy="2902857"/>
           </a:xfrm>
           <a:prstGeom prst="rect">
@@ -4950,7 +5393,7 @@
         </p:nvSpPr>
         <p:spPr>
           <a:xfrm>
-            <a:off x="821516" y="640263"/>
+            <a:off x="821516" y="983163"/>
             <a:ext cx="6204984" cy="1344975"/>
           </a:xfrm>
         </p:spPr>
@@ -4961,7 +5404,7 @@
           <a:lstStyle/>
           <a:p>
             <a:r>
-              <a:rPr lang="en-US" sz="4000" dirty="0"/>
+              <a:rPr lang="en-US" sz="3200" dirty="0"/>
               <a:t>Recall (Lecture 3)</a:t>
             </a:r>
           </a:p>
@@ -5001,12 +5444,12 @@
                   <a:buNone/>
                 </a:pPr>
                 <a:r>
-                  <a:rPr lang="en-US" sz="2400" dirty="0"/>
+                  <a:rPr lang="en-US" sz="1920" dirty="0"/>
                   <a:t>A signal can be presented as a mixture of sines and cosines (complex exponentials) </a:t>
                 </a:r>
               </a:p>
               <a:p>
-                <a:endParaRPr lang="en-US" sz="2400" dirty="0"/>
+                <a:endParaRPr lang="en-US" sz="1920" dirty="0"/>
               </a:p>
               <a:p>
                 <a:pPr marL="0" indent="0">
@@ -5022,7 +5465,7 @@
                         <m:naryPr>
                           <m:limLoc m:val="undOvr"/>
                           <m:ctrlPr>
-                            <a:rPr lang="en-US" sz="2400" i="1">
+                            <a:rPr lang="en-US" sz="1920" i="1">
                               <a:latin typeface="Cambria Math" panose="02040503050406030204" pitchFamily="18" charset="0"/>
                             </a:rPr>
                           </m:ctrlPr>
@@ -5032,13 +5475,13 @@
                             <m:rPr>
                               <m:brk m:alnAt="24"/>
                             </m:rPr>
-                            <a:rPr lang="en-US" sz="2400" b="0" i="1">
+                            <a:rPr lang="en-US" sz="1920" b="0" i="1">
                               <a:latin typeface="Cambria Math" panose="02040503050406030204" pitchFamily="18" charset="0"/>
                             </a:rPr>
                             <m:t>−</m:t>
                           </m:r>
                           <m:r>
-                            <a:rPr lang="en-US" sz="2400" b="0" i="1">
+                            <a:rPr lang="en-US" sz="1920" b="0" i="1">
                               <a:latin typeface="Cambria Math" panose="02040503050406030204" pitchFamily="18" charset="0"/>
                               <a:ea typeface="Cambria Math" panose="02040503050406030204" pitchFamily="18" charset="0"/>
                             </a:rPr>
@@ -5047,13 +5490,13 @@
                         </m:sub>
                         <m:sup>
                           <m:r>
-                            <a:rPr lang="en-US" sz="2400" b="0" i="1">
+                            <a:rPr lang="en-US" sz="1920" b="0" i="1">
                               <a:latin typeface="Cambria Math" panose="02040503050406030204" pitchFamily="18" charset="0"/>
                             </a:rPr>
                             <m:t>+</m:t>
                           </m:r>
                           <m:r>
-                            <a:rPr lang="en-US" sz="2400" b="0" i="1">
+                            <a:rPr lang="en-US" sz="1920" b="0" i="1">
                               <a:latin typeface="Cambria Math" panose="02040503050406030204" pitchFamily="18" charset="0"/>
                               <a:ea typeface="Cambria Math" panose="02040503050406030204" pitchFamily="18" charset="0"/>
                             </a:rPr>
@@ -5062,7 +5505,7 @@
                         </m:sup>
                         <m:e>
                           <m:r>
-                            <a:rPr lang="en-US" sz="2400" b="0" i="1">
+                            <a:rPr lang="en-US" sz="1920" b="0" i="1">
                               <a:latin typeface="Cambria Math" panose="02040503050406030204" pitchFamily="18" charset="0"/>
                             </a:rPr>
                             <m:t>𝑋</m:t>
@@ -5070,14 +5513,14 @@
                           <m:d>
                             <m:dPr>
                               <m:ctrlPr>
-                                <a:rPr lang="en-US" sz="2400" b="0" i="1">
+                                <a:rPr lang="en-US" sz="1920" b="0" i="1">
                                   <a:latin typeface="Cambria Math" panose="02040503050406030204" pitchFamily="18" charset="0"/>
                                 </a:rPr>
                               </m:ctrlPr>
                             </m:dPr>
                             <m:e>
                               <m:r>
-                                <a:rPr lang="en-US" sz="2400" b="0" i="1">
+                                <a:rPr lang="en-US" sz="1920" b="0" i="1">
                                   <a:latin typeface="Cambria Math" panose="02040503050406030204" pitchFamily="18" charset="0"/>
                                 </a:rPr>
                                 <m:t>𝑓</m:t>
@@ -5087,14 +5530,14 @@
                           <m:sSup>
                             <m:sSupPr>
                               <m:ctrlPr>
-                                <a:rPr lang="en-US" sz="2400" b="0" i="1">
+                                <a:rPr lang="en-US" sz="1920" b="0" i="1">
                                   <a:latin typeface="Cambria Math" panose="02040503050406030204" pitchFamily="18" charset="0"/>
                                 </a:rPr>
                               </m:ctrlPr>
                             </m:sSupPr>
                             <m:e>
                               <m:r>
-                                <a:rPr lang="en-US" sz="2400" b="0" i="1">
+                                <a:rPr lang="en-US" sz="1920" b="0" i="1">
                                   <a:latin typeface="Cambria Math" panose="02040503050406030204" pitchFamily="18" charset="0"/>
                                 </a:rPr>
                                 <m:t>𝑒</m:t>
@@ -5102,32 +5545,32 @@
                             </m:e>
                             <m:sup>
                               <m:r>
-                                <a:rPr lang="en-US" sz="2400" b="0" i="1">
+                                <a:rPr lang="en-US" sz="1920" b="0" i="1">
                                   <a:latin typeface="Cambria Math" panose="02040503050406030204" pitchFamily="18" charset="0"/>
                                 </a:rPr>
                                 <m:t>−</m:t>
                               </m:r>
                               <m:r>
-                                <a:rPr lang="en-US" sz="2400" b="0" i="1">
+                                <a:rPr lang="en-US" sz="1920" b="0" i="1">
                                   <a:latin typeface="Cambria Math" panose="02040503050406030204" pitchFamily="18" charset="0"/>
                                 </a:rPr>
                                 <m:t>𝑗</m:t>
                               </m:r>
                               <m:r>
-                                <a:rPr lang="en-US" sz="2400" b="0" i="1">
+                                <a:rPr lang="en-US" sz="1920" b="0" i="1">
                                   <a:latin typeface="Cambria Math" panose="02040503050406030204" pitchFamily="18" charset="0"/>
                                 </a:rPr>
                                 <m:t>2</m:t>
                               </m:r>
                               <m:r>
-                                <a:rPr lang="en-US" sz="2400" b="0" i="1">
+                                <a:rPr lang="en-US" sz="1920" b="0" i="1">
                                   <a:latin typeface="Cambria Math" panose="02040503050406030204" pitchFamily="18" charset="0"/>
                                   <a:ea typeface="Cambria Math" panose="02040503050406030204" pitchFamily="18" charset="0"/>
                                 </a:rPr>
                                 <m:t>𝜋</m:t>
                               </m:r>
                               <m:r>
-                                <a:rPr lang="en-US" sz="2400" b="0" i="1">
+                                <a:rPr lang="en-US" sz="1920" b="0" i="1">
                                   <a:latin typeface="Cambria Math" panose="02040503050406030204" pitchFamily="18" charset="0"/>
                                   <a:ea typeface="Cambria Math" panose="02040503050406030204" pitchFamily="18" charset="0"/>
                                 </a:rPr>
@@ -5138,37 +5581,37 @@
                         </m:e>
                       </m:nary>
                       <m:r>
-                        <a:rPr lang="en-US" sz="2400" b="0" i="1">
+                        <a:rPr lang="en-US" sz="1920" b="0" i="1">
                           <a:latin typeface="Cambria Math" panose="02040503050406030204" pitchFamily="18" charset="0"/>
                         </a:rPr>
                         <m:t>𝑑𝑓</m:t>
                       </m:r>
                       <m:r>
-                        <a:rPr lang="en-US" sz="2400" b="0" i="1">
+                        <a:rPr lang="en-US" sz="1920" b="0" i="1">
                           <a:latin typeface="Cambria Math" panose="02040503050406030204" pitchFamily="18" charset="0"/>
                         </a:rPr>
                         <m:t>=</m:t>
                       </m:r>
                       <m:r>
-                        <a:rPr lang="en-US" sz="2400" b="0" i="1">
+                        <a:rPr lang="en-US" sz="1920" b="0" i="1">
                           <a:latin typeface="Cambria Math" panose="02040503050406030204" pitchFamily="18" charset="0"/>
                         </a:rPr>
                         <m:t>𝑥</m:t>
                       </m:r>
                       <m:r>
-                        <a:rPr lang="en-US" sz="2400" b="0" i="1">
+                        <a:rPr lang="en-US" sz="1920" b="0" i="1">
                           <a:latin typeface="Cambria Math" panose="02040503050406030204" pitchFamily="18" charset="0"/>
                         </a:rPr>
                         <m:t>(</m:t>
                       </m:r>
                       <m:r>
-                        <a:rPr lang="en-US" sz="2400" b="0" i="1">
+                        <a:rPr lang="en-US" sz="1920" b="0" i="1">
                           <a:latin typeface="Cambria Math" panose="02040503050406030204" pitchFamily="18" charset="0"/>
                         </a:rPr>
                         <m:t>𝑡</m:t>
                       </m:r>
                       <m:r>
-                        <a:rPr lang="en-US" sz="2400" b="0" i="1">
+                        <a:rPr lang="en-US" sz="1920" b="0" i="1">
                           <a:latin typeface="Cambria Math" panose="02040503050406030204" pitchFamily="18" charset="0"/>
                         </a:rPr>
                         <m:t>)</m:t>
@@ -5176,13 +5619,13 @@
                     </m:oMath>
                   </m:oMathPara>
                 </a14:m>
-                <a:endParaRPr lang="en-US" sz="2400" dirty="0"/>
+                <a:endParaRPr lang="en-US" sz="1920" dirty="0"/>
               </a:p>
               <a:p>
                 <a:pPr marL="0" indent="0">
                   <a:buNone/>
                 </a:pPr>
-                <a:endParaRPr lang="en-US" sz="2400" dirty="0"/>
+                <a:endParaRPr lang="en-US" sz="1920" dirty="0"/>
               </a:p>
               <a:p>
                 <a:pPr marL="0" indent="0">
@@ -5191,25 +5634,25 @@
                 <a14:m>
                   <m:oMath xmlns:m="http://schemas.openxmlformats.org/officeDocument/2006/math">
                     <m:r>
-                      <a:rPr lang="en-US" sz="2400" b="0" i="1">
+                      <a:rPr lang="en-US" sz="1920" b="0" i="1">
                         <a:latin typeface="Cambria Math" panose="02040503050406030204" pitchFamily="18" charset="0"/>
                       </a:rPr>
                       <m:t>𝑋</m:t>
                     </m:r>
                     <m:r>
-                      <a:rPr lang="en-US" sz="2400" b="0" i="1">
+                      <a:rPr lang="en-US" sz="1920" b="0" i="1">
                         <a:latin typeface="Cambria Math" panose="02040503050406030204" pitchFamily="18" charset="0"/>
                       </a:rPr>
                       <m:t>(</m:t>
                     </m:r>
                     <m:r>
-                      <a:rPr lang="en-US" sz="2400" b="0" i="1">
+                      <a:rPr lang="en-US" sz="1920" b="0" i="1">
                         <a:latin typeface="Cambria Math" panose="02040503050406030204" pitchFamily="18" charset="0"/>
                       </a:rPr>
                       <m:t>𝑓</m:t>
                     </m:r>
                     <m:r>
-                      <a:rPr lang="en-US" sz="2400" b="0" i="1">
+                      <a:rPr lang="en-US" sz="1920" b="0" i="1">
                         <a:latin typeface="Cambria Math" panose="02040503050406030204" pitchFamily="18" charset="0"/>
                       </a:rPr>
                       <m:t>)</m:t>
@@ -5217,7 +5660,7 @@
                   </m:oMath>
                 </a14:m>
                 <a:r>
-                  <a:rPr lang="en-US" sz="2400" dirty="0"/>
+                  <a:rPr lang="en-US" sz="1920" dirty="0"/>
                   <a:t> tell us how much each frequency contributes</a:t>
                 </a:r>
               </a:p>
@@ -5225,7 +5668,7 @@
                 <a:pPr marL="0" indent="0">
                   <a:buNone/>
                 </a:pPr>
-                <a:endParaRPr lang="en-US" sz="2400" dirty="0"/>
+                <a:endParaRPr lang="en-US" sz="1920" dirty="0"/>
               </a:p>
             </p:txBody>
           </p:sp>
@@ -5276,30 +5719,202 @@
       </mc:AlternateContent>
       <p:sp>
         <p:nvSpPr>
-          <p:cNvPr id="8" name="Slide Number Placeholder 7">
-            <a:extLst>
-              <a:ext uri="{FF2B5EF4-FFF2-40B4-BE49-F238E27FC236}">
-                <a16:creationId xmlns:a16="http://schemas.microsoft.com/office/drawing/2014/main" id="{DC95CB5D-01C4-4B27-9521-9C6CBD1273A8}"/>
-              </a:ext>
-            </a:extLst>
-          </p:cNvPr>
-          <p:cNvSpPr>
-            <a:spLocks noGrp="1"/>
-          </p:cNvSpPr>
-          <p:nvPr>
-            <p:ph type="sldNum" sz="quarter" idx="12"/>
-          </p:nvPr>
-        </p:nvSpPr>
-        <p:spPr/>
-        <p:txBody>
-          <a:bodyPr/>
-          <a:lstStyle/>
-          <a:p>
-            <a:fld id="{1CEDF748-80AB-48FE-8ADB-9504DB224582}" type="slidenum">
-              <a:rPr lang="en-US" smtClean="0"/>
-              <a:t>3</a:t>
-            </a:fld>
-            <a:endParaRPr lang="en-US"/>
+          <p:cNvPr id="13" name="DSPIRA 1"/>
+          <p:cNvSpPr>
+            <a:spLocks noGrp="1"/>
+          </p:cNvSpPr>
+          <p:nvPr/>
+        </p:nvSpPr>
+        <p:spPr>
+          <a:xfrm>
+            <a:off x="0" y="0"/>
+            <a:ext cx="12192000" cy="342900"/>
+          </a:xfrm>
+          <a:prstGeom prst="rect">
+            <a:avLst/>
+          </a:prstGeom>
+          <a:solidFill>
+            <a:srgbClr val="FFFFFF"/>
+          </a:solidFill>
+          <a:ln w="0">
+            <a:noFill/>
+          </a:ln>
+        </p:spPr>
+      </p:sp>
+      <p:sp>
+        <p:nvSpPr>
+          <p:cNvPr id="14" name="DSPIRA 2"/>
+          <p:cNvSpPr>
+            <a:spLocks noGrp="1"/>
+          </p:cNvSpPr>
+          <p:nvPr/>
+        </p:nvSpPr>
+        <p:spPr>
+          <a:xfrm>
+            <a:off x="0" y="7200900"/>
+            <a:ext cx="12192000" cy="342900"/>
+          </a:xfrm>
+          <a:prstGeom prst="rect">
+            <a:avLst/>
+          </a:prstGeom>
+          <a:solidFill>
+            <a:srgbClr val="FFFFFF"/>
+          </a:solidFill>
+          <a:ln w="0">
+            <a:noFill/>
+          </a:ln>
+        </p:spPr>
+      </p:sp>
+      <p:sp>
+        <p:nvSpPr>
+          <p:cNvPr id="15" name="DSPIRA 3"/>
+          <p:cNvSpPr>
+            <a:spLocks noGrp="1"/>
+          </p:cNvSpPr>
+          <p:nvPr/>
+        </p:nvSpPr>
+        <p:spPr>
+          <a:xfrm>
+            <a:off x="228600" y="76200"/>
+            <a:ext cx="4762500" cy="228600"/>
+          </a:xfrm>
+          <a:prstGeom prst="rect">
+            <a:avLst/>
+          </a:prstGeom>
+          <a:noFill/>
+          <a:ln w="0">
+            <a:noFill/>
+          </a:ln>
+        </p:spPr>
+        <p:txBody>
+          <a:bodyPr>
+            <a:noAutofit/>
+          </a:bodyPr>
+          <a:lstStyle/>
+          <a:p>
+            <a:pPr>
+              <a:defRPr sz="1200" b="1">
+                <a:solidFill>
+                  <a:srgbClr val="002855"/>
+                </a:solidFill>
+                <a:latin typeface="Arial"/>
+                <a:ea typeface="Arial"/>
+                <a:cs typeface="Arial"/>
+              </a:defRPr>
+            </a:pPr>
+            <a:r>
+              <a:rPr sz="1200" b="1">
+                <a:solidFill>
+                  <a:srgbClr val="002855"/>
+                </a:solidFill>
+                <a:latin typeface="Arial"/>
+                <a:ea typeface="Arial"/>
+                <a:cs typeface="Arial"/>
+              </a:rPr>
+              <a:t>WVU DSPIRA</a:t>
+            </a:r>
+          </a:p>
+        </p:txBody>
+      </p:sp>
+      <p:sp>
+        <p:nvSpPr>
+          <p:cNvPr id="16" name="DSPIRA 4"/>
+          <p:cNvSpPr>
+            <a:spLocks noGrp="1"/>
+          </p:cNvSpPr>
+          <p:nvPr/>
+        </p:nvSpPr>
+        <p:spPr>
+          <a:xfrm>
+            <a:off x="228600" y="7277100"/>
+            <a:ext cx="6667500" cy="228600"/>
+          </a:xfrm>
+          <a:prstGeom prst="rect">
+            <a:avLst/>
+          </a:prstGeom>
+          <a:noFill/>
+          <a:ln w="0">
+            <a:noFill/>
+          </a:ln>
+        </p:spPr>
+        <p:txBody>
+          <a:bodyPr>
+            <a:noAutofit/>
+          </a:bodyPr>
+          <a:lstStyle/>
+          <a:p>
+            <a:pPr>
+              <a:defRPr sz="900" b="0">
+                <a:solidFill>
+                  <a:srgbClr val="002855"/>
+                </a:solidFill>
+                <a:latin typeface="Arial"/>
+                <a:ea typeface="Arial"/>
+                <a:cs typeface="Arial"/>
+              </a:defRPr>
+            </a:pPr>
+            <a:r>
+              <a:rPr sz="900" b="0">
+                <a:solidFill>
+                  <a:srgbClr val="002855"/>
+                </a:solidFill>
+                <a:latin typeface="Arial"/>
+                <a:ea typeface="Arial"/>
+                <a:cs typeface="Arial"/>
+              </a:rPr>
+              <a:t>wvurail.org/dspira</a:t>
+            </a:r>
+          </a:p>
+        </p:txBody>
+      </p:sp>
+      <p:sp>
+        <p:nvSpPr>
+          <p:cNvPr id="17" name="DSPIRA 5"/>
+          <p:cNvSpPr>
+            <a:spLocks noGrp="1"/>
+          </p:cNvSpPr>
+          <p:nvPr/>
+        </p:nvSpPr>
+        <p:spPr>
+          <a:xfrm>
+            <a:off x="11191875" y="7277100"/>
+            <a:ext cx="762000" cy="228600"/>
+          </a:xfrm>
+          <a:prstGeom prst="rect">
+            <a:avLst/>
+          </a:prstGeom>
+          <a:noFill/>
+          <a:ln w="0">
+            <a:noFill/>
+          </a:ln>
+        </p:spPr>
+        <p:txBody>
+          <a:bodyPr>
+            <a:noAutofit/>
+          </a:bodyPr>
+          <a:lstStyle/>
+          <a:p>
+            <a:pPr>
+              <a:defRPr sz="900" b="0">
+                <a:solidFill>
+                  <a:srgbClr val="002855"/>
+                </a:solidFill>
+                <a:latin typeface="Arial"/>
+                <a:ea typeface="Arial"/>
+                <a:cs typeface="Arial"/>
+              </a:defRPr>
+            </a:pPr>
+            <a:r>
+              <a:rPr sz="900" b="0">
+                <a:solidFill>
+                  <a:srgbClr val="002855"/>
+                </a:solidFill>
+                <a:latin typeface="Arial"/>
+                <a:ea typeface="Arial"/>
+                <a:cs typeface="Arial"/>
+              </a:rPr>
+              <a:t>3 of 11</a:t>
+            </a:r>
           </a:p>
         </p:txBody>
       </p:sp>
@@ -5366,7 +5981,7 @@
         </p:nvSpPr>
         <p:spPr>
           <a:xfrm rot="16200000">
-            <a:off x="800100" y="1491343"/>
+            <a:off x="800100" y="1834243"/>
             <a:ext cx="3333749" cy="3499103"/>
           </a:xfrm>
           <a:prstGeom prst="downArrow">
@@ -5435,7 +6050,7 @@
         </p:blipFill>
         <p:spPr>
           <a:xfrm>
-            <a:off x="4813003" y="643466"/>
+            <a:off x="4813003" y="986366"/>
             <a:ext cx="6709325" cy="5568739"/>
           </a:xfrm>
           <a:prstGeom prst="rect">
@@ -5461,7 +6076,7 @@
         </p:nvSpPr>
         <p:spPr>
           <a:xfrm>
-            <a:off x="1028700" y="1967266"/>
+            <a:off x="1028700" y="2310166"/>
             <a:ext cx="2628900" cy="2547257"/>
           </a:xfrm>
           <a:noFill/>
@@ -5474,7 +6089,7 @@
           <a:p>
             <a:pPr algn="ctr"/>
             <a:r>
-              <a:rPr lang="en-US" sz="3600">
+              <a:rPr lang="en-US" sz="2880">
                 <a:solidFill>
                   <a:srgbClr val="FFFFFF"/>
                 </a:solidFill>
@@ -5486,30 +6101,202 @@
       </p:sp>
       <p:sp>
         <p:nvSpPr>
-          <p:cNvPr id="3" name="Slide Number Placeholder 2">
-            <a:extLst>
-              <a:ext uri="{FF2B5EF4-FFF2-40B4-BE49-F238E27FC236}">
-                <a16:creationId xmlns:a16="http://schemas.microsoft.com/office/drawing/2014/main" id="{E7EDEC10-E665-4769-82B1-4730B62C4507}"/>
-              </a:ext>
-            </a:extLst>
-          </p:cNvPr>
-          <p:cNvSpPr>
-            <a:spLocks noGrp="1"/>
-          </p:cNvSpPr>
-          <p:nvPr>
-            <p:ph type="sldNum" sz="quarter" idx="12"/>
-          </p:nvPr>
-        </p:nvSpPr>
-        <p:spPr/>
-        <p:txBody>
-          <a:bodyPr/>
-          <a:lstStyle/>
-          <a:p>
-            <a:fld id="{1CEDF748-80AB-48FE-8ADB-9504DB224582}" type="slidenum">
-              <a:rPr lang="en-US" smtClean="0"/>
-              <a:t>4</a:t>
-            </a:fld>
-            <a:endParaRPr lang="en-US"/>
+          <p:cNvPr id="10" name="DSPIRA 1"/>
+          <p:cNvSpPr>
+            <a:spLocks noGrp="1"/>
+          </p:cNvSpPr>
+          <p:nvPr/>
+        </p:nvSpPr>
+        <p:spPr>
+          <a:xfrm>
+            <a:off x="0" y="0"/>
+            <a:ext cx="12192000" cy="342900"/>
+          </a:xfrm>
+          <a:prstGeom prst="rect">
+            <a:avLst/>
+          </a:prstGeom>
+          <a:solidFill>
+            <a:srgbClr val="FFFFFF"/>
+          </a:solidFill>
+          <a:ln w="0">
+            <a:noFill/>
+          </a:ln>
+        </p:spPr>
+      </p:sp>
+      <p:sp>
+        <p:nvSpPr>
+          <p:cNvPr id="11" name="DSPIRA 2"/>
+          <p:cNvSpPr>
+            <a:spLocks noGrp="1"/>
+          </p:cNvSpPr>
+          <p:nvPr/>
+        </p:nvSpPr>
+        <p:spPr>
+          <a:xfrm>
+            <a:off x="0" y="7200900"/>
+            <a:ext cx="12192000" cy="342900"/>
+          </a:xfrm>
+          <a:prstGeom prst="rect">
+            <a:avLst/>
+          </a:prstGeom>
+          <a:solidFill>
+            <a:srgbClr val="FFFFFF"/>
+          </a:solidFill>
+          <a:ln w="0">
+            <a:noFill/>
+          </a:ln>
+        </p:spPr>
+      </p:sp>
+      <p:sp>
+        <p:nvSpPr>
+          <p:cNvPr id="12" name="DSPIRA 3"/>
+          <p:cNvSpPr>
+            <a:spLocks noGrp="1"/>
+          </p:cNvSpPr>
+          <p:nvPr/>
+        </p:nvSpPr>
+        <p:spPr>
+          <a:xfrm>
+            <a:off x="228600" y="76200"/>
+            <a:ext cx="4762500" cy="228600"/>
+          </a:xfrm>
+          <a:prstGeom prst="rect">
+            <a:avLst/>
+          </a:prstGeom>
+          <a:noFill/>
+          <a:ln w="0">
+            <a:noFill/>
+          </a:ln>
+        </p:spPr>
+        <p:txBody>
+          <a:bodyPr>
+            <a:noAutofit/>
+          </a:bodyPr>
+          <a:lstStyle/>
+          <a:p>
+            <a:pPr>
+              <a:defRPr sz="1200" b="1">
+                <a:solidFill>
+                  <a:srgbClr val="002855"/>
+                </a:solidFill>
+                <a:latin typeface="Arial"/>
+                <a:ea typeface="Arial"/>
+                <a:cs typeface="Arial"/>
+              </a:defRPr>
+            </a:pPr>
+            <a:r>
+              <a:rPr sz="1200" b="1">
+                <a:solidFill>
+                  <a:srgbClr val="002855"/>
+                </a:solidFill>
+                <a:latin typeface="Arial"/>
+                <a:ea typeface="Arial"/>
+                <a:cs typeface="Arial"/>
+              </a:rPr>
+              <a:t>WVU DSPIRA</a:t>
+            </a:r>
+          </a:p>
+        </p:txBody>
+      </p:sp>
+      <p:sp>
+        <p:nvSpPr>
+          <p:cNvPr id="13" name="DSPIRA 4"/>
+          <p:cNvSpPr>
+            <a:spLocks noGrp="1"/>
+          </p:cNvSpPr>
+          <p:nvPr/>
+        </p:nvSpPr>
+        <p:spPr>
+          <a:xfrm>
+            <a:off x="228600" y="7277100"/>
+            <a:ext cx="6667500" cy="228600"/>
+          </a:xfrm>
+          <a:prstGeom prst="rect">
+            <a:avLst/>
+          </a:prstGeom>
+          <a:noFill/>
+          <a:ln w="0">
+            <a:noFill/>
+          </a:ln>
+        </p:spPr>
+        <p:txBody>
+          <a:bodyPr>
+            <a:noAutofit/>
+          </a:bodyPr>
+          <a:lstStyle/>
+          <a:p>
+            <a:pPr>
+              <a:defRPr sz="900" b="0">
+                <a:solidFill>
+                  <a:srgbClr val="002855"/>
+                </a:solidFill>
+                <a:latin typeface="Arial"/>
+                <a:ea typeface="Arial"/>
+                <a:cs typeface="Arial"/>
+              </a:defRPr>
+            </a:pPr>
+            <a:r>
+              <a:rPr sz="900" b="0">
+                <a:solidFill>
+                  <a:srgbClr val="002855"/>
+                </a:solidFill>
+                <a:latin typeface="Arial"/>
+                <a:ea typeface="Arial"/>
+                <a:cs typeface="Arial"/>
+              </a:rPr>
+              <a:t>wvurail.org/dspira</a:t>
+            </a:r>
+          </a:p>
+        </p:txBody>
+      </p:sp>
+      <p:sp>
+        <p:nvSpPr>
+          <p:cNvPr id="14" name="DSPIRA 5"/>
+          <p:cNvSpPr>
+            <a:spLocks noGrp="1"/>
+          </p:cNvSpPr>
+          <p:nvPr/>
+        </p:nvSpPr>
+        <p:spPr>
+          <a:xfrm>
+            <a:off x="11191875" y="7277100"/>
+            <a:ext cx="762000" cy="228600"/>
+          </a:xfrm>
+          <a:prstGeom prst="rect">
+            <a:avLst/>
+          </a:prstGeom>
+          <a:noFill/>
+          <a:ln w="0">
+            <a:noFill/>
+          </a:ln>
+        </p:spPr>
+        <p:txBody>
+          <a:bodyPr>
+            <a:noAutofit/>
+          </a:bodyPr>
+          <a:lstStyle/>
+          <a:p>
+            <a:pPr>
+              <a:defRPr sz="900" b="0">
+                <a:solidFill>
+                  <a:srgbClr val="002855"/>
+                </a:solidFill>
+                <a:latin typeface="Arial"/>
+                <a:ea typeface="Arial"/>
+                <a:cs typeface="Arial"/>
+              </a:defRPr>
+            </a:pPr>
+            <a:r>
+              <a:rPr sz="900" b="0">
+                <a:solidFill>
+                  <a:srgbClr val="002855"/>
+                </a:solidFill>
+                <a:latin typeface="Arial"/>
+                <a:ea typeface="Arial"/>
+                <a:cs typeface="Arial"/>
+              </a:rPr>
+              <a:t>4 of 11</a:t>
+            </a:r>
           </a:p>
         </p:txBody>
       </p:sp>
@@ -5576,7 +6363,7 @@
         </p:nvSpPr>
         <p:spPr>
           <a:xfrm rot="16200000">
-            <a:off x="800100" y="1491343"/>
+            <a:off x="800100" y="1834243"/>
             <a:ext cx="3333749" cy="3499103"/>
           </a:xfrm>
           <a:prstGeom prst="downArrow">
@@ -5645,7 +6432,7 @@
         </p:blipFill>
         <p:spPr>
           <a:xfrm>
-            <a:off x="4813003" y="643466"/>
+            <a:off x="4813003" y="986366"/>
             <a:ext cx="6709325" cy="5568739"/>
           </a:xfrm>
           <a:prstGeom prst="rect">
@@ -5671,7 +6458,7 @@
         </p:nvSpPr>
         <p:spPr>
           <a:xfrm>
-            <a:off x="1028700" y="1967266"/>
+            <a:off x="1028700" y="2310166"/>
             <a:ext cx="2628900" cy="2547257"/>
           </a:xfrm>
           <a:noFill/>
@@ -5684,11 +6471,11 @@
           <a:p>
             <a:pPr algn="ctr"/>
             <a:r>
-              <a:rPr lang="en-US" sz="3600" kern="1200">
+              <a:rPr lang="en-US" sz="2880" kern="1200">
                 <a:solidFill>
                   <a:srgbClr val="FFFFFF"/>
                 </a:solidFill>
-                <a:latin typeface="+mj-lt"/>
+                <a:latin typeface="Arial"/>
                 <a:ea typeface="+mj-ea"/>
                 <a:cs typeface="+mj-cs"/>
               </a:rPr>
@@ -5699,30 +6486,202 @@
       </p:sp>
       <p:sp>
         <p:nvSpPr>
-          <p:cNvPr id="5" name="Slide Number Placeholder 4">
-            <a:extLst>
-              <a:ext uri="{FF2B5EF4-FFF2-40B4-BE49-F238E27FC236}">
-                <a16:creationId xmlns:a16="http://schemas.microsoft.com/office/drawing/2014/main" id="{51A80086-74C2-4D0E-8B3E-1B99D4329E31}"/>
-              </a:ext>
-            </a:extLst>
-          </p:cNvPr>
-          <p:cNvSpPr>
-            <a:spLocks noGrp="1"/>
-          </p:cNvSpPr>
-          <p:nvPr>
-            <p:ph type="sldNum" sz="quarter" idx="12"/>
-          </p:nvPr>
-        </p:nvSpPr>
-        <p:spPr/>
-        <p:txBody>
-          <a:bodyPr/>
-          <a:lstStyle/>
-          <a:p>
-            <a:fld id="{1CEDF748-80AB-48FE-8ADB-9504DB224582}" type="slidenum">
-              <a:rPr lang="en-US" smtClean="0"/>
-              <a:t>5</a:t>
-            </a:fld>
-            <a:endParaRPr lang="en-US"/>
+          <p:cNvPr id="17" name="DSPIRA 1"/>
+          <p:cNvSpPr>
+            <a:spLocks noGrp="1"/>
+          </p:cNvSpPr>
+          <p:nvPr/>
+        </p:nvSpPr>
+        <p:spPr>
+          <a:xfrm>
+            <a:off x="0" y="0"/>
+            <a:ext cx="12192000" cy="342900"/>
+          </a:xfrm>
+          <a:prstGeom prst="rect">
+            <a:avLst/>
+          </a:prstGeom>
+          <a:solidFill>
+            <a:srgbClr val="FFFFFF"/>
+          </a:solidFill>
+          <a:ln w="0">
+            <a:noFill/>
+          </a:ln>
+        </p:spPr>
+      </p:sp>
+      <p:sp>
+        <p:nvSpPr>
+          <p:cNvPr id="18" name="DSPIRA 2"/>
+          <p:cNvSpPr>
+            <a:spLocks noGrp="1"/>
+          </p:cNvSpPr>
+          <p:nvPr/>
+        </p:nvSpPr>
+        <p:spPr>
+          <a:xfrm>
+            <a:off x="0" y="7200900"/>
+            <a:ext cx="12192000" cy="342900"/>
+          </a:xfrm>
+          <a:prstGeom prst="rect">
+            <a:avLst/>
+          </a:prstGeom>
+          <a:solidFill>
+            <a:srgbClr val="FFFFFF"/>
+          </a:solidFill>
+          <a:ln w="0">
+            <a:noFill/>
+          </a:ln>
+        </p:spPr>
+      </p:sp>
+      <p:sp>
+        <p:nvSpPr>
+          <p:cNvPr id="19" name="DSPIRA 3"/>
+          <p:cNvSpPr>
+            <a:spLocks noGrp="1"/>
+          </p:cNvSpPr>
+          <p:nvPr/>
+        </p:nvSpPr>
+        <p:spPr>
+          <a:xfrm>
+            <a:off x="228600" y="76200"/>
+            <a:ext cx="4762500" cy="228600"/>
+          </a:xfrm>
+          <a:prstGeom prst="rect">
+            <a:avLst/>
+          </a:prstGeom>
+          <a:noFill/>
+          <a:ln w="0">
+            <a:noFill/>
+          </a:ln>
+        </p:spPr>
+        <p:txBody>
+          <a:bodyPr>
+            <a:noAutofit/>
+          </a:bodyPr>
+          <a:lstStyle/>
+          <a:p>
+            <a:pPr>
+              <a:defRPr sz="1200" b="1">
+                <a:solidFill>
+                  <a:srgbClr val="002855"/>
+                </a:solidFill>
+                <a:latin typeface="Arial"/>
+                <a:ea typeface="Arial"/>
+                <a:cs typeface="Arial"/>
+              </a:defRPr>
+            </a:pPr>
+            <a:r>
+              <a:rPr sz="1200" b="1">
+                <a:solidFill>
+                  <a:srgbClr val="002855"/>
+                </a:solidFill>
+                <a:latin typeface="Arial"/>
+                <a:ea typeface="Arial"/>
+                <a:cs typeface="Arial"/>
+              </a:rPr>
+              <a:t>WVU DSPIRA</a:t>
+            </a:r>
+          </a:p>
+        </p:txBody>
+      </p:sp>
+      <p:sp>
+        <p:nvSpPr>
+          <p:cNvPr id="20" name="DSPIRA 4"/>
+          <p:cNvSpPr>
+            <a:spLocks noGrp="1"/>
+          </p:cNvSpPr>
+          <p:nvPr/>
+        </p:nvSpPr>
+        <p:spPr>
+          <a:xfrm>
+            <a:off x="228600" y="7277100"/>
+            <a:ext cx="6667500" cy="228600"/>
+          </a:xfrm>
+          <a:prstGeom prst="rect">
+            <a:avLst/>
+          </a:prstGeom>
+          <a:noFill/>
+          <a:ln w="0">
+            <a:noFill/>
+          </a:ln>
+        </p:spPr>
+        <p:txBody>
+          <a:bodyPr>
+            <a:noAutofit/>
+          </a:bodyPr>
+          <a:lstStyle/>
+          <a:p>
+            <a:pPr>
+              <a:defRPr sz="900" b="0">
+                <a:solidFill>
+                  <a:srgbClr val="002855"/>
+                </a:solidFill>
+                <a:latin typeface="Arial"/>
+                <a:ea typeface="Arial"/>
+                <a:cs typeface="Arial"/>
+              </a:defRPr>
+            </a:pPr>
+            <a:r>
+              <a:rPr sz="900" b="0">
+                <a:solidFill>
+                  <a:srgbClr val="002855"/>
+                </a:solidFill>
+                <a:latin typeface="Arial"/>
+                <a:ea typeface="Arial"/>
+                <a:cs typeface="Arial"/>
+              </a:rPr>
+              <a:t>wvurail.org/dspira</a:t>
+            </a:r>
+          </a:p>
+        </p:txBody>
+      </p:sp>
+      <p:sp>
+        <p:nvSpPr>
+          <p:cNvPr id="21" name="DSPIRA 5"/>
+          <p:cNvSpPr>
+            <a:spLocks noGrp="1"/>
+          </p:cNvSpPr>
+          <p:nvPr/>
+        </p:nvSpPr>
+        <p:spPr>
+          <a:xfrm>
+            <a:off x="11191875" y="7277100"/>
+            <a:ext cx="762000" cy="228600"/>
+          </a:xfrm>
+          <a:prstGeom prst="rect">
+            <a:avLst/>
+          </a:prstGeom>
+          <a:noFill/>
+          <a:ln w="0">
+            <a:noFill/>
+          </a:ln>
+        </p:spPr>
+        <p:txBody>
+          <a:bodyPr>
+            <a:noAutofit/>
+          </a:bodyPr>
+          <a:lstStyle/>
+          <a:p>
+            <a:pPr>
+              <a:defRPr sz="900" b="0">
+                <a:solidFill>
+                  <a:srgbClr val="002855"/>
+                </a:solidFill>
+                <a:latin typeface="Arial"/>
+                <a:ea typeface="Arial"/>
+                <a:cs typeface="Arial"/>
+              </a:defRPr>
+            </a:pPr>
+            <a:r>
+              <a:rPr sz="900" b="0">
+                <a:solidFill>
+                  <a:srgbClr val="002855"/>
+                </a:solidFill>
+                <a:latin typeface="Arial"/>
+                <a:ea typeface="Arial"/>
+                <a:cs typeface="Arial"/>
+              </a:rPr>
+              <a:t>5 of 11</a:t>
+            </a:r>
           </a:p>
         </p:txBody>
       </p:sp>
@@ -5789,7 +6748,7 @@
         </p:nvSpPr>
         <p:spPr>
           <a:xfrm>
-            <a:off x="6092950" y="0"/>
+            <a:off x="6092950" y="342900"/>
             <a:ext cx="6099050" cy="6858000"/>
           </a:xfrm>
           <a:prstGeom prst="rect">
@@ -5852,7 +6811,7 @@
         </p:nvSpPr>
         <p:spPr>
           <a:xfrm>
-            <a:off x="6577582" y="484632"/>
+            <a:off x="6577582" y="827532"/>
             <a:ext cx="5130204" cy="5739187"/>
           </a:xfrm>
           <a:prstGeom prst="roundRect">
@@ -5929,7 +6888,7 @@
         </p:blipFill>
         <p:spPr>
           <a:xfrm>
-            <a:off x="6577582" y="1260953"/>
+            <a:off x="6577582" y="1603853"/>
             <a:ext cx="5044030" cy="4186543"/>
           </a:xfrm>
           <a:prstGeom prst="rect">
@@ -5956,7 +6915,7 @@
         </p:nvSpPr>
         <p:spPr>
           <a:xfrm>
-            <a:off x="648929" y="629266"/>
+            <a:off x="648929" y="972166"/>
             <a:ext cx="4944152" cy="1622321"/>
           </a:xfrm>
         </p:spPr>
@@ -5971,7 +6930,7 @@
                 <a:solidFill>
                   <a:schemeClr val="tx1"/>
                 </a:solidFill>
-                <a:latin typeface="+mj-lt"/>
+                <a:latin typeface="Arial"/>
                 <a:ea typeface="+mj-ea"/>
                 <a:cs typeface="+mj-cs"/>
               </a:rPr>
@@ -6013,7 +6972,7 @@
                 <a14:m>
                   <m:oMath xmlns:m="http://schemas.openxmlformats.org/officeDocument/2006/math">
                     <m:r>
-                      <a:rPr lang="en-US" sz="2000" b="0" i="1">
+                      <a:rPr lang="en-US" sz="1600" b="0" i="1">
                         <a:latin typeface="Cambria Math" panose="02040503050406030204" pitchFamily="18" charset="0"/>
                       </a:rPr>
                       <m:t>𝑥</m:t>
@@ -6021,14 +6980,14 @@
                     <m:d>
                       <m:dPr>
                         <m:ctrlPr>
-                          <a:rPr lang="en-US" sz="2000" b="0" i="1">
+                          <a:rPr lang="en-US" sz="1600" b="0" i="1">
                             <a:latin typeface="Cambria Math" panose="02040503050406030204" pitchFamily="18" charset="0"/>
                           </a:rPr>
                         </m:ctrlPr>
                       </m:dPr>
                       <m:e>
                         <m:r>
-                          <a:rPr lang="en-US" sz="2000" b="0" i="1">
+                          <a:rPr lang="en-US" sz="1600" b="0" i="1">
                             <a:latin typeface="Cambria Math" panose="02040503050406030204" pitchFamily="18" charset="0"/>
                           </a:rPr>
                           <m:t>𝑡</m:t>
@@ -6040,7 +6999,7 @@
                         <m:chr m:val="⇔"/>
                         <m:vertJc m:val="bot"/>
                         <m:ctrlPr>
-                          <a:rPr lang="en-US" sz="2000" b="0" i="1">
+                          <a:rPr lang="en-US" sz="1600" b="0" i="1">
                             <a:latin typeface="Cambria Math" panose="02040503050406030204" pitchFamily="18" charset="0"/>
                           </a:rPr>
                         </m:ctrlPr>
@@ -6050,13 +7009,13 @@
                           <m:rPr>
                             <m:brk m:alnAt="2"/>
                           </m:rPr>
-                          <a:rPr lang="en-US" sz="2000" b="0" i="1">
+                          <a:rPr lang="en-US" sz="1600" b="0" i="1">
                             <a:latin typeface="Cambria Math" panose="02040503050406030204" pitchFamily="18" charset="0"/>
                           </a:rPr>
                           <m:t>𝐹</m:t>
                         </m:r>
                         <m:r>
-                          <a:rPr lang="en-US" sz="2000" b="0" i="1">
+                          <a:rPr lang="en-US" sz="1600" b="0" i="1">
                             <a:latin typeface="Cambria Math" panose="02040503050406030204" pitchFamily="18" charset="0"/>
                           </a:rPr>
                           <m:t>𝑇</m:t>
@@ -6064,7 +7023,7 @@
                       </m:e>
                     </m:groupChr>
                     <m:r>
-                      <a:rPr lang="en-US" sz="2000" b="0" i="1">
+                      <a:rPr lang="en-US" sz="1600" b="0" i="1">
                         <a:latin typeface="Cambria Math" panose="02040503050406030204" pitchFamily="18" charset="0"/>
                       </a:rPr>
                       <m:t>𝑋</m:t>
@@ -6072,14 +7031,14 @@
                     <m:d>
                       <m:dPr>
                         <m:ctrlPr>
-                          <a:rPr lang="en-US" sz="2000" b="0" i="1">
+                          <a:rPr lang="en-US" sz="1600" b="0" i="1">
                             <a:latin typeface="Cambria Math" panose="02040503050406030204" pitchFamily="18" charset="0"/>
                           </a:rPr>
                         </m:ctrlPr>
                       </m:dPr>
                       <m:e>
                         <m:r>
-                          <a:rPr lang="en-US" sz="2000" b="0" i="1">
+                          <a:rPr lang="en-US" sz="1600" b="0" i="1">
                             <a:latin typeface="Cambria Math" panose="02040503050406030204" pitchFamily="18" charset="0"/>
                           </a:rPr>
                           <m:t>𝑓</m:t>
@@ -6088,35 +7047,35 @@
                     </m:d>
                   </m:oMath>
                 </a14:m>
-                <a:endParaRPr lang="en-US" sz="2000" b="0"/>
+                <a:endParaRPr lang="en-US" sz="1600" b="0"/>
               </a:p>
               <a:p>
                 <a:r>
-                  <a:rPr lang="en-US" sz="2000"/>
+                  <a:rPr lang="en-US" sz="1600"/>
                   <a:t>Filter response </a:t>
                 </a:r>
                 <a14:m>
                   <m:oMath xmlns:m="http://schemas.openxmlformats.org/officeDocument/2006/math">
                     <m:r>
-                      <a:rPr lang="en-US" sz="2000" b="0" i="1">
+                      <a:rPr lang="en-US" sz="1600" b="0" i="1">
                         <a:latin typeface="Cambria Math" panose="02040503050406030204" pitchFamily="18" charset="0"/>
                       </a:rPr>
                       <m:t>h</m:t>
                     </m:r>
                     <m:r>
-                      <a:rPr lang="en-US" sz="2000" b="0" i="1">
+                      <a:rPr lang="en-US" sz="1600" b="0" i="1">
                         <a:latin typeface="Cambria Math" panose="02040503050406030204" pitchFamily="18" charset="0"/>
                       </a:rPr>
                       <m:t>(</m:t>
                     </m:r>
                     <m:r>
-                      <a:rPr lang="en-US" sz="2000" b="0" i="1">
+                      <a:rPr lang="en-US" sz="1600" b="0" i="1">
                         <a:latin typeface="Cambria Math" panose="02040503050406030204" pitchFamily="18" charset="0"/>
                       </a:rPr>
                       <m:t>𝑡</m:t>
                     </m:r>
                     <m:r>
-                      <a:rPr lang="en-US" sz="2000" b="0" i="1">
+                      <a:rPr lang="en-US" sz="1600" b="0" i="1">
                         <a:latin typeface="Cambria Math" panose="02040503050406030204" pitchFamily="18" charset="0"/>
                       </a:rPr>
                       <m:t>)</m:t>
@@ -6124,7 +7083,7 @@
                   </m:oMath>
                 </a14:m>
                 <a:r>
-                  <a:rPr lang="en-US" sz="2000"/>
+                  <a:rPr lang="en-US" sz="1600"/>
                   <a:t> to a narrow pulse on the input (think of it as a delta-function)</a:t>
                 </a:r>
               </a:p>
@@ -6132,25 +7091,25 @@
                 <a14:m>
                   <m:oMath xmlns:m="http://schemas.openxmlformats.org/officeDocument/2006/math">
                     <m:r>
-                      <a:rPr lang="en-US" sz="2000" b="0" i="1">
+                      <a:rPr lang="en-US" sz="1600" b="0" i="1">
                         <a:latin typeface="Cambria Math" panose="02040503050406030204" pitchFamily="18" charset="0"/>
                       </a:rPr>
                       <m:t>h</m:t>
                     </m:r>
                     <m:r>
-                      <a:rPr lang="en-US" sz="2000" b="0" i="1">
+                      <a:rPr lang="en-US" sz="1600" b="0" i="1">
                         <a:latin typeface="Cambria Math" panose="02040503050406030204" pitchFamily="18" charset="0"/>
                       </a:rPr>
                       <m:t>(</m:t>
                     </m:r>
                     <m:r>
-                      <a:rPr lang="en-US" sz="2000" b="0" i="1">
+                      <a:rPr lang="en-US" sz="1600" b="0" i="1">
                         <a:latin typeface="Cambria Math" panose="02040503050406030204" pitchFamily="18" charset="0"/>
                       </a:rPr>
                       <m:t>𝑡</m:t>
                     </m:r>
                     <m:r>
-                      <a:rPr lang="en-US" sz="2000" b="0" i="1">
+                      <a:rPr lang="en-US" sz="1600" b="0" i="1">
                         <a:latin typeface="Cambria Math" panose="02040503050406030204" pitchFamily="18" charset="0"/>
                       </a:rPr>
                       <m:t>)</m:t>
@@ -6160,7 +7119,7 @@
                         <m:chr m:val="⇔"/>
                         <m:vertJc m:val="bot"/>
                         <m:ctrlPr>
-                          <a:rPr lang="en-US" sz="2000" b="0" i="1">
+                          <a:rPr lang="en-US" sz="1600" b="0" i="1">
                             <a:latin typeface="Cambria Math" panose="02040503050406030204" pitchFamily="18" charset="0"/>
                           </a:rPr>
                         </m:ctrlPr>
@@ -6170,13 +7129,13 @@
                           <m:rPr>
                             <m:brk m:alnAt="2"/>
                           </m:rPr>
-                          <a:rPr lang="en-US" sz="2000" b="0" i="1">
+                          <a:rPr lang="en-US" sz="1600" b="0" i="1">
                             <a:latin typeface="Cambria Math" panose="02040503050406030204" pitchFamily="18" charset="0"/>
                           </a:rPr>
                           <m:t>𝐹</m:t>
                         </m:r>
                         <m:r>
-                          <a:rPr lang="en-US" sz="2000" b="0" i="1">
+                          <a:rPr lang="en-US" sz="1600" b="0" i="1">
                             <a:latin typeface="Cambria Math" panose="02040503050406030204" pitchFamily="18" charset="0"/>
                           </a:rPr>
                           <m:t>𝑇</m:t>
@@ -6184,60 +7143,60 @@
                       </m:e>
                     </m:groupChr>
                     <m:r>
-                      <a:rPr lang="en-US" sz="2000" b="0" i="1">
+                      <a:rPr lang="en-US" sz="1600" b="0" i="1">
                         <a:latin typeface="Cambria Math" panose="02040503050406030204" pitchFamily="18" charset="0"/>
                       </a:rPr>
                       <m:t>𝐻</m:t>
                     </m:r>
                     <m:r>
-                      <a:rPr lang="en-US" sz="2000" b="0" i="1">
+                      <a:rPr lang="en-US" sz="1600" b="0" i="1">
                         <a:latin typeface="Cambria Math" panose="02040503050406030204" pitchFamily="18" charset="0"/>
                       </a:rPr>
                       <m:t>(</m:t>
                     </m:r>
                     <m:r>
-                      <a:rPr lang="en-US" sz="2000" b="0" i="1">
+                      <a:rPr lang="en-US" sz="1600" b="0" i="1">
                         <a:latin typeface="Cambria Math" panose="02040503050406030204" pitchFamily="18" charset="0"/>
                       </a:rPr>
                       <m:t>𝑓</m:t>
                     </m:r>
                     <m:r>
-                      <a:rPr lang="en-US" sz="2000" b="0" i="1">
+                      <a:rPr lang="en-US" sz="1600" b="0" i="1">
                         <a:latin typeface="Cambria Math" panose="02040503050406030204" pitchFamily="18" charset="0"/>
                       </a:rPr>
                       <m:t>)</m:t>
                     </m:r>
                   </m:oMath>
                 </a14:m>
-                <a:endParaRPr lang="en-US" sz="2000"/>
+                <a:endParaRPr lang="en-US" sz="1600"/>
               </a:p>
               <a:p>
                 <a:r>
-                  <a:rPr lang="en-US" sz="2000"/>
+                  <a:rPr lang="en-US" sz="1600"/>
                   <a:t>The response of filter on a composed input </a:t>
                 </a:r>
                 <a14:m>
                   <m:oMath xmlns:m="http://schemas.openxmlformats.org/officeDocument/2006/math">
                     <m:r>
-                      <a:rPr lang="en-US" sz="2000" b="0" i="1">
+                      <a:rPr lang="en-US" sz="1600" b="0" i="1">
                         <a:latin typeface="Cambria Math" panose="02040503050406030204" pitchFamily="18" charset="0"/>
                       </a:rPr>
                       <m:t>𝑥</m:t>
                     </m:r>
                     <m:r>
-                      <a:rPr lang="en-US" sz="2000" b="0" i="1">
+                      <a:rPr lang="en-US" sz="1600" b="0" i="1">
                         <a:latin typeface="Cambria Math" panose="02040503050406030204" pitchFamily="18" charset="0"/>
                       </a:rPr>
                       <m:t>(</m:t>
                     </m:r>
                     <m:r>
-                      <a:rPr lang="en-US" sz="2000" b="0" i="1">
+                      <a:rPr lang="en-US" sz="1600" b="0" i="1">
                         <a:latin typeface="Cambria Math" panose="02040503050406030204" pitchFamily="18" charset="0"/>
                       </a:rPr>
                       <m:t>𝑡</m:t>
                     </m:r>
                     <m:r>
-                      <a:rPr lang="en-US" sz="2000" b="0" i="1">
+                      <a:rPr lang="en-US" sz="1600" b="0" i="1">
                         <a:latin typeface="Cambria Math" panose="02040503050406030204" pitchFamily="18" charset="0"/>
                       </a:rPr>
                       <m:t>)</m:t>
@@ -6245,31 +7204,31 @@
                   </m:oMath>
                 </a14:m>
                 <a:r>
-                  <a:rPr lang="en-US" sz="2000"/>
+                  <a:rPr lang="en-US" sz="1600"/>
                   <a:t> is a correlation of </a:t>
                 </a:r>
                 <a14:m>
                   <m:oMath xmlns:m="http://schemas.openxmlformats.org/officeDocument/2006/math">
                     <m:r>
-                      <a:rPr lang="en-US" sz="2000" b="0" i="1">
+                      <a:rPr lang="en-US" sz="1600" b="0" i="1">
                         <a:latin typeface="Cambria Math" panose="02040503050406030204" pitchFamily="18" charset="0"/>
                       </a:rPr>
                       <m:t>𝑥</m:t>
                     </m:r>
                     <m:r>
-                      <a:rPr lang="en-US" sz="2000" b="0" i="1">
+                      <a:rPr lang="en-US" sz="1600" b="0" i="1">
                         <a:latin typeface="Cambria Math" panose="02040503050406030204" pitchFamily="18" charset="0"/>
                       </a:rPr>
                       <m:t>(</m:t>
                     </m:r>
                     <m:r>
-                      <a:rPr lang="en-US" sz="2000" b="0" i="1">
+                      <a:rPr lang="en-US" sz="1600" b="0" i="1">
                         <a:latin typeface="Cambria Math" panose="02040503050406030204" pitchFamily="18" charset="0"/>
                       </a:rPr>
                       <m:t>𝑡</m:t>
                     </m:r>
                     <m:r>
-                      <a:rPr lang="en-US" sz="2000" b="0" i="1">
+                      <a:rPr lang="en-US" sz="1600" b="0" i="1">
                         <a:latin typeface="Cambria Math" panose="02040503050406030204" pitchFamily="18" charset="0"/>
                       </a:rPr>
                       <m:t>)</m:t>
@@ -6277,31 +7236,31 @@
                   </m:oMath>
                 </a14:m>
                 <a:r>
-                  <a:rPr lang="en-US" sz="2000"/>
+                  <a:rPr lang="en-US" sz="1600"/>
                   <a:t> and </a:t>
                 </a:r>
                 <a14:m>
                   <m:oMath xmlns:m="http://schemas.openxmlformats.org/officeDocument/2006/math">
                     <m:r>
-                      <a:rPr lang="en-US" sz="2000" b="0" i="1">
+                      <a:rPr lang="en-US" sz="1600" b="0" i="1">
                         <a:latin typeface="Cambria Math" panose="02040503050406030204" pitchFamily="18" charset="0"/>
                       </a:rPr>
                       <m:t>h</m:t>
                     </m:r>
                     <m:r>
-                      <a:rPr lang="en-US" sz="2000" b="0" i="1">
+                      <a:rPr lang="en-US" sz="1600" b="0" i="1">
                         <a:latin typeface="Cambria Math" panose="02040503050406030204" pitchFamily="18" charset="0"/>
                       </a:rPr>
                       <m:t>(−</m:t>
                     </m:r>
                     <m:r>
-                      <a:rPr lang="en-US" sz="2000" b="0" i="1">
+                      <a:rPr lang="en-US" sz="1600" b="0" i="1">
                         <a:latin typeface="Cambria Math" panose="02040503050406030204" pitchFamily="18" charset="0"/>
                       </a:rPr>
                       <m:t>𝑡</m:t>
                     </m:r>
                     <m:r>
-                      <a:rPr lang="en-US" sz="2000" b="0" i="1">
+                      <a:rPr lang="en-US" sz="1600" b="0" i="1">
                         <a:latin typeface="Cambria Math" panose="02040503050406030204" pitchFamily="18" charset="0"/>
                       </a:rPr>
                       <m:t>)</m:t>
@@ -6309,13 +7268,13 @@
                   </m:oMath>
                 </a14:m>
                 <a:r>
-                  <a:rPr lang="en-US" sz="2000"/>
+                  <a:rPr lang="en-US" sz="1600"/>
                   <a:t> </a:t>
                 </a:r>
               </a:p>
               <a:p>
                 <a:r>
-                  <a:rPr lang="en-US" sz="2000"/>
+                  <a:rPr lang="en-US" sz="1600"/>
                   <a:t>By Correlation Theorem: </a:t>
                 </a:r>
               </a:p>
@@ -6324,7 +7283,7 @@
                 <a14:m>
                   <m:oMath xmlns:m="http://schemas.openxmlformats.org/officeDocument/2006/math">
                     <m:r>
-                      <a:rPr lang="en-US" sz="2000" b="0" i="1">
+                      <a:rPr lang="en-US" sz="1600" b="0" i="1">
                         <a:latin typeface="Cambria Math" panose="02040503050406030204" pitchFamily="18" charset="0"/>
                       </a:rPr>
                       <m:t>𝑌</m:t>
@@ -6332,14 +7291,14 @@
                     <m:d>
                       <m:dPr>
                         <m:ctrlPr>
-                          <a:rPr lang="en-US" sz="2000" b="0" i="1">
+                          <a:rPr lang="en-US" sz="1600" b="0" i="1">
                             <a:latin typeface="Cambria Math" panose="02040503050406030204" pitchFamily="18" charset="0"/>
                           </a:rPr>
                         </m:ctrlPr>
                       </m:dPr>
                       <m:e>
                         <m:r>
-                          <a:rPr lang="en-US" sz="2000" b="0" i="1">
+                          <a:rPr lang="en-US" sz="1600" b="0" i="1">
                             <a:latin typeface="Cambria Math" panose="02040503050406030204" pitchFamily="18" charset="0"/>
                           </a:rPr>
                           <m:t>𝑓</m:t>
@@ -6347,13 +7306,13 @@
                       </m:e>
                     </m:d>
                     <m:r>
-                      <a:rPr lang="en-US" sz="2000" b="0" i="1">
+                      <a:rPr lang="en-US" sz="1600" b="0" i="1">
                         <a:latin typeface="Cambria Math" panose="02040503050406030204" pitchFamily="18" charset="0"/>
                       </a:rPr>
                       <m:t>=</m:t>
                     </m:r>
                     <m:r>
-                      <a:rPr lang="en-US" sz="2000" b="0" i="1">
+                      <a:rPr lang="en-US" sz="1600" b="0" i="1">
                         <a:latin typeface="Cambria Math" panose="02040503050406030204" pitchFamily="18" charset="0"/>
                       </a:rPr>
                       <m:t>𝑋</m:t>
@@ -6361,14 +7320,14 @@
                     <m:d>
                       <m:dPr>
                         <m:ctrlPr>
-                          <a:rPr lang="en-US" sz="2000" b="0" i="1">
+                          <a:rPr lang="en-US" sz="1600" b="0" i="1">
                             <a:latin typeface="Cambria Math" panose="02040503050406030204" pitchFamily="18" charset="0"/>
                           </a:rPr>
                         </m:ctrlPr>
                       </m:dPr>
                       <m:e>
                         <m:r>
-                          <a:rPr lang="en-US" sz="2000" b="0" i="1">
+                          <a:rPr lang="en-US" sz="1600" b="0" i="1">
                             <a:latin typeface="Cambria Math" panose="02040503050406030204" pitchFamily="18" charset="0"/>
                           </a:rPr>
                           <m:t>𝑓</m:t>
@@ -6376,57 +7335,57 @@
                       </m:e>
                     </m:d>
                     <m:r>
-                      <a:rPr lang="en-US" sz="2000" b="0" i="1">
+                      <a:rPr lang="en-US" sz="1600" b="0" i="1">
                         <a:latin typeface="Cambria Math" panose="02040503050406030204" pitchFamily="18" charset="0"/>
                       </a:rPr>
                       <m:t>𝐻</m:t>
                     </m:r>
                     <m:r>
-                      <a:rPr lang="en-US" sz="2000" b="0" i="1">
+                      <a:rPr lang="en-US" sz="1600" b="0" i="1">
                         <a:latin typeface="Cambria Math" panose="02040503050406030204" pitchFamily="18" charset="0"/>
                       </a:rPr>
                       <m:t>(</m:t>
                     </m:r>
                     <m:r>
-                      <a:rPr lang="en-US" sz="2000" b="0" i="1">
+                      <a:rPr lang="en-US" sz="1600" b="0" i="1">
                         <a:latin typeface="Cambria Math" panose="02040503050406030204" pitchFamily="18" charset="0"/>
                       </a:rPr>
                       <m:t>𝑓</m:t>
                     </m:r>
                     <m:r>
-                      <a:rPr lang="en-US" sz="2000" b="0" i="1">
+                      <a:rPr lang="en-US" sz="1600" b="0" i="1">
                         <a:latin typeface="Cambria Math" panose="02040503050406030204" pitchFamily="18" charset="0"/>
                       </a:rPr>
                       <m:t>)</m:t>
                     </m:r>
                   </m:oMath>
                 </a14:m>
-                <a:endParaRPr lang="en-US" sz="2000"/>
+                <a:endParaRPr lang="en-US" sz="1600"/>
               </a:p>
               <a:p>
                 <a:pPr marL="0"/>
                 <a14:m>
                   <m:oMath xmlns:m="http://schemas.openxmlformats.org/officeDocument/2006/math">
                     <m:r>
-                      <a:rPr lang="en-US" sz="2000" b="0" i="1">
+                      <a:rPr lang="en-US" sz="1600" b="0" i="1">
                         <a:latin typeface="Cambria Math" panose="02040503050406030204" pitchFamily="18" charset="0"/>
                       </a:rPr>
                       <m:t>𝑦</m:t>
                     </m:r>
                     <m:r>
-                      <a:rPr lang="en-US" sz="2000" b="0" i="1">
+                      <a:rPr lang="en-US" sz="1600" b="0" i="1">
                         <a:latin typeface="Cambria Math" panose="02040503050406030204" pitchFamily="18" charset="0"/>
                       </a:rPr>
                       <m:t>(</m:t>
                     </m:r>
                     <m:r>
-                      <a:rPr lang="en-US" sz="2000" b="0" i="1">
+                      <a:rPr lang="en-US" sz="1600" b="0" i="1">
                         <a:latin typeface="Cambria Math" panose="02040503050406030204" pitchFamily="18" charset="0"/>
                       </a:rPr>
                       <m:t>𝑡</m:t>
                     </m:r>
                     <m:r>
-                      <a:rPr lang="en-US" sz="2000" b="0" i="1">
+                      <a:rPr lang="en-US" sz="1600" b="0" i="1">
                         <a:latin typeface="Cambria Math" panose="02040503050406030204" pitchFamily="18" charset="0"/>
                       </a:rPr>
                       <m:t>)</m:t>
@@ -6434,7 +7393,7 @@
                   </m:oMath>
                 </a14:m>
                 <a:r>
-                  <a:rPr lang="en-US" sz="2000"/>
+                  <a:rPr lang="en-US" sz="1600"/>
                   <a:t> is the output of the filter. </a:t>
                 </a:r>
               </a:p>
@@ -6487,30 +7446,202 @@
       </mc:AlternateContent>
       <p:sp>
         <p:nvSpPr>
-          <p:cNvPr id="7" name="Slide Number Placeholder 6">
-            <a:extLst>
-              <a:ext uri="{FF2B5EF4-FFF2-40B4-BE49-F238E27FC236}">
-                <a16:creationId xmlns:a16="http://schemas.microsoft.com/office/drawing/2014/main" id="{A4DCE023-2571-4CA6-96A4-57E7E4AB51AB}"/>
-              </a:ext>
-            </a:extLst>
-          </p:cNvPr>
-          <p:cNvSpPr>
-            <a:spLocks noGrp="1"/>
-          </p:cNvSpPr>
-          <p:nvPr>
-            <p:ph type="sldNum" sz="quarter" idx="12"/>
-          </p:nvPr>
-        </p:nvSpPr>
-        <p:spPr/>
-        <p:txBody>
-          <a:bodyPr/>
-          <a:lstStyle/>
-          <a:p>
-            <a:fld id="{1CEDF748-80AB-48FE-8ADB-9504DB224582}" type="slidenum">
-              <a:rPr lang="en-US" smtClean="0"/>
-              <a:t>6</a:t>
-            </a:fld>
-            <a:endParaRPr lang="en-US"/>
+          <p:cNvPr id="14" name="DSPIRA 1"/>
+          <p:cNvSpPr>
+            <a:spLocks noGrp="1"/>
+          </p:cNvSpPr>
+          <p:nvPr/>
+        </p:nvSpPr>
+        <p:spPr>
+          <a:xfrm>
+            <a:off x="0" y="0"/>
+            <a:ext cx="12192000" cy="342900"/>
+          </a:xfrm>
+          <a:prstGeom prst="rect">
+            <a:avLst/>
+          </a:prstGeom>
+          <a:solidFill>
+            <a:srgbClr val="FFFFFF"/>
+          </a:solidFill>
+          <a:ln w="0">
+            <a:noFill/>
+          </a:ln>
+        </p:spPr>
+      </p:sp>
+      <p:sp>
+        <p:nvSpPr>
+          <p:cNvPr id="15" name="DSPIRA 2"/>
+          <p:cNvSpPr>
+            <a:spLocks noGrp="1"/>
+          </p:cNvSpPr>
+          <p:nvPr/>
+        </p:nvSpPr>
+        <p:spPr>
+          <a:xfrm>
+            <a:off x="0" y="7200900"/>
+            <a:ext cx="12192000" cy="342900"/>
+          </a:xfrm>
+          <a:prstGeom prst="rect">
+            <a:avLst/>
+          </a:prstGeom>
+          <a:solidFill>
+            <a:srgbClr val="FFFFFF"/>
+          </a:solidFill>
+          <a:ln w="0">
+            <a:noFill/>
+          </a:ln>
+        </p:spPr>
+      </p:sp>
+      <p:sp>
+        <p:nvSpPr>
+          <p:cNvPr id="16" name="DSPIRA 3"/>
+          <p:cNvSpPr>
+            <a:spLocks noGrp="1"/>
+          </p:cNvSpPr>
+          <p:nvPr/>
+        </p:nvSpPr>
+        <p:spPr>
+          <a:xfrm>
+            <a:off x="228600" y="76200"/>
+            <a:ext cx="4762500" cy="228600"/>
+          </a:xfrm>
+          <a:prstGeom prst="rect">
+            <a:avLst/>
+          </a:prstGeom>
+          <a:noFill/>
+          <a:ln w="0">
+            <a:noFill/>
+          </a:ln>
+        </p:spPr>
+        <p:txBody>
+          <a:bodyPr>
+            <a:noAutofit/>
+          </a:bodyPr>
+          <a:lstStyle/>
+          <a:p>
+            <a:pPr>
+              <a:defRPr sz="1200" b="1">
+                <a:solidFill>
+                  <a:srgbClr val="002855"/>
+                </a:solidFill>
+                <a:latin typeface="Arial"/>
+                <a:ea typeface="Arial"/>
+                <a:cs typeface="Arial"/>
+              </a:defRPr>
+            </a:pPr>
+            <a:r>
+              <a:rPr sz="1200" b="1">
+                <a:solidFill>
+                  <a:srgbClr val="002855"/>
+                </a:solidFill>
+                <a:latin typeface="Arial"/>
+                <a:ea typeface="Arial"/>
+                <a:cs typeface="Arial"/>
+              </a:rPr>
+              <a:t>WVU DSPIRA</a:t>
+            </a:r>
+          </a:p>
+        </p:txBody>
+      </p:sp>
+      <p:sp>
+        <p:nvSpPr>
+          <p:cNvPr id="17" name="DSPIRA 4"/>
+          <p:cNvSpPr>
+            <a:spLocks noGrp="1"/>
+          </p:cNvSpPr>
+          <p:nvPr/>
+        </p:nvSpPr>
+        <p:spPr>
+          <a:xfrm>
+            <a:off x="228600" y="7277100"/>
+            <a:ext cx="6667500" cy="228600"/>
+          </a:xfrm>
+          <a:prstGeom prst="rect">
+            <a:avLst/>
+          </a:prstGeom>
+          <a:noFill/>
+          <a:ln w="0">
+            <a:noFill/>
+          </a:ln>
+        </p:spPr>
+        <p:txBody>
+          <a:bodyPr>
+            <a:noAutofit/>
+          </a:bodyPr>
+          <a:lstStyle/>
+          <a:p>
+            <a:pPr>
+              <a:defRPr sz="900" b="0">
+                <a:solidFill>
+                  <a:srgbClr val="002855"/>
+                </a:solidFill>
+                <a:latin typeface="Arial"/>
+                <a:ea typeface="Arial"/>
+                <a:cs typeface="Arial"/>
+              </a:defRPr>
+            </a:pPr>
+            <a:r>
+              <a:rPr sz="900" b="0">
+                <a:solidFill>
+                  <a:srgbClr val="002855"/>
+                </a:solidFill>
+                <a:latin typeface="Arial"/>
+                <a:ea typeface="Arial"/>
+                <a:cs typeface="Arial"/>
+              </a:rPr>
+              <a:t>wvurail.org/dspira</a:t>
+            </a:r>
+          </a:p>
+        </p:txBody>
+      </p:sp>
+      <p:sp>
+        <p:nvSpPr>
+          <p:cNvPr id="18" name="DSPIRA 5"/>
+          <p:cNvSpPr>
+            <a:spLocks noGrp="1"/>
+          </p:cNvSpPr>
+          <p:nvPr/>
+        </p:nvSpPr>
+        <p:spPr>
+          <a:xfrm>
+            <a:off x="11191875" y="7277100"/>
+            <a:ext cx="762000" cy="228600"/>
+          </a:xfrm>
+          <a:prstGeom prst="rect">
+            <a:avLst/>
+          </a:prstGeom>
+          <a:noFill/>
+          <a:ln w="0">
+            <a:noFill/>
+          </a:ln>
+        </p:spPr>
+        <p:txBody>
+          <a:bodyPr>
+            <a:noAutofit/>
+          </a:bodyPr>
+          <a:lstStyle/>
+          <a:p>
+            <a:pPr>
+              <a:defRPr sz="900" b="0">
+                <a:solidFill>
+                  <a:srgbClr val="002855"/>
+                </a:solidFill>
+                <a:latin typeface="Arial"/>
+                <a:ea typeface="Arial"/>
+                <a:cs typeface="Arial"/>
+              </a:defRPr>
+            </a:pPr>
+            <a:r>
+              <a:rPr sz="900" b="0">
+                <a:solidFill>
+                  <a:srgbClr val="002855"/>
+                </a:solidFill>
+                <a:latin typeface="Arial"/>
+                <a:ea typeface="Arial"/>
+                <a:cs typeface="Arial"/>
+              </a:rPr>
+              <a:t>6 of 11</a:t>
+            </a:r>
           </a:p>
         </p:txBody>
       </p:sp>
@@ -6577,7 +7708,7 @@
         </p:nvSpPr>
         <p:spPr>
           <a:xfrm>
-            <a:off x="6092950" y="0"/>
+            <a:off x="6092950" y="342900"/>
             <a:ext cx="6099050" cy="6858000"/>
           </a:xfrm>
           <a:prstGeom prst="rect">
@@ -6640,7 +7771,7 @@
         </p:nvSpPr>
         <p:spPr>
           <a:xfrm>
-            <a:off x="6577582" y="484632"/>
+            <a:off x="6577582" y="827532"/>
             <a:ext cx="5130204" cy="5739187"/>
           </a:xfrm>
           <a:prstGeom prst="roundRect">
@@ -6717,7 +7848,7 @@
         </p:blipFill>
         <p:spPr>
           <a:xfrm>
-            <a:off x="6573829" y="1427584"/>
+            <a:off x="6573829" y="1770484"/>
             <a:ext cx="5063414" cy="3797559"/>
           </a:xfrm>
           <a:prstGeom prst="rect">
@@ -6744,7 +7875,7 @@
         </p:nvSpPr>
         <p:spPr>
           <a:xfrm>
-            <a:off x="648929" y="629266"/>
+            <a:off x="648929" y="972166"/>
             <a:ext cx="4944152" cy="1622321"/>
           </a:xfrm>
         </p:spPr>
@@ -6759,7 +7890,7 @@
                 <a:solidFill>
                   <a:schemeClr val="tx1"/>
                 </a:solidFill>
-                <a:latin typeface="+mj-lt"/>
+                <a:latin typeface="Arial"/>
                 <a:ea typeface="+mj-ea"/>
                 <a:cs typeface="+mj-cs"/>
               </a:rPr>
@@ -6786,7 +7917,7 @@
         </p:nvSpPr>
         <p:spPr>
           <a:xfrm>
-            <a:off x="648930" y="2438400"/>
+            <a:off x="648930" y="2781300"/>
             <a:ext cx="4944151" cy="3785419"/>
           </a:xfrm>
         </p:spPr>
@@ -6797,25 +7928,25 @@
           <a:lstStyle/>
           <a:p>
             <a:r>
-              <a:rPr lang="en-US" sz="2400"/>
+              <a:rPr lang="en-US" sz="1920"/>
               <a:t>Low pass = suppresses high frequencies, passes low frequencies</a:t>
             </a:r>
           </a:p>
           <a:p>
             <a:r>
-              <a:rPr lang="en-US" sz="2400"/>
+              <a:rPr lang="en-US" sz="1920"/>
               <a:t>High pass = passes high frequencies and suppresses low</a:t>
             </a:r>
           </a:p>
           <a:p>
             <a:r>
-              <a:rPr lang="en-US" sz="2400"/>
+              <a:rPr lang="en-US" sz="1920"/>
               <a:t>Band pass = passes medium frequencies, suppresses low and high</a:t>
             </a:r>
           </a:p>
           <a:p>
             <a:r>
-              <a:rPr lang="en-US" sz="2400"/>
+              <a:rPr lang="en-US" sz="1920"/>
               <a:t>Band stop</a:t>
             </a:r>
           </a:p>
@@ -6823,55 +7954,202 @@
       </p:sp>
       <p:sp>
         <p:nvSpPr>
-          <p:cNvPr id="5" name="Slide Number Placeholder 4">
-            <a:extLst>
-              <a:ext uri="{FF2B5EF4-FFF2-40B4-BE49-F238E27FC236}">
-                <a16:creationId xmlns:a16="http://schemas.microsoft.com/office/drawing/2014/main" id="{438F615B-8455-4A65-971E-52A76B4BDF7E}"/>
-              </a:ext>
-            </a:extLst>
-          </p:cNvPr>
-          <p:cNvSpPr>
-            <a:spLocks noGrp="1"/>
-          </p:cNvSpPr>
-          <p:nvPr>
-            <p:ph type="sldNum" sz="quarter" idx="12"/>
-          </p:nvPr>
-        </p:nvSpPr>
-        <p:spPr>
-          <a:xfrm>
-            <a:off x="10356782" y="6356350"/>
-            <a:ext cx="997017" cy="365125"/>
-          </a:xfrm>
-        </p:spPr>
-        <p:txBody>
-          <a:bodyPr vert="horz" lIns="91440" tIns="45720" rIns="91440" bIns="45720" rtlCol="0" anchor="ctr">
-            <a:normAutofit/>
+          <p:cNvPr id="15" name="DSPIRA 1"/>
+          <p:cNvSpPr>
+            <a:spLocks noGrp="1"/>
+          </p:cNvSpPr>
+          <p:nvPr/>
+        </p:nvSpPr>
+        <p:spPr>
+          <a:xfrm>
+            <a:off x="0" y="0"/>
+            <a:ext cx="12192000" cy="342900"/>
+          </a:xfrm>
+          <a:prstGeom prst="rect">
+            <a:avLst/>
+          </a:prstGeom>
+          <a:solidFill>
+            <a:srgbClr val="FFFFFF"/>
+          </a:solidFill>
+          <a:ln w="0">
+            <a:noFill/>
+          </a:ln>
+        </p:spPr>
+      </p:sp>
+      <p:sp>
+        <p:nvSpPr>
+          <p:cNvPr id="16" name="DSPIRA 2"/>
+          <p:cNvSpPr>
+            <a:spLocks noGrp="1"/>
+          </p:cNvSpPr>
+          <p:nvPr/>
+        </p:nvSpPr>
+        <p:spPr>
+          <a:xfrm>
+            <a:off x="0" y="7200900"/>
+            <a:ext cx="12192000" cy="342900"/>
+          </a:xfrm>
+          <a:prstGeom prst="rect">
+            <a:avLst/>
+          </a:prstGeom>
+          <a:solidFill>
+            <a:srgbClr val="FFFFFF"/>
+          </a:solidFill>
+          <a:ln w="0">
+            <a:noFill/>
+          </a:ln>
+        </p:spPr>
+      </p:sp>
+      <p:sp>
+        <p:nvSpPr>
+          <p:cNvPr id="17" name="DSPIRA 3"/>
+          <p:cNvSpPr>
+            <a:spLocks noGrp="1"/>
+          </p:cNvSpPr>
+          <p:nvPr/>
+        </p:nvSpPr>
+        <p:spPr>
+          <a:xfrm>
+            <a:off x="228600" y="76200"/>
+            <a:ext cx="4762500" cy="228600"/>
+          </a:xfrm>
+          <a:prstGeom prst="rect">
+            <a:avLst/>
+          </a:prstGeom>
+          <a:noFill/>
+          <a:ln w="0">
+            <a:noFill/>
+          </a:ln>
+        </p:spPr>
+        <p:txBody>
+          <a:bodyPr>
+            <a:noAutofit/>
           </a:bodyPr>
           <a:lstStyle/>
           <a:p>
             <a:pPr>
-              <a:spcAft>
-                <a:spcPts val="600"/>
-              </a:spcAft>
+              <a:defRPr sz="1200" b="1">
+                <a:solidFill>
+                  <a:srgbClr val="002855"/>
+                </a:solidFill>
+                <a:latin typeface="Arial"/>
+                <a:ea typeface="Arial"/>
+                <a:cs typeface="Arial"/>
+              </a:defRPr>
             </a:pPr>
-            <a:fld id="{1CEDF748-80AB-48FE-8ADB-9504DB224582}" type="slidenum">
-              <a:rPr lang="en-US">
+            <a:r>
+              <a:rPr sz="1200" b="1">
                 <a:solidFill>
-                  <a:srgbClr val="404040"/>
+                  <a:srgbClr val="002855"/>
                 </a:solidFill>
+                <a:latin typeface="Arial"/>
+                <a:ea typeface="Arial"/>
+                <a:cs typeface="Arial"/>
               </a:rPr>
-              <a:pPr>
-                <a:spcAft>
-                  <a:spcPts val="600"/>
-                </a:spcAft>
-              </a:pPr>
-              <a:t>7</a:t>
-            </a:fld>
-            <a:endParaRPr lang="en-US">
-              <a:solidFill>
-                <a:srgbClr val="404040"/>
-              </a:solidFill>
-            </a:endParaRPr>
+              <a:t>WVU DSPIRA</a:t>
+            </a:r>
+          </a:p>
+        </p:txBody>
+      </p:sp>
+      <p:sp>
+        <p:nvSpPr>
+          <p:cNvPr id="18" name="DSPIRA 4"/>
+          <p:cNvSpPr>
+            <a:spLocks noGrp="1"/>
+          </p:cNvSpPr>
+          <p:nvPr/>
+        </p:nvSpPr>
+        <p:spPr>
+          <a:xfrm>
+            <a:off x="228600" y="7277100"/>
+            <a:ext cx="6667500" cy="228600"/>
+          </a:xfrm>
+          <a:prstGeom prst="rect">
+            <a:avLst/>
+          </a:prstGeom>
+          <a:noFill/>
+          <a:ln w="0">
+            <a:noFill/>
+          </a:ln>
+        </p:spPr>
+        <p:txBody>
+          <a:bodyPr>
+            <a:noAutofit/>
+          </a:bodyPr>
+          <a:lstStyle/>
+          <a:p>
+            <a:pPr>
+              <a:defRPr sz="900" b="0">
+                <a:solidFill>
+                  <a:srgbClr val="002855"/>
+                </a:solidFill>
+                <a:latin typeface="Arial"/>
+                <a:ea typeface="Arial"/>
+                <a:cs typeface="Arial"/>
+              </a:defRPr>
+            </a:pPr>
+            <a:r>
+              <a:rPr sz="900" b="0">
+                <a:solidFill>
+                  <a:srgbClr val="002855"/>
+                </a:solidFill>
+                <a:latin typeface="Arial"/>
+                <a:ea typeface="Arial"/>
+                <a:cs typeface="Arial"/>
+              </a:rPr>
+              <a:t>wvurail.org/dspira</a:t>
+            </a:r>
+          </a:p>
+        </p:txBody>
+      </p:sp>
+      <p:sp>
+        <p:nvSpPr>
+          <p:cNvPr id="19" name="DSPIRA 5"/>
+          <p:cNvSpPr>
+            <a:spLocks noGrp="1"/>
+          </p:cNvSpPr>
+          <p:nvPr/>
+        </p:nvSpPr>
+        <p:spPr>
+          <a:xfrm>
+            <a:off x="11191875" y="7277100"/>
+            <a:ext cx="762000" cy="228600"/>
+          </a:xfrm>
+          <a:prstGeom prst="rect">
+            <a:avLst/>
+          </a:prstGeom>
+          <a:noFill/>
+          <a:ln w="0">
+            <a:noFill/>
+          </a:ln>
+        </p:spPr>
+        <p:txBody>
+          <a:bodyPr>
+            <a:noAutofit/>
+          </a:bodyPr>
+          <a:lstStyle/>
+          <a:p>
+            <a:pPr>
+              <a:defRPr sz="900" b="0">
+                <a:solidFill>
+                  <a:srgbClr val="002855"/>
+                </a:solidFill>
+                <a:latin typeface="Arial"/>
+                <a:ea typeface="Arial"/>
+                <a:cs typeface="Arial"/>
+              </a:defRPr>
+            </a:pPr>
+            <a:r>
+              <a:rPr sz="900" b="0">
+                <a:solidFill>
+                  <a:srgbClr val="002855"/>
+                </a:solidFill>
+                <a:latin typeface="Arial"/>
+                <a:ea typeface="Arial"/>
+                <a:cs typeface="Arial"/>
+              </a:rPr>
+              <a:t>7 of 11</a:t>
+            </a:r>
           </a:p>
         </p:txBody>
       </p:sp>
@@ -6938,7 +8216,7 @@
         </p:nvSpPr>
         <p:spPr>
           <a:xfrm rot="16200000">
-            <a:off x="800100" y="1491343"/>
+            <a:off x="800100" y="1834243"/>
             <a:ext cx="3333749" cy="3499103"/>
           </a:xfrm>
           <a:prstGeom prst="downArrow">
@@ -7007,7 +8285,7 @@
         </p:blipFill>
         <p:spPr>
           <a:xfrm>
-            <a:off x="4777316" y="885073"/>
+            <a:off x="4777316" y="1227973"/>
             <a:ext cx="6780700" cy="5085524"/>
           </a:xfrm>
           <a:prstGeom prst="rect">
@@ -7033,7 +8311,7 @@
         </p:nvSpPr>
         <p:spPr>
           <a:xfrm>
-            <a:off x="1028700" y="1967266"/>
+            <a:off x="1028700" y="2310166"/>
             <a:ext cx="2628900" cy="2547257"/>
           </a:xfrm>
           <a:noFill/>
@@ -7046,7 +8324,7 @@
           <a:p>
             <a:pPr algn="ctr"/>
             <a:r>
-              <a:rPr lang="en-US" sz="3600">
+              <a:rPr lang="en-US" sz="2880">
                 <a:solidFill>
                   <a:srgbClr val="FFFFFF"/>
                 </a:solidFill>
@@ -7058,59 +8336,202 @@
       </p:sp>
       <p:sp>
         <p:nvSpPr>
-          <p:cNvPr id="3" name="Slide Number Placeholder 2">
-            <a:extLst>
-              <a:ext uri="{FF2B5EF4-FFF2-40B4-BE49-F238E27FC236}">
-                <a16:creationId xmlns:a16="http://schemas.microsoft.com/office/drawing/2014/main" id="{A233263A-2BD5-4398-B779-B585C2E2C253}"/>
-              </a:ext>
-            </a:extLst>
-          </p:cNvPr>
-          <p:cNvSpPr>
-            <a:spLocks noGrp="1"/>
-          </p:cNvSpPr>
-          <p:nvPr>
-            <p:ph type="sldNum" sz="quarter" idx="12"/>
-          </p:nvPr>
-        </p:nvSpPr>
-        <p:spPr>
-          <a:xfrm>
-            <a:off x="11034184" y="6356350"/>
-            <a:ext cx="514349" cy="365125"/>
-          </a:xfrm>
+          <p:cNvPr id="10" name="DSPIRA 1"/>
+          <p:cNvSpPr>
+            <a:spLocks noGrp="1"/>
+          </p:cNvSpPr>
+          <p:nvPr/>
+        </p:nvSpPr>
+        <p:spPr>
+          <a:xfrm>
+            <a:off x="0" y="0"/>
+            <a:ext cx="12192000" cy="342900"/>
+          </a:xfrm>
+          <a:prstGeom prst="rect">
+            <a:avLst/>
+          </a:prstGeom>
+          <a:solidFill>
+            <a:srgbClr val="FFFFFF"/>
+          </a:solidFill>
+          <a:ln w="0">
+            <a:noFill/>
+          </a:ln>
+        </p:spPr>
+      </p:sp>
+      <p:sp>
+        <p:nvSpPr>
+          <p:cNvPr id="11" name="DSPIRA 2"/>
+          <p:cNvSpPr>
+            <a:spLocks noGrp="1"/>
+          </p:cNvSpPr>
+          <p:nvPr/>
+        </p:nvSpPr>
+        <p:spPr>
+          <a:xfrm>
+            <a:off x="0" y="7200900"/>
+            <a:ext cx="12192000" cy="342900"/>
+          </a:xfrm>
+          <a:prstGeom prst="rect">
+            <a:avLst/>
+          </a:prstGeom>
+          <a:solidFill>
+            <a:srgbClr val="FFFFFF"/>
+          </a:solidFill>
+          <a:ln w="0">
+            <a:noFill/>
+          </a:ln>
+        </p:spPr>
+      </p:sp>
+      <p:sp>
+        <p:nvSpPr>
+          <p:cNvPr id="12" name="DSPIRA 3"/>
+          <p:cNvSpPr>
+            <a:spLocks noGrp="1"/>
+          </p:cNvSpPr>
+          <p:nvPr/>
+        </p:nvSpPr>
+        <p:spPr>
+          <a:xfrm>
+            <a:off x="228600" y="76200"/>
+            <a:ext cx="4762500" cy="228600"/>
+          </a:xfrm>
+          <a:prstGeom prst="rect">
+            <a:avLst/>
+          </a:prstGeom>
+          <a:noFill/>
+          <a:ln w="0">
+            <a:noFill/>
+          </a:ln>
         </p:spPr>
         <p:txBody>
           <a:bodyPr>
-            <a:normAutofit/>
+            <a:noAutofit/>
           </a:bodyPr>
           <a:lstStyle/>
           <a:p>
             <a:pPr>
-              <a:spcAft>
-                <a:spcPts val="600"/>
-              </a:spcAft>
+              <a:defRPr sz="1200" b="1">
+                <a:solidFill>
+                  <a:srgbClr val="002855"/>
+                </a:solidFill>
+                <a:latin typeface="Arial"/>
+                <a:ea typeface="Arial"/>
+                <a:cs typeface="Arial"/>
+              </a:defRPr>
             </a:pPr>
-            <a:fld id="{1CEDF748-80AB-48FE-8ADB-9504DB224582}" type="slidenum">
-              <a:rPr lang="en-US">
+            <a:r>
+              <a:rPr sz="1200" b="1">
                 <a:solidFill>
-                  <a:schemeClr val="tx1">
-                    <a:alpha val="80000"/>
-                  </a:schemeClr>
+                  <a:srgbClr val="002855"/>
                 </a:solidFill>
+                <a:latin typeface="Arial"/>
+                <a:ea typeface="Arial"/>
+                <a:cs typeface="Arial"/>
               </a:rPr>
-              <a:pPr>
-                <a:spcAft>
-                  <a:spcPts val="600"/>
-                </a:spcAft>
-              </a:pPr>
-              <a:t>8</a:t>
-            </a:fld>
-            <a:endParaRPr lang="en-US">
-              <a:solidFill>
-                <a:schemeClr val="tx1">
-                  <a:alpha val="80000"/>
-                </a:schemeClr>
-              </a:solidFill>
-            </a:endParaRPr>
+              <a:t>WVU DSPIRA</a:t>
+            </a:r>
+          </a:p>
+        </p:txBody>
+      </p:sp>
+      <p:sp>
+        <p:nvSpPr>
+          <p:cNvPr id="13" name="DSPIRA 4"/>
+          <p:cNvSpPr>
+            <a:spLocks noGrp="1"/>
+          </p:cNvSpPr>
+          <p:nvPr/>
+        </p:nvSpPr>
+        <p:spPr>
+          <a:xfrm>
+            <a:off x="228600" y="7277100"/>
+            <a:ext cx="6667500" cy="228600"/>
+          </a:xfrm>
+          <a:prstGeom prst="rect">
+            <a:avLst/>
+          </a:prstGeom>
+          <a:noFill/>
+          <a:ln w="0">
+            <a:noFill/>
+          </a:ln>
+        </p:spPr>
+        <p:txBody>
+          <a:bodyPr>
+            <a:noAutofit/>
+          </a:bodyPr>
+          <a:lstStyle/>
+          <a:p>
+            <a:pPr>
+              <a:defRPr sz="900" b="0">
+                <a:solidFill>
+                  <a:srgbClr val="002855"/>
+                </a:solidFill>
+                <a:latin typeface="Arial"/>
+                <a:ea typeface="Arial"/>
+                <a:cs typeface="Arial"/>
+              </a:defRPr>
+            </a:pPr>
+            <a:r>
+              <a:rPr sz="900" b="0">
+                <a:solidFill>
+                  <a:srgbClr val="002855"/>
+                </a:solidFill>
+                <a:latin typeface="Arial"/>
+                <a:ea typeface="Arial"/>
+                <a:cs typeface="Arial"/>
+              </a:rPr>
+              <a:t>wvurail.org/dspira</a:t>
+            </a:r>
+          </a:p>
+        </p:txBody>
+      </p:sp>
+      <p:sp>
+        <p:nvSpPr>
+          <p:cNvPr id="14" name="DSPIRA 5"/>
+          <p:cNvSpPr>
+            <a:spLocks noGrp="1"/>
+          </p:cNvSpPr>
+          <p:nvPr/>
+        </p:nvSpPr>
+        <p:spPr>
+          <a:xfrm>
+            <a:off x="11191875" y="7277100"/>
+            <a:ext cx="762000" cy="228600"/>
+          </a:xfrm>
+          <a:prstGeom prst="rect">
+            <a:avLst/>
+          </a:prstGeom>
+          <a:noFill/>
+          <a:ln w="0">
+            <a:noFill/>
+          </a:ln>
+        </p:spPr>
+        <p:txBody>
+          <a:bodyPr>
+            <a:noAutofit/>
+          </a:bodyPr>
+          <a:lstStyle/>
+          <a:p>
+            <a:pPr>
+              <a:defRPr sz="900" b="0">
+                <a:solidFill>
+                  <a:srgbClr val="002855"/>
+                </a:solidFill>
+                <a:latin typeface="Arial"/>
+                <a:ea typeface="Arial"/>
+                <a:cs typeface="Arial"/>
+              </a:defRPr>
+            </a:pPr>
+            <a:r>
+              <a:rPr sz="900" b="0">
+                <a:solidFill>
+                  <a:srgbClr val="002855"/>
+                </a:solidFill>
+                <a:latin typeface="Arial"/>
+                <a:ea typeface="Arial"/>
+                <a:cs typeface="Arial"/>
+              </a:rPr>
+              <a:t>8 of 11</a:t>
+            </a:r>
           </a:p>
         </p:txBody>
       </p:sp>
@@ -7182,7 +8603,7 @@
         </p:blipFill>
         <p:spPr>
           <a:xfrm>
-            <a:off x="5153822" y="713250"/>
+            <a:off x="5153822" y="1056150"/>
             <a:ext cx="6553545" cy="5439441"/>
           </a:xfrm>
           <a:prstGeom prst="rect">
@@ -7215,7 +8636,7 @@
         </p:nvSpPr>
         <p:spPr bwMode="ltGray">
           <a:xfrm>
-            <a:off x="336884" y="321177"/>
+            <a:off x="336884" y="664077"/>
             <a:ext cx="4332307" cy="6179552"/>
           </a:xfrm>
           <a:prstGeom prst="rect">
@@ -7284,7 +8705,7 @@
         </p:nvCxnSpPr>
         <p:spPr>
           <a:xfrm>
-            <a:off x="1191126" y="3910267"/>
+            <a:off x="1191126" y="4253167"/>
             <a:ext cx="2586790" cy="0"/>
           </a:xfrm>
           <a:prstGeom prst="line">
@@ -7329,7 +8750,7 @@
         </p:nvSpPr>
         <p:spPr>
           <a:xfrm>
-            <a:off x="674237" y="914400"/>
+            <a:off x="674237" y="1257300"/>
             <a:ext cx="3657600" cy="2887579"/>
           </a:xfrm>
         </p:spPr>
@@ -7341,11 +8762,11 @@
           <a:p>
             <a:pPr algn="ctr"/>
             <a:r>
-              <a:rPr lang="en-US" sz="4800" kern="1200" dirty="0">
+              <a:rPr lang="en-US" sz="3840" kern="1200" dirty="0">
                 <a:solidFill>
                   <a:srgbClr val="FFFFFF"/>
                 </a:solidFill>
-                <a:latin typeface="+mj-lt"/>
+                <a:latin typeface="Arial"/>
                 <a:ea typeface="+mj-ea"/>
                 <a:cs typeface="+mj-cs"/>
               </a:rPr>
@@ -7356,55 +8777,202 @@
       </p:sp>
       <p:sp>
         <p:nvSpPr>
-          <p:cNvPr id="5" name="Slide Number Placeholder 4">
-            <a:extLst>
-              <a:ext uri="{FF2B5EF4-FFF2-40B4-BE49-F238E27FC236}">
-                <a16:creationId xmlns:a16="http://schemas.microsoft.com/office/drawing/2014/main" id="{F51189AE-682D-4B52-8DFF-53D2D09712C2}"/>
-              </a:ext>
-            </a:extLst>
-          </p:cNvPr>
-          <p:cNvSpPr>
-            <a:spLocks noGrp="1"/>
-          </p:cNvSpPr>
-          <p:nvPr>
-            <p:ph type="sldNum" sz="quarter" idx="12"/>
-          </p:nvPr>
-        </p:nvSpPr>
-        <p:spPr>
-          <a:xfrm>
-            <a:off x="9991022" y="6356350"/>
-            <a:ext cx="1362777" cy="365125"/>
-          </a:xfrm>
-        </p:spPr>
-        <p:txBody>
-          <a:bodyPr vert="horz" lIns="91440" tIns="45720" rIns="91440" bIns="45720" rtlCol="0" anchor="ctr">
-            <a:normAutofit/>
+          <p:cNvPr id="15" name="DSPIRA 1"/>
+          <p:cNvSpPr>
+            <a:spLocks noGrp="1"/>
+          </p:cNvSpPr>
+          <p:nvPr/>
+        </p:nvSpPr>
+        <p:spPr>
+          <a:xfrm>
+            <a:off x="0" y="0"/>
+            <a:ext cx="12192000" cy="342900"/>
+          </a:xfrm>
+          <a:prstGeom prst="rect">
+            <a:avLst/>
+          </a:prstGeom>
+          <a:solidFill>
+            <a:srgbClr val="FFFFFF"/>
+          </a:solidFill>
+          <a:ln w="0">
+            <a:noFill/>
+          </a:ln>
+        </p:spPr>
+      </p:sp>
+      <p:sp>
+        <p:nvSpPr>
+          <p:cNvPr id="16" name="DSPIRA 2"/>
+          <p:cNvSpPr>
+            <a:spLocks noGrp="1"/>
+          </p:cNvSpPr>
+          <p:nvPr/>
+        </p:nvSpPr>
+        <p:spPr>
+          <a:xfrm>
+            <a:off x="0" y="7200900"/>
+            <a:ext cx="12192000" cy="342900"/>
+          </a:xfrm>
+          <a:prstGeom prst="rect">
+            <a:avLst/>
+          </a:prstGeom>
+          <a:solidFill>
+            <a:srgbClr val="FFFFFF"/>
+          </a:solidFill>
+          <a:ln w="0">
+            <a:noFill/>
+          </a:ln>
+        </p:spPr>
+      </p:sp>
+      <p:sp>
+        <p:nvSpPr>
+          <p:cNvPr id="17" name="DSPIRA 3"/>
+          <p:cNvSpPr>
+            <a:spLocks noGrp="1"/>
+          </p:cNvSpPr>
+          <p:nvPr/>
+        </p:nvSpPr>
+        <p:spPr>
+          <a:xfrm>
+            <a:off x="228600" y="76200"/>
+            <a:ext cx="4762500" cy="228600"/>
+          </a:xfrm>
+          <a:prstGeom prst="rect">
+            <a:avLst/>
+          </a:prstGeom>
+          <a:noFill/>
+          <a:ln w="0">
+            <a:noFill/>
+          </a:ln>
+        </p:spPr>
+        <p:txBody>
+          <a:bodyPr>
+            <a:noAutofit/>
           </a:bodyPr>
           <a:lstStyle/>
           <a:p>
             <a:pPr>
-              <a:spcAft>
-                <a:spcPts val="600"/>
-              </a:spcAft>
+              <a:defRPr sz="1200" b="1">
+                <a:solidFill>
+                  <a:srgbClr val="002855"/>
+                </a:solidFill>
+                <a:latin typeface="Arial"/>
+                <a:ea typeface="Arial"/>
+                <a:cs typeface="Arial"/>
+              </a:defRPr>
             </a:pPr>
-            <a:fld id="{1CEDF748-80AB-48FE-8ADB-9504DB224582}" type="slidenum">
-              <a:rPr lang="en-US">
+            <a:r>
+              <a:rPr sz="1200" b="1">
                 <a:solidFill>
-                  <a:srgbClr val="595959"/>
+                  <a:srgbClr val="002855"/>
                 </a:solidFill>
+                <a:latin typeface="Arial"/>
+                <a:ea typeface="Arial"/>
+                <a:cs typeface="Arial"/>
               </a:rPr>
-              <a:pPr>
-                <a:spcAft>
-                  <a:spcPts val="600"/>
-                </a:spcAft>
-              </a:pPr>
-              <a:t>9</a:t>
-            </a:fld>
-            <a:endParaRPr lang="en-US">
-              <a:solidFill>
-                <a:srgbClr val="595959"/>
-              </a:solidFill>
-            </a:endParaRPr>
+              <a:t>WVU DSPIRA</a:t>
+            </a:r>
+          </a:p>
+        </p:txBody>
+      </p:sp>
+      <p:sp>
+        <p:nvSpPr>
+          <p:cNvPr id="18" name="DSPIRA 4"/>
+          <p:cNvSpPr>
+            <a:spLocks noGrp="1"/>
+          </p:cNvSpPr>
+          <p:nvPr/>
+        </p:nvSpPr>
+        <p:spPr>
+          <a:xfrm>
+            <a:off x="228600" y="7277100"/>
+            <a:ext cx="6667500" cy="228600"/>
+          </a:xfrm>
+          <a:prstGeom prst="rect">
+            <a:avLst/>
+          </a:prstGeom>
+          <a:noFill/>
+          <a:ln w="0">
+            <a:noFill/>
+          </a:ln>
+        </p:spPr>
+        <p:txBody>
+          <a:bodyPr>
+            <a:noAutofit/>
+          </a:bodyPr>
+          <a:lstStyle/>
+          <a:p>
+            <a:pPr>
+              <a:defRPr sz="900" b="0">
+                <a:solidFill>
+                  <a:srgbClr val="002855"/>
+                </a:solidFill>
+                <a:latin typeface="Arial"/>
+                <a:ea typeface="Arial"/>
+                <a:cs typeface="Arial"/>
+              </a:defRPr>
+            </a:pPr>
+            <a:r>
+              <a:rPr sz="900" b="0">
+                <a:solidFill>
+                  <a:srgbClr val="002855"/>
+                </a:solidFill>
+                <a:latin typeface="Arial"/>
+                <a:ea typeface="Arial"/>
+                <a:cs typeface="Arial"/>
+              </a:rPr>
+              <a:t>wvurail.org/dspira</a:t>
+            </a:r>
+          </a:p>
+        </p:txBody>
+      </p:sp>
+      <p:sp>
+        <p:nvSpPr>
+          <p:cNvPr id="19" name="DSPIRA 5"/>
+          <p:cNvSpPr>
+            <a:spLocks noGrp="1"/>
+          </p:cNvSpPr>
+          <p:nvPr/>
+        </p:nvSpPr>
+        <p:spPr>
+          <a:xfrm>
+            <a:off x="11191875" y="7277100"/>
+            <a:ext cx="762000" cy="228600"/>
+          </a:xfrm>
+          <a:prstGeom prst="rect">
+            <a:avLst/>
+          </a:prstGeom>
+          <a:noFill/>
+          <a:ln w="0">
+            <a:noFill/>
+          </a:ln>
+        </p:spPr>
+        <p:txBody>
+          <a:bodyPr>
+            <a:noAutofit/>
+          </a:bodyPr>
+          <a:lstStyle/>
+          <a:p>
+            <a:pPr>
+              <a:defRPr sz="900" b="0">
+                <a:solidFill>
+                  <a:srgbClr val="002855"/>
+                </a:solidFill>
+                <a:latin typeface="Arial"/>
+                <a:ea typeface="Arial"/>
+                <a:cs typeface="Arial"/>
+              </a:defRPr>
+            </a:pPr>
+            <a:r>
+              <a:rPr sz="900" b="0">
+                <a:solidFill>
+                  <a:srgbClr val="002855"/>
+                </a:solidFill>
+                <a:latin typeface="Arial"/>
+                <a:ea typeface="Arial"/>
+                <a:cs typeface="Arial"/>
+              </a:rPr>
+              <a:t>9 of 11</a:t>
+            </a:r>
           </a:p>
         </p:txBody>
       </p:sp>
@@ -7464,7 +9032,7 @@
     </a:clrScheme>
     <a:fontScheme name="Office">
       <a:majorFont>
-        <a:latin typeface="Calibri Light" panose="020F0302020204030204"/>
+        <a:latin typeface="Arial" panose="020F0302020204030204"/>
         <a:ea typeface=""/>
         <a:cs typeface=""/>
         <a:font script="Jpan" typeface="游ゴシック Light"/>
@@ -7516,7 +9084,7 @@
         <a:font script="Tfng" typeface="Ebrima"/>
       </a:majorFont>
       <a:minorFont>
-        <a:latin typeface="Calibri" panose="020F0502020204030204"/>
+        <a:latin typeface="Arial" panose="020F0502020204030204"/>
         <a:ea typeface=""/>
         <a:cs typeface=""/>
         <a:font script="Jpan" typeface="游ゴシック"/>
@@ -7759,7 +9327,7 @@
     </a:clrScheme>
     <a:fontScheme name="Office">
       <a:majorFont>
-        <a:latin typeface="Calibri Light" panose="020F0302020204030204"/>
+        <a:latin typeface="Arial" panose="020F0302020204030204"/>
         <a:ea typeface=""/>
         <a:cs typeface=""/>
         <a:font script="Jpan" typeface="游ゴシック Light"/>
@@ -7811,7 +9379,7 @@
         <a:font script="Tfng" typeface="Ebrima"/>
       </a:majorFont>
       <a:minorFont>
-        <a:latin typeface="Calibri" panose="020F0502020204030204"/>
+        <a:latin typeface="Arial" panose="020F0502020204030204"/>
         <a:ea typeface=""/>
         <a:cs typeface=""/>
         <a:font script="Jpan" typeface="游ゴシック"/>
@@ -8009,183 +9577,4 @@
     </a:ext>
   </a:extLst>
 </a:theme>
-</file>
-
-<file path=customXml/item1.xml><?xml version="1.0" encoding="utf-8"?>
-<ct:contentTypeSchema xmlns:ct="http://schemas.microsoft.com/office/2006/metadata/contentType" xmlns:ma="http://schemas.microsoft.com/office/2006/metadata/properties/metaAttributes" ct:_="" ma:_="" ma:contentTypeName="Document" ma:contentTypeID="0x01010016C36F108F9F92488C988DDF36346911" ma:contentTypeVersion="5" ma:contentTypeDescription="Create a new document." ma:contentTypeScope="" ma:versionID="c417924321fef32731141cd966ef6f94">
-  <xsd:schema xmlns:xsd="http://www.w3.org/2001/XMLSchema" xmlns:xs="http://www.w3.org/2001/XMLSchema" xmlns:p="http://schemas.microsoft.com/office/2006/metadata/properties" xmlns:ns2="1bb24863-89de-455f-aabf-4424925aa312" targetNamespace="http://schemas.microsoft.com/office/2006/metadata/properties" ma:root="true" ma:fieldsID="a7d3b2212d350eb904df17fc79fef4f4" ns2:_="">
-    <xsd:import namespace="1bb24863-89de-455f-aabf-4424925aa312"/>
-    <xsd:element name="properties">
-      <xsd:complexType>
-        <xsd:sequence>
-          <xsd:element name="documentManagement">
-            <xsd:complexType>
-              <xsd:all>
-                <xsd:element ref="ns2:MediaServiceMetadata" minOccurs="0"/>
-                <xsd:element ref="ns2:MediaServiceFastMetadata" minOccurs="0"/>
-                <xsd:element ref="ns2:MediaServiceAutoTags" minOccurs="0"/>
-                <xsd:element ref="ns2:MediaServiceOCR" minOccurs="0"/>
-                <xsd:element ref="ns2:MediaServiceDateTaken" minOccurs="0"/>
-              </xsd:all>
-            </xsd:complexType>
-          </xsd:element>
-        </xsd:sequence>
-      </xsd:complexType>
-    </xsd:element>
-  </xsd:schema>
-  <xsd:schema xmlns:xsd="http://www.w3.org/2001/XMLSchema" xmlns:xs="http://www.w3.org/2001/XMLSchema" xmlns:dms="http://schemas.microsoft.com/office/2006/documentManagement/types" xmlns:pc="http://schemas.microsoft.com/office/infopath/2007/PartnerControls" targetNamespace="1bb24863-89de-455f-aabf-4424925aa312" elementFormDefault="qualified">
-    <xsd:import namespace="http://schemas.microsoft.com/office/2006/documentManagement/types"/>
-    <xsd:import namespace="http://schemas.microsoft.com/office/infopath/2007/PartnerControls"/>
-    <xsd:element name="MediaServiceMetadata" ma:index="8" nillable="true" ma:displayName="MediaServiceMetadata" ma:hidden="true" ma:internalName="MediaServiceMetadata" ma:readOnly="true">
-      <xsd:simpleType>
-        <xsd:restriction base="dms:Note"/>
-      </xsd:simpleType>
-    </xsd:element>
-    <xsd:element name="MediaServiceFastMetadata" ma:index="9" nillable="true" ma:displayName="MediaServiceFastMetadata" ma:hidden="true" ma:internalName="MediaServiceFastMetadata" ma:readOnly="true">
-      <xsd:simpleType>
-        <xsd:restriction base="dms:Note"/>
-      </xsd:simpleType>
-    </xsd:element>
-    <xsd:element name="MediaServiceAutoTags" ma:index="10" nillable="true" ma:displayName="MediaServiceAutoTags" ma:internalName="MediaServiceAutoTags" ma:readOnly="true">
-      <xsd:simpleType>
-        <xsd:restriction base="dms:Text"/>
-      </xsd:simpleType>
-    </xsd:element>
-    <xsd:element name="MediaServiceOCR" ma:index="11" nillable="true" ma:displayName="MediaServiceOCR" ma:internalName="MediaServiceOCR" ma:readOnly="true">
-      <xsd:simpleType>
-        <xsd:restriction base="dms:Note">
-          <xsd:maxLength value="255"/>
-        </xsd:restriction>
-      </xsd:simpleType>
-    </xsd:element>
-    <xsd:element name="MediaServiceDateTaken" ma:index="12" nillable="true" ma:displayName="MediaServiceDateTaken" ma:hidden="true" ma:internalName="MediaServiceDateTaken" ma:readOnly="true">
-      <xsd:simpleType>
-        <xsd:restriction base="dms:Text"/>
-      </xsd:simpleType>
-    </xsd:element>
-  </xsd:schema>
-  <xsd:schema xmlns="http://schemas.openxmlformats.org/package/2006/metadata/core-properties" xmlns:xsd="http://www.w3.org/2001/XMLSchema" xmlns:xsi="http://www.w3.org/2001/XMLSchema-instance" xmlns:dc="http://purl.org/dc/elements/1.1/" xmlns:dcterms="http://purl.org/dc/terms/" xmlns:odoc="http://schemas.microsoft.com/internal/obd" targetNamespace="http://schemas.openxmlformats.org/package/2006/metadata/core-properties" elementFormDefault="qualified" attributeFormDefault="unqualified" blockDefault="#all">
-    <xsd:import namespace="http://purl.org/dc/elements/1.1/" schemaLocation="http://dublincore.org/schemas/xmls/qdc/2003/04/02/dc.xsd"/>
-    <xsd:import namespace="http://purl.org/dc/terms/" schemaLocation="http://dublincore.org/schemas/xmls/qdc/2003/04/02/dcterms.xsd"/>
-    <xsd:element name="coreProperties" type="CT_coreProperties"/>
-    <xsd:complexType name="CT_coreProperties">
-      <xsd:all>
-        <xsd:element ref="dc:creator" minOccurs="0" maxOccurs="1"/>
-        <xsd:element ref="dcterms:created" minOccurs="0" maxOccurs="1"/>
-        <xsd:element ref="dc:identifier" minOccurs="0" maxOccurs="1"/>
-        <xsd:element name="contentType" minOccurs="0" maxOccurs="1" type="xsd:string" ma:index="0" ma:displayName="Content Type"/>
-        <xsd:element ref="dc:title" minOccurs="0" maxOccurs="1" ma:index="4" ma:displayName="Title"/>
-        <xsd:element ref="dc:subject" minOccurs="0" maxOccurs="1"/>
-        <xsd:element ref="dc:description" minOccurs="0" maxOccurs="1"/>
-        <xsd:element name="keywords" minOccurs="0" maxOccurs="1" type="xsd:string"/>
-        <xsd:element ref="dc:language" minOccurs="0" maxOccurs="1"/>
-        <xsd:element name="category" minOccurs="0" maxOccurs="1" type="xsd:string"/>
-        <xsd:element name="version" minOccurs="0" maxOccurs="1" type="xsd:string"/>
-        <xsd:element name="revision" minOccurs="0" maxOccurs="1" type="xsd:string">
-          <xsd:annotation>
-            <xsd:documentation>
-                        This value indicates the number of saves or revisions. The application is responsible for updating this value after each revision.
-                    </xsd:documentation>
-          </xsd:annotation>
-        </xsd:element>
-        <xsd:element name="lastModifiedBy" minOccurs="0" maxOccurs="1" type="xsd:string"/>
-        <xsd:element ref="dcterms:modified" minOccurs="0" maxOccurs="1"/>
-        <xsd:element name="contentStatus" minOccurs="0" maxOccurs="1" type="xsd:string"/>
-      </xsd:all>
-    </xsd:complexType>
-  </xsd:schema>
-  <xs:schema xmlns:pc="http://schemas.microsoft.com/office/infopath/2007/PartnerControls" xmlns:xs="http://www.w3.org/2001/XMLSchema" targetNamespace="http://schemas.microsoft.com/office/infopath/2007/PartnerControls" elementFormDefault="qualified" attributeFormDefault="unqualified">
-    <xs:element name="Person">
-      <xs:complexType>
-        <xs:sequence>
-          <xs:element ref="pc:DisplayName" minOccurs="0"/>
-          <xs:element ref="pc:AccountId" minOccurs="0"/>
-          <xs:element ref="pc:AccountType" minOccurs="0"/>
-        </xs:sequence>
-      </xs:complexType>
-    </xs:element>
-    <xs:element name="DisplayName" type="xs:string"/>
-    <xs:element name="AccountId" type="xs:string"/>
-    <xs:element name="AccountType" type="xs:string"/>
-    <xs:element name="BDCAssociatedEntity">
-      <xs:complexType>
-        <xs:sequence>
-          <xs:element ref="pc:BDCEntity" minOccurs="0" maxOccurs="unbounded"/>
-        </xs:sequence>
-        <xs:attribute ref="pc:EntityNamespace"/>
-        <xs:attribute ref="pc:EntityName"/>
-        <xs:attribute ref="pc:SystemInstanceName"/>
-        <xs:attribute ref="pc:AssociationName"/>
-      </xs:complexType>
-    </xs:element>
-    <xs:attribute name="EntityNamespace" type="xs:string"/>
-    <xs:attribute name="EntityName" type="xs:string"/>
-    <xs:attribute name="SystemInstanceName" type="xs:string"/>
-    <xs:attribute name="AssociationName" type="xs:string"/>
-    <xs:element name="BDCEntity">
-      <xs:complexType>
-        <xs:sequence>
-          <xs:element ref="pc:EntityDisplayName" minOccurs="0"/>
-          <xs:element ref="pc:EntityInstanceReference" minOccurs="0"/>
-          <xs:element ref="pc:EntityId1" minOccurs="0"/>
-          <xs:element ref="pc:EntityId2" minOccurs="0"/>
-          <xs:element ref="pc:EntityId3" minOccurs="0"/>
-          <xs:element ref="pc:EntityId4" minOccurs="0"/>
-          <xs:element ref="pc:EntityId5" minOccurs="0"/>
-        </xs:sequence>
-      </xs:complexType>
-    </xs:element>
-    <xs:element name="EntityDisplayName" type="xs:string"/>
-    <xs:element name="EntityInstanceReference" type="xs:string"/>
-    <xs:element name="EntityId1" type="xs:string"/>
-    <xs:element name="EntityId2" type="xs:string"/>
-    <xs:element name="EntityId3" type="xs:string"/>
-    <xs:element name="EntityId4" type="xs:string"/>
-    <xs:element name="EntityId5" type="xs:string"/>
-    <xs:element name="Terms">
-      <xs:complexType>
-        <xs:sequence>
-          <xs:element ref="pc:TermInfo" minOccurs="0" maxOccurs="unbounded"/>
-        </xs:sequence>
-      </xs:complexType>
-    </xs:element>
-    <xs:element name="TermInfo">
-      <xs:complexType>
-        <xs:sequence>
-          <xs:element ref="pc:TermName" minOccurs="0"/>
-          <xs:element ref="pc:TermId" minOccurs="0"/>
-        </xs:sequence>
-      </xs:complexType>
-    </xs:element>
-    <xs:element name="TermName" type="xs:string"/>
-    <xs:element name="TermId" type="xs:string"/>
-  </xs:schema>
-</ct:contentTypeSchema>
-</file>
-
-<file path=customXml/item2.xml><?xml version="1.0" encoding="utf-8"?>
-<?mso-contentType ?>
-<FormTemplates xmlns="http://schemas.microsoft.com/sharepoint/v3/contenttype/forms">
-  <Display>DocumentLibraryForm</Display>
-  <Edit>DocumentLibraryForm</Edit>
-  <New>DocumentLibraryForm</New>
-</FormTemplates>
-</file>
-
-<file path=customXml/item3.xml><?xml version="1.0" encoding="utf-8"?>
-<p:properties xmlns:p="http://schemas.microsoft.com/office/2006/metadata/properties" xmlns:xsi="http://www.w3.org/2001/XMLSchema-instance" xmlns:pc="http://schemas.microsoft.com/office/infopath/2007/PartnerControls">
-  <documentManagement/>
-</p:properties>
-</file>
-
-<file path=customXml/itemProps1.xml><?xml version="1.0" encoding="utf-8"?>
-<ds:datastoreItem xmlns:ds="http://schemas.openxmlformats.org/officeDocument/2006/customXml" ds:itemID="{CD00ECD5-069A-4A47-8009-7628C4DE17E6}"/>
-</file>
-
-<file path=customXml/itemProps2.xml><?xml version="1.0" encoding="utf-8"?>
-<ds:datastoreItem xmlns:ds="http://schemas.openxmlformats.org/officeDocument/2006/customXml" ds:itemID="{79C6B61D-7E3F-42E0-B39A-294C5CD6CDBD}"/>
-</file>
-
-<file path=customXml/itemProps3.xml><?xml version="1.0" encoding="utf-8"?>
-<ds:datastoreItem xmlns:ds="http://schemas.openxmlformats.org/officeDocument/2006/customXml" ds:itemID="{382EB52C-8715-4C9E-A982-6F5202BE7E6E}"/>
 </file>
--- a/assets/lessons/lectures/digital-signal-processing/filters-2018.pptx
+++ b/assets/lessons/lectures/digital-signal-processing/filters-2018.pptx
@@ -3585,7 +3585,7 @@
       </p:sp>
       <p:sp>
         <p:nvSpPr>
-          <p:cNvPr id="5" name="DSPIRA 1"/>
+          <p:cNvPr id="6" name="DSPIRA 2"/>
           <p:cNvSpPr>
             <a:spLocks noGrp="1"/>
           </p:cNvSpPr>
@@ -3593,7 +3593,7 @@
         </p:nvSpPr>
         <p:spPr>
           <a:xfrm>
-            <a:off x="0" y="0"/>
+            <a:off x="0" y="7200900"/>
             <a:ext cx="12192000" cy="342900"/>
           </a:xfrm>
           <a:prstGeom prst="rect">
@@ -3609,7 +3609,7 @@
       </p:sp>
       <p:sp>
         <p:nvSpPr>
-          <p:cNvPr id="6" name="DSPIRA 2"/>
+          <p:cNvPr id="8" name="DSPIRA 4"/>
           <p:cNvSpPr>
             <a:spLocks noGrp="1"/>
           </p:cNvSpPr>
@@ -3617,32 +3617,8 @@
         </p:nvSpPr>
         <p:spPr>
           <a:xfrm>
-            <a:off x="0" y="7200900"/>
-            <a:ext cx="12192000" cy="342900"/>
-          </a:xfrm>
-          <a:prstGeom prst="rect">
-            <a:avLst/>
-          </a:prstGeom>
-          <a:solidFill>
-            <a:srgbClr val="FFFFFF"/>
-          </a:solidFill>
-          <a:ln w="0">
-            <a:noFill/>
-          </a:ln>
-        </p:spPr>
-      </p:sp>
-      <p:sp>
-        <p:nvSpPr>
-          <p:cNvPr id="7" name="DSPIRA 3"/>
-          <p:cNvSpPr>
-            <a:spLocks noGrp="1"/>
-          </p:cNvSpPr>
-          <p:nvPr/>
-        </p:nvSpPr>
-        <p:spPr>
-          <a:xfrm>
-            <a:off x="228600" y="76200"/>
-            <a:ext cx="4762500" cy="228600"/>
+            <a:off x="228600" y="7277100"/>
+            <a:ext cx="6667500" cy="228600"/>
           </a:xfrm>
           <a:prstGeom prst="rect">
             <a:avLst/>
@@ -3659,7 +3635,7 @@
           <a:lstStyle/>
           <a:p>
             <a:pPr>
-              <a:defRPr sz="1200" b="1">
+              <a:defRPr sz="900" b="0">
                 <a:solidFill>
                   <a:srgbClr val="002855"/>
                 </a:solidFill>
@@ -3669,9 +3645,159 @@
               </a:defRPr>
             </a:pPr>
             <a:r>
-              <a:rPr sz="1200" b="1">
+              <a:rPr sz="900" b="0">
                 <a:solidFill>
                   <a:srgbClr val="002855"/>
+                </a:solidFill>
+                <a:latin typeface="Arial"/>
+                <a:ea typeface="Arial"/>
+                <a:cs typeface="Arial"/>
+              </a:rPr>
+              <a:t>wvurail.org/dspira</a:t>
+            </a:r>
+          </a:p>
+        </p:txBody>
+      </p:sp>
+      <p:sp>
+        <p:nvSpPr>
+          <p:cNvPr id="9" name="DSPIRA 5"/>
+          <p:cNvSpPr>
+            <a:spLocks noGrp="1"/>
+          </p:cNvSpPr>
+          <p:nvPr/>
+        </p:nvSpPr>
+        <p:spPr>
+          <a:xfrm>
+            <a:off x="11191875" y="7277100"/>
+            <a:ext cx="762000" cy="228600"/>
+          </a:xfrm>
+          <a:prstGeom prst="rect">
+            <a:avLst/>
+          </a:prstGeom>
+          <a:noFill/>
+          <a:ln w="0">
+            <a:noFill/>
+          </a:ln>
+        </p:spPr>
+        <p:txBody>
+          <a:bodyPr>
+            <a:noAutofit/>
+          </a:bodyPr>
+          <a:lstStyle/>
+          <a:p>
+            <a:pPr>
+              <a:defRPr sz="900" b="0">
+                <a:solidFill>
+                  <a:srgbClr val="002855"/>
+                </a:solidFill>
+                <a:latin typeface="Arial"/>
+                <a:ea typeface="Arial"/>
+                <a:cs typeface="Arial"/>
+              </a:defRPr>
+            </a:pPr>
+            <a:r>
+              <a:rPr sz="900" b="0">
+                <a:solidFill>
+                  <a:srgbClr val="002855"/>
+                </a:solidFill>
+                <a:latin typeface="Arial"/>
+                <a:ea typeface="Arial"/>
+                <a:cs typeface="Arial"/>
+              </a:rPr>
+              <a:t>1 of 11</a:t>
+            </a:r>
+          </a:p>
+        </p:txBody>
+      </p:sp>
+      <p:sp>
+        <p:nvSpPr>
+          <p:cNvPr id="10" name="WVU DSPIRA navy band"/>
+          <p:cNvSpPr>
+            <a:spLocks noGrp="1"/>
+          </p:cNvSpPr>
+          <p:nvPr/>
+        </p:nvSpPr>
+        <p:spPr>
+          <a:xfrm>
+            <a:off x="0" y="0"/>
+            <a:ext cx="12192000" cy="323850"/>
+          </a:xfrm>
+          <a:prstGeom prst="rect">
+            <a:avLst/>
+          </a:prstGeom>
+          <a:solidFill>
+            <a:srgbClr val="002855"/>
+          </a:solidFill>
+          <a:ln w="0">
+            <a:noFill/>
+          </a:ln>
+        </p:spPr>
+      </p:sp>
+      <p:sp>
+        <p:nvSpPr>
+          <p:cNvPr id="11" name="WVU DSPIRA gold rule"/>
+          <p:cNvSpPr>
+            <a:spLocks noGrp="1"/>
+          </p:cNvSpPr>
+          <p:nvPr/>
+        </p:nvSpPr>
+        <p:spPr>
+          <a:xfrm>
+            <a:off x="0" y="323850"/>
+            <a:ext cx="12192000" cy="19050"/>
+          </a:xfrm>
+          <a:prstGeom prst="rect">
+            <a:avLst/>
+          </a:prstGeom>
+          <a:solidFill>
+            <a:srgbClr val="EEAA00"/>
+          </a:solidFill>
+          <a:ln w="0">
+            <a:noFill/>
+          </a:ln>
+        </p:spPr>
+      </p:sp>
+      <p:sp>
+        <p:nvSpPr>
+          <p:cNvPr id="12" name="WVU DSPIRA name"/>
+          <p:cNvSpPr>
+            <a:spLocks noGrp="1"/>
+          </p:cNvSpPr>
+          <p:nvPr/>
+        </p:nvSpPr>
+        <p:spPr>
+          <a:xfrm>
+            <a:off x="228600" y="19050"/>
+            <a:ext cx="2857500" cy="257175"/>
+          </a:xfrm>
+          <a:prstGeom prst="rect">
+            <a:avLst/>
+          </a:prstGeom>
+          <a:noFill/>
+          <a:ln w="0">
+            <a:noFill/>
+          </a:ln>
+        </p:spPr>
+        <p:txBody>
+          <a:bodyPr>
+            <a:noAutofit/>
+          </a:bodyPr>
+          <a:lstStyle/>
+          <a:p>
+            <a:pPr>
+              <a:defRPr sz="1600" b="1">
+                <a:solidFill>
+                  <a:srgbClr val="FFFFFF"/>
+                </a:solidFill>
+                <a:latin typeface="Arial"/>
+                <a:ea typeface="Arial"/>
+                <a:cs typeface="Arial"/>
+              </a:defRPr>
+            </a:pPr>
+            <a:r>
+              <a:rPr sz="1600" b="1">
+                <a:solidFill>
+                  <a:srgbClr val="FFFFFF"/>
                 </a:solidFill>
                 <a:latin typeface="Arial"/>
                 <a:ea typeface="Arial"/>
@@ -3684,7 +3810,7 @@
       </p:sp>
       <p:sp>
         <p:nvSpPr>
-          <p:cNvPr id="8" name="DSPIRA 4"/>
+          <p:cNvPr id="13" name="WVU DSPIRA university"/>
           <p:cNvSpPr>
             <a:spLocks noGrp="1"/>
           </p:cNvSpPr>
@@ -3692,8 +3818,8 @@
         </p:nvSpPr>
         <p:spPr>
           <a:xfrm>
-            <a:off x="228600" y="7277100"/>
-            <a:ext cx="6667500" cy="228600"/>
+            <a:off x="9334500" y="114300"/>
+            <a:ext cx="2628900" cy="171450"/>
           </a:xfrm>
           <a:prstGeom prst="rect">
             <a:avLst/>
@@ -3709,10 +3835,10 @@
           </a:bodyPr>
           <a:lstStyle/>
           <a:p>
-            <a:pPr>
-              <a:defRPr sz="900" b="0">
-                <a:solidFill>
-                  <a:srgbClr val="002855"/>
+            <a:pPr algn="r">
+              <a:defRPr sz="900">
+                <a:solidFill>
+                  <a:srgbClr val="FFFFFF"/>
                 </a:solidFill>
                 <a:latin typeface="Arial"/>
                 <a:ea typeface="Arial"/>
@@ -3720,66 +3846,15 @@
               </a:defRPr>
             </a:pPr>
             <a:r>
-              <a:rPr sz="900" b="0">
-                <a:solidFill>
-                  <a:srgbClr val="002855"/>
+              <a:rPr sz="900">
+                <a:solidFill>
+                  <a:srgbClr val="FFFFFF"/>
                 </a:solidFill>
                 <a:latin typeface="Arial"/>
                 <a:ea typeface="Arial"/>
                 <a:cs typeface="Arial"/>
               </a:rPr>
-              <a:t>wvurail.org/dspira</a:t>
-            </a:r>
-          </a:p>
-        </p:txBody>
-      </p:sp>
-      <p:sp>
-        <p:nvSpPr>
-          <p:cNvPr id="9" name="DSPIRA 5"/>
-          <p:cNvSpPr>
-            <a:spLocks noGrp="1"/>
-          </p:cNvSpPr>
-          <p:nvPr/>
-        </p:nvSpPr>
-        <p:spPr>
-          <a:xfrm>
-            <a:off x="11191875" y="7277100"/>
-            <a:ext cx="762000" cy="228600"/>
-          </a:xfrm>
-          <a:prstGeom prst="rect">
-            <a:avLst/>
-          </a:prstGeom>
-          <a:noFill/>
-          <a:ln w="0">
-            <a:noFill/>
-          </a:ln>
-        </p:spPr>
-        <p:txBody>
-          <a:bodyPr>
-            <a:noAutofit/>
-          </a:bodyPr>
-          <a:lstStyle/>
-          <a:p>
-            <a:pPr>
-              <a:defRPr sz="900" b="0">
-                <a:solidFill>
-                  <a:srgbClr val="002855"/>
-                </a:solidFill>
-                <a:latin typeface="Arial"/>
-                <a:ea typeface="Arial"/>
-                <a:cs typeface="Arial"/>
-              </a:defRPr>
-            </a:pPr>
-            <a:r>
-              <a:rPr sz="900" b="0">
-                <a:solidFill>
-                  <a:srgbClr val="002855"/>
-                </a:solidFill>
-                <a:latin typeface="Arial"/>
-                <a:ea typeface="Arial"/>
-                <a:cs typeface="Arial"/>
-              </a:rPr>
-              <a:t>1 of 11</a:t>
+              <a:t>WEST VIRGINIA UNIVERSITY</a:t>
             </a:r>
           </a:p>
         </p:txBody>
@@ -4024,7 +4099,7 @@
       </p:sp>
       <p:sp>
         <p:nvSpPr>
-          <p:cNvPr id="13" name="DSPIRA 1"/>
+          <p:cNvPr id="14" name="DSPIRA 2"/>
           <p:cNvSpPr>
             <a:spLocks noGrp="1"/>
           </p:cNvSpPr>
@@ -4032,7 +4107,7 @@
         </p:nvSpPr>
         <p:spPr>
           <a:xfrm>
-            <a:off x="0" y="0"/>
+            <a:off x="0" y="7200900"/>
             <a:ext cx="12192000" cy="342900"/>
           </a:xfrm>
           <a:prstGeom prst="rect">
@@ -4048,7 +4123,7 @@
       </p:sp>
       <p:sp>
         <p:nvSpPr>
-          <p:cNvPr id="14" name="DSPIRA 2"/>
+          <p:cNvPr id="16" name="DSPIRA 4"/>
           <p:cNvSpPr>
             <a:spLocks noGrp="1"/>
           </p:cNvSpPr>
@@ -4056,32 +4131,8 @@
         </p:nvSpPr>
         <p:spPr>
           <a:xfrm>
-            <a:off x="0" y="7200900"/>
-            <a:ext cx="12192000" cy="342900"/>
-          </a:xfrm>
-          <a:prstGeom prst="rect">
-            <a:avLst/>
-          </a:prstGeom>
-          <a:solidFill>
-            <a:srgbClr val="FFFFFF"/>
-          </a:solidFill>
-          <a:ln w="0">
-            <a:noFill/>
-          </a:ln>
-        </p:spPr>
-      </p:sp>
-      <p:sp>
-        <p:nvSpPr>
-          <p:cNvPr id="15" name="DSPIRA 3"/>
-          <p:cNvSpPr>
-            <a:spLocks noGrp="1"/>
-          </p:cNvSpPr>
-          <p:nvPr/>
-        </p:nvSpPr>
-        <p:spPr>
-          <a:xfrm>
-            <a:off x="228600" y="76200"/>
-            <a:ext cx="4762500" cy="228600"/>
+            <a:off x="228600" y="7277100"/>
+            <a:ext cx="6667500" cy="228600"/>
           </a:xfrm>
           <a:prstGeom prst="rect">
             <a:avLst/>
@@ -4098,7 +4149,7 @@
           <a:lstStyle/>
           <a:p>
             <a:pPr>
-              <a:defRPr sz="1200" b="1">
+              <a:defRPr sz="900" b="0">
                 <a:solidFill>
                   <a:srgbClr val="002855"/>
                 </a:solidFill>
@@ -4108,9 +4159,159 @@
               </a:defRPr>
             </a:pPr>
             <a:r>
-              <a:rPr sz="1200" b="1">
+              <a:rPr sz="900" b="0">
                 <a:solidFill>
                   <a:srgbClr val="002855"/>
+                </a:solidFill>
+                <a:latin typeface="Arial"/>
+                <a:ea typeface="Arial"/>
+                <a:cs typeface="Arial"/>
+              </a:rPr>
+              <a:t>wvurail.org/dspira</a:t>
+            </a:r>
+          </a:p>
+        </p:txBody>
+      </p:sp>
+      <p:sp>
+        <p:nvSpPr>
+          <p:cNvPr id="17" name="DSPIRA 5"/>
+          <p:cNvSpPr>
+            <a:spLocks noGrp="1"/>
+          </p:cNvSpPr>
+          <p:nvPr/>
+        </p:nvSpPr>
+        <p:spPr>
+          <a:xfrm>
+            <a:off x="11191875" y="7277100"/>
+            <a:ext cx="762000" cy="228600"/>
+          </a:xfrm>
+          <a:prstGeom prst="rect">
+            <a:avLst/>
+          </a:prstGeom>
+          <a:noFill/>
+          <a:ln w="0">
+            <a:noFill/>
+          </a:ln>
+        </p:spPr>
+        <p:txBody>
+          <a:bodyPr>
+            <a:noAutofit/>
+          </a:bodyPr>
+          <a:lstStyle/>
+          <a:p>
+            <a:pPr>
+              <a:defRPr sz="900" b="0">
+                <a:solidFill>
+                  <a:srgbClr val="002855"/>
+                </a:solidFill>
+                <a:latin typeface="Arial"/>
+                <a:ea typeface="Arial"/>
+                <a:cs typeface="Arial"/>
+              </a:defRPr>
+            </a:pPr>
+            <a:r>
+              <a:rPr sz="900" b="0">
+                <a:solidFill>
+                  <a:srgbClr val="002855"/>
+                </a:solidFill>
+                <a:latin typeface="Arial"/>
+                <a:ea typeface="Arial"/>
+                <a:cs typeface="Arial"/>
+              </a:rPr>
+              <a:t>10 of 11</a:t>
+            </a:r>
+          </a:p>
+        </p:txBody>
+      </p:sp>
+      <p:sp>
+        <p:nvSpPr>
+          <p:cNvPr id="18" name="WVU DSPIRA navy band"/>
+          <p:cNvSpPr>
+            <a:spLocks noGrp="1"/>
+          </p:cNvSpPr>
+          <p:nvPr/>
+        </p:nvSpPr>
+        <p:spPr>
+          <a:xfrm>
+            <a:off x="0" y="0"/>
+            <a:ext cx="12192000" cy="323850"/>
+          </a:xfrm>
+          <a:prstGeom prst="rect">
+            <a:avLst/>
+          </a:prstGeom>
+          <a:solidFill>
+            <a:srgbClr val="002855"/>
+          </a:solidFill>
+          <a:ln w="0">
+            <a:noFill/>
+          </a:ln>
+        </p:spPr>
+      </p:sp>
+      <p:sp>
+        <p:nvSpPr>
+          <p:cNvPr id="19" name="WVU DSPIRA gold rule"/>
+          <p:cNvSpPr>
+            <a:spLocks noGrp="1"/>
+          </p:cNvSpPr>
+          <p:nvPr/>
+        </p:nvSpPr>
+        <p:spPr>
+          <a:xfrm>
+            <a:off x="0" y="323850"/>
+            <a:ext cx="12192000" cy="19050"/>
+          </a:xfrm>
+          <a:prstGeom prst="rect">
+            <a:avLst/>
+          </a:prstGeom>
+          <a:solidFill>
+            <a:srgbClr val="EEAA00"/>
+          </a:solidFill>
+          <a:ln w="0">
+            <a:noFill/>
+          </a:ln>
+        </p:spPr>
+      </p:sp>
+      <p:sp>
+        <p:nvSpPr>
+          <p:cNvPr id="20" name="WVU DSPIRA name"/>
+          <p:cNvSpPr>
+            <a:spLocks noGrp="1"/>
+          </p:cNvSpPr>
+          <p:nvPr/>
+        </p:nvSpPr>
+        <p:spPr>
+          <a:xfrm>
+            <a:off x="228600" y="19050"/>
+            <a:ext cx="2857500" cy="257175"/>
+          </a:xfrm>
+          <a:prstGeom prst="rect">
+            <a:avLst/>
+          </a:prstGeom>
+          <a:noFill/>
+          <a:ln w="0">
+            <a:noFill/>
+          </a:ln>
+        </p:spPr>
+        <p:txBody>
+          <a:bodyPr>
+            <a:noAutofit/>
+          </a:bodyPr>
+          <a:lstStyle/>
+          <a:p>
+            <a:pPr>
+              <a:defRPr sz="1600" b="1">
+                <a:solidFill>
+                  <a:srgbClr val="FFFFFF"/>
+                </a:solidFill>
+                <a:latin typeface="Arial"/>
+                <a:ea typeface="Arial"/>
+                <a:cs typeface="Arial"/>
+              </a:defRPr>
+            </a:pPr>
+            <a:r>
+              <a:rPr sz="1600" b="1">
+                <a:solidFill>
+                  <a:srgbClr val="FFFFFF"/>
                 </a:solidFill>
                 <a:latin typeface="Arial"/>
                 <a:ea typeface="Arial"/>
@@ -4123,7 +4324,7 @@
       </p:sp>
       <p:sp>
         <p:nvSpPr>
-          <p:cNvPr id="16" name="DSPIRA 4"/>
+          <p:cNvPr id="21" name="WVU DSPIRA university"/>
           <p:cNvSpPr>
             <a:spLocks noGrp="1"/>
           </p:cNvSpPr>
@@ -4131,8 +4332,8 @@
         </p:nvSpPr>
         <p:spPr>
           <a:xfrm>
-            <a:off x="228600" y="7277100"/>
-            <a:ext cx="6667500" cy="228600"/>
+            <a:off x="9334500" y="114300"/>
+            <a:ext cx="2628900" cy="171450"/>
           </a:xfrm>
           <a:prstGeom prst="rect">
             <a:avLst/>
@@ -4148,10 +4349,10 @@
           </a:bodyPr>
           <a:lstStyle/>
           <a:p>
-            <a:pPr>
-              <a:defRPr sz="900" b="0">
-                <a:solidFill>
-                  <a:srgbClr val="002855"/>
+            <a:pPr algn="r">
+              <a:defRPr sz="900">
+                <a:solidFill>
+                  <a:srgbClr val="FFFFFF"/>
                 </a:solidFill>
                 <a:latin typeface="Arial"/>
                 <a:ea typeface="Arial"/>
@@ -4159,66 +4360,15 @@
               </a:defRPr>
             </a:pPr>
             <a:r>
-              <a:rPr sz="900" b="0">
-                <a:solidFill>
-                  <a:srgbClr val="002855"/>
+              <a:rPr sz="900">
+                <a:solidFill>
+                  <a:srgbClr val="FFFFFF"/>
                 </a:solidFill>
                 <a:latin typeface="Arial"/>
                 <a:ea typeface="Arial"/>
                 <a:cs typeface="Arial"/>
               </a:rPr>
-              <a:t>wvurail.org/dspira</a:t>
-            </a:r>
-          </a:p>
-        </p:txBody>
-      </p:sp>
-      <p:sp>
-        <p:nvSpPr>
-          <p:cNvPr id="17" name="DSPIRA 5"/>
-          <p:cNvSpPr>
-            <a:spLocks noGrp="1"/>
-          </p:cNvSpPr>
-          <p:nvPr/>
-        </p:nvSpPr>
-        <p:spPr>
-          <a:xfrm>
-            <a:off x="11191875" y="7277100"/>
-            <a:ext cx="762000" cy="228600"/>
-          </a:xfrm>
-          <a:prstGeom prst="rect">
-            <a:avLst/>
-          </a:prstGeom>
-          <a:noFill/>
-          <a:ln w="0">
-            <a:noFill/>
-          </a:ln>
-        </p:spPr>
-        <p:txBody>
-          <a:bodyPr>
-            <a:noAutofit/>
-          </a:bodyPr>
-          <a:lstStyle/>
-          <a:p>
-            <a:pPr>
-              <a:defRPr sz="900" b="0">
-                <a:solidFill>
-                  <a:srgbClr val="002855"/>
-                </a:solidFill>
-                <a:latin typeface="Arial"/>
-                <a:ea typeface="Arial"/>
-                <a:cs typeface="Arial"/>
-              </a:defRPr>
-            </a:pPr>
-            <a:r>
-              <a:rPr sz="900" b="0">
-                <a:solidFill>
-                  <a:srgbClr val="002855"/>
-                </a:solidFill>
-                <a:latin typeface="Arial"/>
-                <a:ea typeface="Arial"/>
-                <a:cs typeface="Arial"/>
-              </a:rPr>
-              <a:t>10 of 11</a:t>
+              <a:t>WEST VIRGINIA UNIVERSITY</a:t>
             </a:r>
           </a:p>
         </p:txBody>
@@ -4535,7 +4685,7 @@
       </p:sp>
       <p:sp>
         <p:nvSpPr>
-          <p:cNvPr id="15" name="DSPIRA 1"/>
+          <p:cNvPr id="16" name="DSPIRA 2"/>
           <p:cNvSpPr>
             <a:spLocks noGrp="1"/>
           </p:cNvSpPr>
@@ -4543,7 +4693,7 @@
         </p:nvSpPr>
         <p:spPr>
           <a:xfrm>
-            <a:off x="0" y="0"/>
+            <a:off x="0" y="7200900"/>
             <a:ext cx="12192000" cy="342900"/>
           </a:xfrm>
           <a:prstGeom prst="rect">
@@ -4559,7 +4709,7 @@
       </p:sp>
       <p:sp>
         <p:nvSpPr>
-          <p:cNvPr id="16" name="DSPIRA 2"/>
+          <p:cNvPr id="18" name="DSPIRA 4"/>
           <p:cNvSpPr>
             <a:spLocks noGrp="1"/>
           </p:cNvSpPr>
@@ -4567,32 +4717,8 @@
         </p:nvSpPr>
         <p:spPr>
           <a:xfrm>
-            <a:off x="0" y="7200900"/>
-            <a:ext cx="12192000" cy="342900"/>
-          </a:xfrm>
-          <a:prstGeom prst="rect">
-            <a:avLst/>
-          </a:prstGeom>
-          <a:solidFill>
-            <a:srgbClr val="FFFFFF"/>
-          </a:solidFill>
-          <a:ln w="0">
-            <a:noFill/>
-          </a:ln>
-        </p:spPr>
-      </p:sp>
-      <p:sp>
-        <p:nvSpPr>
-          <p:cNvPr id="17" name="DSPIRA 3"/>
-          <p:cNvSpPr>
-            <a:spLocks noGrp="1"/>
-          </p:cNvSpPr>
-          <p:nvPr/>
-        </p:nvSpPr>
-        <p:spPr>
-          <a:xfrm>
-            <a:off x="228600" y="76200"/>
-            <a:ext cx="4762500" cy="228600"/>
+            <a:off x="228600" y="7277100"/>
+            <a:ext cx="6667500" cy="228600"/>
           </a:xfrm>
           <a:prstGeom prst="rect">
             <a:avLst/>
@@ -4609,7 +4735,7 @@
           <a:lstStyle/>
           <a:p>
             <a:pPr>
-              <a:defRPr sz="1200" b="1">
+              <a:defRPr sz="900" b="0">
                 <a:solidFill>
                   <a:srgbClr val="002855"/>
                 </a:solidFill>
@@ -4619,9 +4745,159 @@
               </a:defRPr>
             </a:pPr>
             <a:r>
-              <a:rPr sz="1200" b="1">
+              <a:rPr sz="900" b="0">
                 <a:solidFill>
                   <a:srgbClr val="002855"/>
+                </a:solidFill>
+                <a:latin typeface="Arial"/>
+                <a:ea typeface="Arial"/>
+                <a:cs typeface="Arial"/>
+              </a:rPr>
+              <a:t>wvurail.org/dspira</a:t>
+            </a:r>
+          </a:p>
+        </p:txBody>
+      </p:sp>
+      <p:sp>
+        <p:nvSpPr>
+          <p:cNvPr id="19" name="DSPIRA 5"/>
+          <p:cNvSpPr>
+            <a:spLocks noGrp="1"/>
+          </p:cNvSpPr>
+          <p:nvPr/>
+        </p:nvSpPr>
+        <p:spPr>
+          <a:xfrm>
+            <a:off x="11191875" y="7277100"/>
+            <a:ext cx="762000" cy="228600"/>
+          </a:xfrm>
+          <a:prstGeom prst="rect">
+            <a:avLst/>
+          </a:prstGeom>
+          <a:noFill/>
+          <a:ln w="0">
+            <a:noFill/>
+          </a:ln>
+        </p:spPr>
+        <p:txBody>
+          <a:bodyPr>
+            <a:noAutofit/>
+          </a:bodyPr>
+          <a:lstStyle/>
+          <a:p>
+            <a:pPr>
+              <a:defRPr sz="900" b="0">
+                <a:solidFill>
+                  <a:srgbClr val="002855"/>
+                </a:solidFill>
+                <a:latin typeface="Arial"/>
+                <a:ea typeface="Arial"/>
+                <a:cs typeface="Arial"/>
+              </a:defRPr>
+            </a:pPr>
+            <a:r>
+              <a:rPr sz="900" b="0">
+                <a:solidFill>
+                  <a:srgbClr val="002855"/>
+                </a:solidFill>
+                <a:latin typeface="Arial"/>
+                <a:ea typeface="Arial"/>
+                <a:cs typeface="Arial"/>
+              </a:rPr>
+              <a:t>11 of 11</a:t>
+            </a:r>
+          </a:p>
+        </p:txBody>
+      </p:sp>
+      <p:sp>
+        <p:nvSpPr>
+          <p:cNvPr id="20" name="WVU DSPIRA navy band"/>
+          <p:cNvSpPr>
+            <a:spLocks noGrp="1"/>
+          </p:cNvSpPr>
+          <p:nvPr/>
+        </p:nvSpPr>
+        <p:spPr>
+          <a:xfrm>
+            <a:off x="0" y="0"/>
+            <a:ext cx="12192000" cy="323850"/>
+          </a:xfrm>
+          <a:prstGeom prst="rect">
+            <a:avLst/>
+          </a:prstGeom>
+          <a:solidFill>
+            <a:srgbClr val="002855"/>
+          </a:solidFill>
+          <a:ln w="0">
+            <a:noFill/>
+          </a:ln>
+        </p:spPr>
+      </p:sp>
+      <p:sp>
+        <p:nvSpPr>
+          <p:cNvPr id="21" name="WVU DSPIRA gold rule"/>
+          <p:cNvSpPr>
+            <a:spLocks noGrp="1"/>
+          </p:cNvSpPr>
+          <p:nvPr/>
+        </p:nvSpPr>
+        <p:spPr>
+          <a:xfrm>
+            <a:off x="0" y="323850"/>
+            <a:ext cx="12192000" cy="19050"/>
+          </a:xfrm>
+          <a:prstGeom prst="rect">
+            <a:avLst/>
+          </a:prstGeom>
+          <a:solidFill>
+            <a:srgbClr val="EEAA00"/>
+          </a:solidFill>
+          <a:ln w="0">
+            <a:noFill/>
+          </a:ln>
+        </p:spPr>
+      </p:sp>
+      <p:sp>
+        <p:nvSpPr>
+          <p:cNvPr id="22" name="WVU DSPIRA name"/>
+          <p:cNvSpPr>
+            <a:spLocks noGrp="1"/>
+          </p:cNvSpPr>
+          <p:nvPr/>
+        </p:nvSpPr>
+        <p:spPr>
+          <a:xfrm>
+            <a:off x="228600" y="19050"/>
+            <a:ext cx="2857500" cy="257175"/>
+          </a:xfrm>
+          <a:prstGeom prst="rect">
+            <a:avLst/>
+          </a:prstGeom>
+          <a:noFill/>
+          <a:ln w="0">
+            <a:noFill/>
+          </a:ln>
+        </p:spPr>
+        <p:txBody>
+          <a:bodyPr>
+            <a:noAutofit/>
+          </a:bodyPr>
+          <a:lstStyle/>
+          <a:p>
+            <a:pPr>
+              <a:defRPr sz="1600" b="1">
+                <a:solidFill>
+                  <a:srgbClr val="FFFFFF"/>
+                </a:solidFill>
+                <a:latin typeface="Arial"/>
+                <a:ea typeface="Arial"/>
+                <a:cs typeface="Arial"/>
+              </a:defRPr>
+            </a:pPr>
+            <a:r>
+              <a:rPr sz="1600" b="1">
+                <a:solidFill>
+                  <a:srgbClr val="FFFFFF"/>
                 </a:solidFill>
                 <a:latin typeface="Arial"/>
                 <a:ea typeface="Arial"/>
@@ -4634,7 +4910,7 @@
       </p:sp>
       <p:sp>
         <p:nvSpPr>
-          <p:cNvPr id="18" name="DSPIRA 4"/>
+          <p:cNvPr id="23" name="WVU DSPIRA university"/>
           <p:cNvSpPr>
             <a:spLocks noGrp="1"/>
           </p:cNvSpPr>
@@ -4642,8 +4918,8 @@
         </p:nvSpPr>
         <p:spPr>
           <a:xfrm>
-            <a:off x="228600" y="7277100"/>
-            <a:ext cx="6667500" cy="228600"/>
+            <a:off x="9334500" y="114300"/>
+            <a:ext cx="2628900" cy="171450"/>
           </a:xfrm>
           <a:prstGeom prst="rect">
             <a:avLst/>
@@ -4659,10 +4935,10 @@
           </a:bodyPr>
           <a:lstStyle/>
           <a:p>
-            <a:pPr>
-              <a:defRPr sz="900" b="0">
-                <a:solidFill>
-                  <a:srgbClr val="002855"/>
+            <a:pPr algn="r">
+              <a:defRPr sz="900">
+                <a:solidFill>
+                  <a:srgbClr val="FFFFFF"/>
                 </a:solidFill>
                 <a:latin typeface="Arial"/>
                 <a:ea typeface="Arial"/>
@@ -4670,66 +4946,15 @@
               </a:defRPr>
             </a:pPr>
             <a:r>
-              <a:rPr sz="900" b="0">
-                <a:solidFill>
-                  <a:srgbClr val="002855"/>
+              <a:rPr sz="900">
+                <a:solidFill>
+                  <a:srgbClr val="FFFFFF"/>
                 </a:solidFill>
                 <a:latin typeface="Arial"/>
                 <a:ea typeface="Arial"/>
                 <a:cs typeface="Arial"/>
               </a:rPr>
-              <a:t>wvurail.org/dspira</a:t>
-            </a:r>
-          </a:p>
-        </p:txBody>
-      </p:sp>
-      <p:sp>
-        <p:nvSpPr>
-          <p:cNvPr id="19" name="DSPIRA 5"/>
-          <p:cNvSpPr>
-            <a:spLocks noGrp="1"/>
-          </p:cNvSpPr>
-          <p:nvPr/>
-        </p:nvSpPr>
-        <p:spPr>
-          <a:xfrm>
-            <a:off x="11191875" y="7277100"/>
-            <a:ext cx="762000" cy="228600"/>
-          </a:xfrm>
-          <a:prstGeom prst="rect">
-            <a:avLst/>
-          </a:prstGeom>
-          <a:noFill/>
-          <a:ln w="0">
-            <a:noFill/>
-          </a:ln>
-        </p:spPr>
-        <p:txBody>
-          <a:bodyPr>
-            <a:noAutofit/>
-          </a:bodyPr>
-          <a:lstStyle/>
-          <a:p>
-            <a:pPr>
-              <a:defRPr sz="900" b="0">
-                <a:solidFill>
-                  <a:srgbClr val="002855"/>
-                </a:solidFill>
-                <a:latin typeface="Arial"/>
-                <a:ea typeface="Arial"/>
-                <a:cs typeface="Arial"/>
-              </a:defRPr>
-            </a:pPr>
-            <a:r>
-              <a:rPr sz="900" b="0">
-                <a:solidFill>
-                  <a:srgbClr val="002855"/>
-                </a:solidFill>
-                <a:latin typeface="Arial"/>
-                <a:ea typeface="Arial"/>
-                <a:cs typeface="Arial"/>
-              </a:rPr>
-              <a:t>11 of 11</a:t>
+              <a:t>WEST VIRGINIA UNIVERSITY</a:t>
             </a:r>
           </a:p>
         </p:txBody>
@@ -4997,7 +5222,7 @@
       </p:sp>
       <p:sp>
         <p:nvSpPr>
-          <p:cNvPr id="13" name="DSPIRA 1"/>
+          <p:cNvPr id="14" name="DSPIRA 2"/>
           <p:cNvSpPr>
             <a:spLocks noGrp="1"/>
           </p:cNvSpPr>
@@ -5005,7 +5230,7 @@
         </p:nvSpPr>
         <p:spPr>
           <a:xfrm>
-            <a:off x="0" y="0"/>
+            <a:off x="0" y="7200900"/>
             <a:ext cx="12192000" cy="342900"/>
           </a:xfrm>
           <a:prstGeom prst="rect">
@@ -5021,7 +5246,7 @@
       </p:sp>
       <p:sp>
         <p:nvSpPr>
-          <p:cNvPr id="14" name="DSPIRA 2"/>
+          <p:cNvPr id="16" name="DSPIRA 4"/>
           <p:cNvSpPr>
             <a:spLocks noGrp="1"/>
           </p:cNvSpPr>
@@ -5029,32 +5254,8 @@
         </p:nvSpPr>
         <p:spPr>
           <a:xfrm>
-            <a:off x="0" y="7200900"/>
-            <a:ext cx="12192000" cy="342900"/>
-          </a:xfrm>
-          <a:prstGeom prst="rect">
-            <a:avLst/>
-          </a:prstGeom>
-          <a:solidFill>
-            <a:srgbClr val="FFFFFF"/>
-          </a:solidFill>
-          <a:ln w="0">
-            <a:noFill/>
-          </a:ln>
-        </p:spPr>
-      </p:sp>
-      <p:sp>
-        <p:nvSpPr>
-          <p:cNvPr id="15" name="DSPIRA 3"/>
-          <p:cNvSpPr>
-            <a:spLocks noGrp="1"/>
-          </p:cNvSpPr>
-          <p:nvPr/>
-        </p:nvSpPr>
-        <p:spPr>
-          <a:xfrm>
-            <a:off x="228600" y="76200"/>
-            <a:ext cx="4762500" cy="228600"/>
+            <a:off x="228600" y="7277100"/>
+            <a:ext cx="6667500" cy="228600"/>
           </a:xfrm>
           <a:prstGeom prst="rect">
             <a:avLst/>
@@ -5071,7 +5272,7 @@
           <a:lstStyle/>
           <a:p>
             <a:pPr>
-              <a:defRPr sz="1200" b="1">
+              <a:defRPr sz="900" b="0">
                 <a:solidFill>
                   <a:srgbClr val="002855"/>
                 </a:solidFill>
@@ -5081,9 +5282,159 @@
               </a:defRPr>
             </a:pPr>
             <a:r>
-              <a:rPr sz="1200" b="1">
+              <a:rPr sz="900" b="0">
                 <a:solidFill>
                   <a:srgbClr val="002855"/>
+                </a:solidFill>
+                <a:latin typeface="Arial"/>
+                <a:ea typeface="Arial"/>
+                <a:cs typeface="Arial"/>
+              </a:rPr>
+              <a:t>wvurail.org/dspira</a:t>
+            </a:r>
+          </a:p>
+        </p:txBody>
+      </p:sp>
+      <p:sp>
+        <p:nvSpPr>
+          <p:cNvPr id="17" name="DSPIRA 5"/>
+          <p:cNvSpPr>
+            <a:spLocks noGrp="1"/>
+          </p:cNvSpPr>
+          <p:nvPr/>
+        </p:nvSpPr>
+        <p:spPr>
+          <a:xfrm>
+            <a:off x="11191875" y="7277100"/>
+            <a:ext cx="762000" cy="228600"/>
+          </a:xfrm>
+          <a:prstGeom prst="rect">
+            <a:avLst/>
+          </a:prstGeom>
+          <a:noFill/>
+          <a:ln w="0">
+            <a:noFill/>
+          </a:ln>
+        </p:spPr>
+        <p:txBody>
+          <a:bodyPr>
+            <a:noAutofit/>
+          </a:bodyPr>
+          <a:lstStyle/>
+          <a:p>
+            <a:pPr>
+              <a:defRPr sz="900" b="0">
+                <a:solidFill>
+                  <a:srgbClr val="002855"/>
+                </a:solidFill>
+                <a:latin typeface="Arial"/>
+                <a:ea typeface="Arial"/>
+                <a:cs typeface="Arial"/>
+              </a:defRPr>
+            </a:pPr>
+            <a:r>
+              <a:rPr sz="900" b="0">
+                <a:solidFill>
+                  <a:srgbClr val="002855"/>
+                </a:solidFill>
+                <a:latin typeface="Arial"/>
+                <a:ea typeface="Arial"/>
+                <a:cs typeface="Arial"/>
+              </a:rPr>
+              <a:t>2 of 11</a:t>
+            </a:r>
+          </a:p>
+        </p:txBody>
+      </p:sp>
+      <p:sp>
+        <p:nvSpPr>
+          <p:cNvPr id="18" name="WVU DSPIRA navy band"/>
+          <p:cNvSpPr>
+            <a:spLocks noGrp="1"/>
+          </p:cNvSpPr>
+          <p:nvPr/>
+        </p:nvSpPr>
+        <p:spPr>
+          <a:xfrm>
+            <a:off x="0" y="0"/>
+            <a:ext cx="12192000" cy="323850"/>
+          </a:xfrm>
+          <a:prstGeom prst="rect">
+            <a:avLst/>
+          </a:prstGeom>
+          <a:solidFill>
+            <a:srgbClr val="002855"/>
+          </a:solidFill>
+          <a:ln w="0">
+            <a:noFill/>
+          </a:ln>
+        </p:spPr>
+      </p:sp>
+      <p:sp>
+        <p:nvSpPr>
+          <p:cNvPr id="19" name="WVU DSPIRA gold rule"/>
+          <p:cNvSpPr>
+            <a:spLocks noGrp="1"/>
+          </p:cNvSpPr>
+          <p:nvPr/>
+        </p:nvSpPr>
+        <p:spPr>
+          <a:xfrm>
+            <a:off x="0" y="323850"/>
+            <a:ext cx="12192000" cy="19050"/>
+          </a:xfrm>
+          <a:prstGeom prst="rect">
+            <a:avLst/>
+          </a:prstGeom>
+          <a:solidFill>
+            <a:srgbClr val="EEAA00"/>
+          </a:solidFill>
+          <a:ln w="0">
+            <a:noFill/>
+          </a:ln>
+        </p:spPr>
+      </p:sp>
+      <p:sp>
+        <p:nvSpPr>
+          <p:cNvPr id="20" name="WVU DSPIRA name"/>
+          <p:cNvSpPr>
+            <a:spLocks noGrp="1"/>
+          </p:cNvSpPr>
+          <p:nvPr/>
+        </p:nvSpPr>
+        <p:spPr>
+          <a:xfrm>
+            <a:off x="228600" y="19050"/>
+            <a:ext cx="2857500" cy="257175"/>
+          </a:xfrm>
+          <a:prstGeom prst="rect">
+            <a:avLst/>
+          </a:prstGeom>
+          <a:noFill/>
+          <a:ln w="0">
+            <a:noFill/>
+          </a:ln>
+        </p:spPr>
+        <p:txBody>
+          <a:bodyPr>
+            <a:noAutofit/>
+          </a:bodyPr>
+          <a:lstStyle/>
+          <a:p>
+            <a:pPr>
+              <a:defRPr sz="1600" b="1">
+                <a:solidFill>
+                  <a:srgbClr val="FFFFFF"/>
+                </a:solidFill>
+                <a:latin typeface="Arial"/>
+                <a:ea typeface="Arial"/>
+                <a:cs typeface="Arial"/>
+              </a:defRPr>
+            </a:pPr>
+            <a:r>
+              <a:rPr sz="1600" b="1">
+                <a:solidFill>
+                  <a:srgbClr val="FFFFFF"/>
                 </a:solidFill>
                 <a:latin typeface="Arial"/>
                 <a:ea typeface="Arial"/>
@@ -5096,7 +5447,7 @@
       </p:sp>
       <p:sp>
         <p:nvSpPr>
-          <p:cNvPr id="16" name="DSPIRA 4"/>
+          <p:cNvPr id="21" name="WVU DSPIRA university"/>
           <p:cNvSpPr>
             <a:spLocks noGrp="1"/>
           </p:cNvSpPr>
@@ -5104,8 +5455,8 @@
         </p:nvSpPr>
         <p:spPr>
           <a:xfrm>
-            <a:off x="228600" y="7277100"/>
-            <a:ext cx="6667500" cy="228600"/>
+            <a:off x="9334500" y="114300"/>
+            <a:ext cx="2628900" cy="171450"/>
           </a:xfrm>
           <a:prstGeom prst="rect">
             <a:avLst/>
@@ -5121,10 +5472,10 @@
           </a:bodyPr>
           <a:lstStyle/>
           <a:p>
-            <a:pPr>
-              <a:defRPr sz="900" b="0">
-                <a:solidFill>
-                  <a:srgbClr val="002855"/>
+            <a:pPr algn="r">
+              <a:defRPr sz="900">
+                <a:solidFill>
+                  <a:srgbClr val="FFFFFF"/>
                 </a:solidFill>
                 <a:latin typeface="Arial"/>
                 <a:ea typeface="Arial"/>
@@ -5132,66 +5483,15 @@
               </a:defRPr>
             </a:pPr>
             <a:r>
-              <a:rPr sz="900" b="0">
-                <a:solidFill>
-                  <a:srgbClr val="002855"/>
+              <a:rPr sz="900">
+                <a:solidFill>
+                  <a:srgbClr val="FFFFFF"/>
                 </a:solidFill>
                 <a:latin typeface="Arial"/>
                 <a:ea typeface="Arial"/>
                 <a:cs typeface="Arial"/>
               </a:rPr>
-              <a:t>wvurail.org/dspira</a:t>
-            </a:r>
-          </a:p>
-        </p:txBody>
-      </p:sp>
-      <p:sp>
-        <p:nvSpPr>
-          <p:cNvPr id="17" name="DSPIRA 5"/>
-          <p:cNvSpPr>
-            <a:spLocks noGrp="1"/>
-          </p:cNvSpPr>
-          <p:nvPr/>
-        </p:nvSpPr>
-        <p:spPr>
-          <a:xfrm>
-            <a:off x="11191875" y="7277100"/>
-            <a:ext cx="762000" cy="228600"/>
-          </a:xfrm>
-          <a:prstGeom prst="rect">
-            <a:avLst/>
-          </a:prstGeom>
-          <a:noFill/>
-          <a:ln w="0">
-            <a:noFill/>
-          </a:ln>
-        </p:spPr>
-        <p:txBody>
-          <a:bodyPr>
-            <a:noAutofit/>
-          </a:bodyPr>
-          <a:lstStyle/>
-          <a:p>
-            <a:pPr>
-              <a:defRPr sz="900" b="0">
-                <a:solidFill>
-                  <a:srgbClr val="002855"/>
-                </a:solidFill>
-                <a:latin typeface="Arial"/>
-                <a:ea typeface="Arial"/>
-                <a:cs typeface="Arial"/>
-              </a:defRPr>
-            </a:pPr>
-            <a:r>
-              <a:rPr sz="900" b="0">
-                <a:solidFill>
-                  <a:srgbClr val="002855"/>
-                </a:solidFill>
-                <a:latin typeface="Arial"/>
-                <a:ea typeface="Arial"/>
-                <a:cs typeface="Arial"/>
-              </a:rPr>
-              <a:t>2 of 11</a:t>
+              <a:t>WEST VIRGINIA UNIVERSITY</a:t>
             </a:r>
           </a:p>
         </p:txBody>
@@ -5719,7 +6019,7 @@
       </mc:AlternateContent>
       <p:sp>
         <p:nvSpPr>
-          <p:cNvPr id="13" name="DSPIRA 1"/>
+          <p:cNvPr id="14" name="DSPIRA 2"/>
           <p:cNvSpPr>
             <a:spLocks noGrp="1"/>
           </p:cNvSpPr>
@@ -5727,7 +6027,7 @@
         </p:nvSpPr>
         <p:spPr>
           <a:xfrm>
-            <a:off x="0" y="0"/>
+            <a:off x="0" y="7200900"/>
             <a:ext cx="12192000" cy="342900"/>
           </a:xfrm>
           <a:prstGeom prst="rect">
@@ -5743,7 +6043,7 @@
       </p:sp>
       <p:sp>
         <p:nvSpPr>
-          <p:cNvPr id="14" name="DSPIRA 2"/>
+          <p:cNvPr id="16" name="DSPIRA 4"/>
           <p:cNvSpPr>
             <a:spLocks noGrp="1"/>
           </p:cNvSpPr>
@@ -5751,32 +6051,8 @@
         </p:nvSpPr>
         <p:spPr>
           <a:xfrm>
-            <a:off x="0" y="7200900"/>
-            <a:ext cx="12192000" cy="342900"/>
-          </a:xfrm>
-          <a:prstGeom prst="rect">
-            <a:avLst/>
-          </a:prstGeom>
-          <a:solidFill>
-            <a:srgbClr val="FFFFFF"/>
-          </a:solidFill>
-          <a:ln w="0">
-            <a:noFill/>
-          </a:ln>
-        </p:spPr>
-      </p:sp>
-      <p:sp>
-        <p:nvSpPr>
-          <p:cNvPr id="15" name="DSPIRA 3"/>
-          <p:cNvSpPr>
-            <a:spLocks noGrp="1"/>
-          </p:cNvSpPr>
-          <p:nvPr/>
-        </p:nvSpPr>
-        <p:spPr>
-          <a:xfrm>
-            <a:off x="228600" y="76200"/>
-            <a:ext cx="4762500" cy="228600"/>
+            <a:off x="228600" y="7277100"/>
+            <a:ext cx="6667500" cy="228600"/>
           </a:xfrm>
           <a:prstGeom prst="rect">
             <a:avLst/>
@@ -5793,7 +6069,7 @@
           <a:lstStyle/>
           <a:p>
             <a:pPr>
-              <a:defRPr sz="1200" b="1">
+              <a:defRPr sz="900" b="0">
                 <a:solidFill>
                   <a:srgbClr val="002855"/>
                 </a:solidFill>
@@ -5803,9 +6079,159 @@
               </a:defRPr>
             </a:pPr>
             <a:r>
-              <a:rPr sz="1200" b="1">
+              <a:rPr sz="900" b="0">
                 <a:solidFill>
                   <a:srgbClr val="002855"/>
+                </a:solidFill>
+                <a:latin typeface="Arial"/>
+                <a:ea typeface="Arial"/>
+                <a:cs typeface="Arial"/>
+              </a:rPr>
+              <a:t>wvurail.org/dspira</a:t>
+            </a:r>
+          </a:p>
+        </p:txBody>
+      </p:sp>
+      <p:sp>
+        <p:nvSpPr>
+          <p:cNvPr id="17" name="DSPIRA 5"/>
+          <p:cNvSpPr>
+            <a:spLocks noGrp="1"/>
+          </p:cNvSpPr>
+          <p:nvPr/>
+        </p:nvSpPr>
+        <p:spPr>
+          <a:xfrm>
+            <a:off x="11191875" y="7277100"/>
+            <a:ext cx="762000" cy="228600"/>
+          </a:xfrm>
+          <a:prstGeom prst="rect">
+            <a:avLst/>
+          </a:prstGeom>
+          <a:noFill/>
+          <a:ln w="0">
+            <a:noFill/>
+          </a:ln>
+        </p:spPr>
+        <p:txBody>
+          <a:bodyPr>
+            <a:noAutofit/>
+          </a:bodyPr>
+          <a:lstStyle/>
+          <a:p>
+            <a:pPr>
+              <a:defRPr sz="900" b="0">
+                <a:solidFill>
+                  <a:srgbClr val="002855"/>
+                </a:solidFill>
+                <a:latin typeface="Arial"/>
+                <a:ea typeface="Arial"/>
+                <a:cs typeface="Arial"/>
+              </a:defRPr>
+            </a:pPr>
+            <a:r>
+              <a:rPr sz="900" b="0">
+                <a:solidFill>
+                  <a:srgbClr val="002855"/>
+                </a:solidFill>
+                <a:latin typeface="Arial"/>
+                <a:ea typeface="Arial"/>
+                <a:cs typeface="Arial"/>
+              </a:rPr>
+              <a:t>3 of 11</a:t>
+            </a:r>
+          </a:p>
+        </p:txBody>
+      </p:sp>
+      <p:sp>
+        <p:nvSpPr>
+          <p:cNvPr id="18" name="WVU DSPIRA navy band"/>
+          <p:cNvSpPr>
+            <a:spLocks noGrp="1"/>
+          </p:cNvSpPr>
+          <p:nvPr/>
+        </p:nvSpPr>
+        <p:spPr>
+          <a:xfrm>
+            <a:off x="0" y="0"/>
+            <a:ext cx="12192000" cy="323850"/>
+          </a:xfrm>
+          <a:prstGeom prst="rect">
+            <a:avLst/>
+          </a:prstGeom>
+          <a:solidFill>
+            <a:srgbClr val="002855"/>
+          </a:solidFill>
+          <a:ln w="0">
+            <a:noFill/>
+          </a:ln>
+        </p:spPr>
+      </p:sp>
+      <p:sp>
+        <p:nvSpPr>
+          <p:cNvPr id="19" name="WVU DSPIRA gold rule"/>
+          <p:cNvSpPr>
+            <a:spLocks noGrp="1"/>
+          </p:cNvSpPr>
+          <p:nvPr/>
+        </p:nvSpPr>
+        <p:spPr>
+          <a:xfrm>
+            <a:off x="0" y="323850"/>
+            <a:ext cx="12192000" cy="19050"/>
+          </a:xfrm>
+          <a:prstGeom prst="rect">
+            <a:avLst/>
+          </a:prstGeom>
+          <a:solidFill>
+            <a:srgbClr val="EEAA00"/>
+          </a:solidFill>
+          <a:ln w="0">
+            <a:noFill/>
+          </a:ln>
+        </p:spPr>
+      </p:sp>
+      <p:sp>
+        <p:nvSpPr>
+          <p:cNvPr id="20" name="WVU DSPIRA name"/>
+          <p:cNvSpPr>
+            <a:spLocks noGrp="1"/>
+          </p:cNvSpPr>
+          <p:nvPr/>
+        </p:nvSpPr>
+        <p:spPr>
+          <a:xfrm>
+            <a:off x="228600" y="19050"/>
+            <a:ext cx="2857500" cy="257175"/>
+          </a:xfrm>
+          <a:prstGeom prst="rect">
+            <a:avLst/>
+          </a:prstGeom>
+          <a:noFill/>
+          <a:ln w="0">
+            <a:noFill/>
+          </a:ln>
+        </p:spPr>
+        <p:txBody>
+          <a:bodyPr>
+            <a:noAutofit/>
+          </a:bodyPr>
+          <a:lstStyle/>
+          <a:p>
+            <a:pPr>
+              <a:defRPr sz="1600" b="1">
+                <a:solidFill>
+                  <a:srgbClr val="FFFFFF"/>
+                </a:solidFill>
+                <a:latin typeface="Arial"/>
+                <a:ea typeface="Arial"/>
+                <a:cs typeface="Arial"/>
+              </a:defRPr>
+            </a:pPr>
+            <a:r>
+              <a:rPr sz="1600" b="1">
+                <a:solidFill>
+                  <a:srgbClr val="FFFFFF"/>
                 </a:solidFill>
                 <a:latin typeface="Arial"/>
                 <a:ea typeface="Arial"/>
@@ -5818,7 +6244,7 @@
       </p:sp>
       <p:sp>
         <p:nvSpPr>
-          <p:cNvPr id="16" name="DSPIRA 4"/>
+          <p:cNvPr id="21" name="WVU DSPIRA university"/>
           <p:cNvSpPr>
             <a:spLocks noGrp="1"/>
           </p:cNvSpPr>
@@ -5826,8 +6252,8 @@
         </p:nvSpPr>
         <p:spPr>
           <a:xfrm>
-            <a:off x="228600" y="7277100"/>
-            <a:ext cx="6667500" cy="228600"/>
+            <a:off x="9334500" y="114300"/>
+            <a:ext cx="2628900" cy="171450"/>
           </a:xfrm>
           <a:prstGeom prst="rect">
             <a:avLst/>
@@ -5843,10 +6269,10 @@
           </a:bodyPr>
           <a:lstStyle/>
           <a:p>
-            <a:pPr>
-              <a:defRPr sz="900" b="0">
-                <a:solidFill>
-                  <a:srgbClr val="002855"/>
+            <a:pPr algn="r">
+              <a:defRPr sz="900">
+                <a:solidFill>
+                  <a:srgbClr val="FFFFFF"/>
                 </a:solidFill>
                 <a:latin typeface="Arial"/>
                 <a:ea typeface="Arial"/>
@@ -5854,66 +6280,15 @@
               </a:defRPr>
             </a:pPr>
             <a:r>
-              <a:rPr sz="900" b="0">
-                <a:solidFill>
-                  <a:srgbClr val="002855"/>
+              <a:rPr sz="900">
+                <a:solidFill>
+                  <a:srgbClr val="FFFFFF"/>
                 </a:solidFill>
                 <a:latin typeface="Arial"/>
                 <a:ea typeface="Arial"/>
                 <a:cs typeface="Arial"/>
               </a:rPr>
-              <a:t>wvurail.org/dspira</a:t>
-            </a:r>
-          </a:p>
-        </p:txBody>
-      </p:sp>
-      <p:sp>
-        <p:nvSpPr>
-          <p:cNvPr id="17" name="DSPIRA 5"/>
-          <p:cNvSpPr>
-            <a:spLocks noGrp="1"/>
-          </p:cNvSpPr>
-          <p:nvPr/>
-        </p:nvSpPr>
-        <p:spPr>
-          <a:xfrm>
-            <a:off x="11191875" y="7277100"/>
-            <a:ext cx="762000" cy="228600"/>
-          </a:xfrm>
-          <a:prstGeom prst="rect">
-            <a:avLst/>
-          </a:prstGeom>
-          <a:noFill/>
-          <a:ln w="0">
-            <a:noFill/>
-          </a:ln>
-        </p:spPr>
-        <p:txBody>
-          <a:bodyPr>
-            <a:noAutofit/>
-          </a:bodyPr>
-          <a:lstStyle/>
-          <a:p>
-            <a:pPr>
-              <a:defRPr sz="900" b="0">
-                <a:solidFill>
-                  <a:srgbClr val="002855"/>
-                </a:solidFill>
-                <a:latin typeface="Arial"/>
-                <a:ea typeface="Arial"/>
-                <a:cs typeface="Arial"/>
-              </a:defRPr>
-            </a:pPr>
-            <a:r>
-              <a:rPr sz="900" b="0">
-                <a:solidFill>
-                  <a:srgbClr val="002855"/>
-                </a:solidFill>
-                <a:latin typeface="Arial"/>
-                <a:ea typeface="Arial"/>
-                <a:cs typeface="Arial"/>
-              </a:rPr>
-              <a:t>3 of 11</a:t>
+              <a:t>WEST VIRGINIA UNIVERSITY</a:t>
             </a:r>
           </a:p>
         </p:txBody>
@@ -6101,7 +6476,7 @@
       </p:sp>
       <p:sp>
         <p:nvSpPr>
-          <p:cNvPr id="10" name="DSPIRA 1"/>
+          <p:cNvPr id="11" name="DSPIRA 2"/>
           <p:cNvSpPr>
             <a:spLocks noGrp="1"/>
           </p:cNvSpPr>
@@ -6109,7 +6484,7 @@
         </p:nvSpPr>
         <p:spPr>
           <a:xfrm>
-            <a:off x="0" y="0"/>
+            <a:off x="0" y="7200900"/>
             <a:ext cx="12192000" cy="342900"/>
           </a:xfrm>
           <a:prstGeom prst="rect">
@@ -6125,7 +6500,7 @@
       </p:sp>
       <p:sp>
         <p:nvSpPr>
-          <p:cNvPr id="11" name="DSPIRA 2"/>
+          <p:cNvPr id="13" name="DSPIRA 4"/>
           <p:cNvSpPr>
             <a:spLocks noGrp="1"/>
           </p:cNvSpPr>
@@ -6133,32 +6508,8 @@
         </p:nvSpPr>
         <p:spPr>
           <a:xfrm>
-            <a:off x="0" y="7200900"/>
-            <a:ext cx="12192000" cy="342900"/>
-          </a:xfrm>
-          <a:prstGeom prst="rect">
-            <a:avLst/>
-          </a:prstGeom>
-          <a:solidFill>
-            <a:srgbClr val="FFFFFF"/>
-          </a:solidFill>
-          <a:ln w="0">
-            <a:noFill/>
-          </a:ln>
-        </p:spPr>
-      </p:sp>
-      <p:sp>
-        <p:nvSpPr>
-          <p:cNvPr id="12" name="DSPIRA 3"/>
-          <p:cNvSpPr>
-            <a:spLocks noGrp="1"/>
-          </p:cNvSpPr>
-          <p:nvPr/>
-        </p:nvSpPr>
-        <p:spPr>
-          <a:xfrm>
-            <a:off x="228600" y="76200"/>
-            <a:ext cx="4762500" cy="228600"/>
+            <a:off x="228600" y="7277100"/>
+            <a:ext cx="6667500" cy="228600"/>
           </a:xfrm>
           <a:prstGeom prst="rect">
             <a:avLst/>
@@ -6175,7 +6526,7 @@
           <a:lstStyle/>
           <a:p>
             <a:pPr>
-              <a:defRPr sz="1200" b="1">
+              <a:defRPr sz="900" b="0">
                 <a:solidFill>
                   <a:srgbClr val="002855"/>
                 </a:solidFill>
@@ -6185,9 +6536,159 @@
               </a:defRPr>
             </a:pPr>
             <a:r>
-              <a:rPr sz="1200" b="1">
+              <a:rPr sz="900" b="0">
                 <a:solidFill>
                   <a:srgbClr val="002855"/>
+                </a:solidFill>
+                <a:latin typeface="Arial"/>
+                <a:ea typeface="Arial"/>
+                <a:cs typeface="Arial"/>
+              </a:rPr>
+              <a:t>wvurail.org/dspira</a:t>
+            </a:r>
+          </a:p>
+        </p:txBody>
+      </p:sp>
+      <p:sp>
+        <p:nvSpPr>
+          <p:cNvPr id="14" name="DSPIRA 5"/>
+          <p:cNvSpPr>
+            <a:spLocks noGrp="1"/>
+          </p:cNvSpPr>
+          <p:nvPr/>
+        </p:nvSpPr>
+        <p:spPr>
+          <a:xfrm>
+            <a:off x="11191875" y="7277100"/>
+            <a:ext cx="762000" cy="228600"/>
+          </a:xfrm>
+          <a:prstGeom prst="rect">
+            <a:avLst/>
+          </a:prstGeom>
+          <a:noFill/>
+          <a:ln w="0">
+            <a:noFill/>
+          </a:ln>
+        </p:spPr>
+        <p:txBody>
+          <a:bodyPr>
+            <a:noAutofit/>
+          </a:bodyPr>
+          <a:lstStyle/>
+          <a:p>
+            <a:pPr>
+              <a:defRPr sz="900" b="0">
+                <a:solidFill>
+                  <a:srgbClr val="002855"/>
+                </a:solidFill>
+                <a:latin typeface="Arial"/>
+                <a:ea typeface="Arial"/>
+                <a:cs typeface="Arial"/>
+              </a:defRPr>
+            </a:pPr>
+            <a:r>
+              <a:rPr sz="900" b="0">
+                <a:solidFill>
+                  <a:srgbClr val="002855"/>
+                </a:solidFill>
+                <a:latin typeface="Arial"/>
+                <a:ea typeface="Arial"/>
+                <a:cs typeface="Arial"/>
+              </a:rPr>
+              <a:t>4 of 11</a:t>
+            </a:r>
+          </a:p>
+        </p:txBody>
+      </p:sp>
+      <p:sp>
+        <p:nvSpPr>
+          <p:cNvPr id="15" name="WVU DSPIRA navy band"/>
+          <p:cNvSpPr>
+            <a:spLocks noGrp="1"/>
+          </p:cNvSpPr>
+          <p:nvPr/>
+        </p:nvSpPr>
+        <p:spPr>
+          <a:xfrm>
+            <a:off x="0" y="0"/>
+            <a:ext cx="12192000" cy="323850"/>
+          </a:xfrm>
+          <a:prstGeom prst="rect">
+            <a:avLst/>
+          </a:prstGeom>
+          <a:solidFill>
+            <a:srgbClr val="002855"/>
+          </a:solidFill>
+          <a:ln w="0">
+            <a:noFill/>
+          </a:ln>
+        </p:spPr>
+      </p:sp>
+      <p:sp>
+        <p:nvSpPr>
+          <p:cNvPr id="16" name="WVU DSPIRA gold rule"/>
+          <p:cNvSpPr>
+            <a:spLocks noGrp="1"/>
+          </p:cNvSpPr>
+          <p:nvPr/>
+        </p:nvSpPr>
+        <p:spPr>
+          <a:xfrm>
+            <a:off x="0" y="323850"/>
+            <a:ext cx="12192000" cy="19050"/>
+          </a:xfrm>
+          <a:prstGeom prst="rect">
+            <a:avLst/>
+          </a:prstGeom>
+          <a:solidFill>
+            <a:srgbClr val="EEAA00"/>
+          </a:solidFill>
+          <a:ln w="0">
+            <a:noFill/>
+          </a:ln>
+        </p:spPr>
+      </p:sp>
+      <p:sp>
+        <p:nvSpPr>
+          <p:cNvPr id="17" name="WVU DSPIRA name"/>
+          <p:cNvSpPr>
+            <a:spLocks noGrp="1"/>
+          </p:cNvSpPr>
+          <p:nvPr/>
+        </p:nvSpPr>
+        <p:spPr>
+          <a:xfrm>
+            <a:off x="228600" y="19050"/>
+            <a:ext cx="2857500" cy="257175"/>
+          </a:xfrm>
+          <a:prstGeom prst="rect">
+            <a:avLst/>
+          </a:prstGeom>
+          <a:noFill/>
+          <a:ln w="0">
+            <a:noFill/>
+          </a:ln>
+        </p:spPr>
+        <p:txBody>
+          <a:bodyPr>
+            <a:noAutofit/>
+          </a:bodyPr>
+          <a:lstStyle/>
+          <a:p>
+            <a:pPr>
+              <a:defRPr sz="1600" b="1">
+                <a:solidFill>
+                  <a:srgbClr val="FFFFFF"/>
+                </a:solidFill>
+                <a:latin typeface="Arial"/>
+                <a:ea typeface="Arial"/>
+                <a:cs typeface="Arial"/>
+              </a:defRPr>
+            </a:pPr>
+            <a:r>
+              <a:rPr sz="1600" b="1">
+                <a:solidFill>
+                  <a:srgbClr val="FFFFFF"/>
                 </a:solidFill>
                 <a:latin typeface="Arial"/>
                 <a:ea typeface="Arial"/>
@@ -6200,7 +6701,7 @@
       </p:sp>
       <p:sp>
         <p:nvSpPr>
-          <p:cNvPr id="13" name="DSPIRA 4"/>
+          <p:cNvPr id="18" name="WVU DSPIRA university"/>
           <p:cNvSpPr>
             <a:spLocks noGrp="1"/>
           </p:cNvSpPr>
@@ -6208,8 +6709,8 @@
         </p:nvSpPr>
         <p:spPr>
           <a:xfrm>
-            <a:off x="228600" y="7277100"/>
-            <a:ext cx="6667500" cy="228600"/>
+            <a:off x="9334500" y="114300"/>
+            <a:ext cx="2628900" cy="171450"/>
           </a:xfrm>
           <a:prstGeom prst="rect">
             <a:avLst/>
@@ -6225,10 +6726,10 @@
           </a:bodyPr>
           <a:lstStyle/>
           <a:p>
-            <a:pPr>
-              <a:defRPr sz="900" b="0">
-                <a:solidFill>
-                  <a:srgbClr val="002855"/>
+            <a:pPr algn="r">
+              <a:defRPr sz="900">
+                <a:solidFill>
+                  <a:srgbClr val="FFFFFF"/>
                 </a:solidFill>
                 <a:latin typeface="Arial"/>
                 <a:ea typeface="Arial"/>
@@ -6236,66 +6737,15 @@
               </a:defRPr>
             </a:pPr>
             <a:r>
-              <a:rPr sz="900" b="0">
-                <a:solidFill>
-                  <a:srgbClr val="002855"/>
+              <a:rPr sz="900">
+                <a:solidFill>
+                  <a:srgbClr val="FFFFFF"/>
                 </a:solidFill>
                 <a:latin typeface="Arial"/>
                 <a:ea typeface="Arial"/>
                 <a:cs typeface="Arial"/>
               </a:rPr>
-              <a:t>wvurail.org/dspira</a:t>
-            </a:r>
-          </a:p>
-        </p:txBody>
-      </p:sp>
-      <p:sp>
-        <p:nvSpPr>
-          <p:cNvPr id="14" name="DSPIRA 5"/>
-          <p:cNvSpPr>
-            <a:spLocks noGrp="1"/>
-          </p:cNvSpPr>
-          <p:nvPr/>
-        </p:nvSpPr>
-        <p:spPr>
-          <a:xfrm>
-            <a:off x="11191875" y="7277100"/>
-            <a:ext cx="762000" cy="228600"/>
-          </a:xfrm>
-          <a:prstGeom prst="rect">
-            <a:avLst/>
-          </a:prstGeom>
-          <a:noFill/>
-          <a:ln w="0">
-            <a:noFill/>
-          </a:ln>
-        </p:spPr>
-        <p:txBody>
-          <a:bodyPr>
-            <a:noAutofit/>
-          </a:bodyPr>
-          <a:lstStyle/>
-          <a:p>
-            <a:pPr>
-              <a:defRPr sz="900" b="0">
-                <a:solidFill>
-                  <a:srgbClr val="002855"/>
-                </a:solidFill>
-                <a:latin typeface="Arial"/>
-                <a:ea typeface="Arial"/>
-                <a:cs typeface="Arial"/>
-              </a:defRPr>
-            </a:pPr>
-            <a:r>
-              <a:rPr sz="900" b="0">
-                <a:solidFill>
-                  <a:srgbClr val="002855"/>
-                </a:solidFill>
-                <a:latin typeface="Arial"/>
-                <a:ea typeface="Arial"/>
-                <a:cs typeface="Arial"/>
-              </a:rPr>
-              <a:t>4 of 11</a:t>
+              <a:t>WEST VIRGINIA UNIVERSITY</a:t>
             </a:r>
           </a:p>
         </p:txBody>
@@ -6486,7 +6936,7 @@
       </p:sp>
       <p:sp>
         <p:nvSpPr>
-          <p:cNvPr id="17" name="DSPIRA 1"/>
+          <p:cNvPr id="18" name="DSPIRA 2"/>
           <p:cNvSpPr>
             <a:spLocks noGrp="1"/>
           </p:cNvSpPr>
@@ -6494,7 +6944,7 @@
         </p:nvSpPr>
         <p:spPr>
           <a:xfrm>
-            <a:off x="0" y="0"/>
+            <a:off x="0" y="7200900"/>
             <a:ext cx="12192000" cy="342900"/>
           </a:xfrm>
           <a:prstGeom prst="rect">
@@ -6510,7 +6960,7 @@
       </p:sp>
       <p:sp>
         <p:nvSpPr>
-          <p:cNvPr id="18" name="DSPIRA 2"/>
+          <p:cNvPr id="20" name="DSPIRA 4"/>
           <p:cNvSpPr>
             <a:spLocks noGrp="1"/>
           </p:cNvSpPr>
@@ -6518,32 +6968,8 @@
         </p:nvSpPr>
         <p:spPr>
           <a:xfrm>
-            <a:off x="0" y="7200900"/>
-            <a:ext cx="12192000" cy="342900"/>
-          </a:xfrm>
-          <a:prstGeom prst="rect">
-            <a:avLst/>
-          </a:prstGeom>
-          <a:solidFill>
-            <a:srgbClr val="FFFFFF"/>
-          </a:solidFill>
-          <a:ln w="0">
-            <a:noFill/>
-          </a:ln>
-        </p:spPr>
-      </p:sp>
-      <p:sp>
-        <p:nvSpPr>
-          <p:cNvPr id="19" name="DSPIRA 3"/>
-          <p:cNvSpPr>
-            <a:spLocks noGrp="1"/>
-          </p:cNvSpPr>
-          <p:nvPr/>
-        </p:nvSpPr>
-        <p:spPr>
-          <a:xfrm>
-            <a:off x="228600" y="76200"/>
-            <a:ext cx="4762500" cy="228600"/>
+            <a:off x="228600" y="7277100"/>
+            <a:ext cx="6667500" cy="228600"/>
           </a:xfrm>
           <a:prstGeom prst="rect">
             <a:avLst/>
@@ -6560,7 +6986,7 @@
           <a:lstStyle/>
           <a:p>
             <a:pPr>
-              <a:defRPr sz="1200" b="1">
+              <a:defRPr sz="900" b="0">
                 <a:solidFill>
                   <a:srgbClr val="002855"/>
                 </a:solidFill>
@@ -6570,9 +6996,159 @@
               </a:defRPr>
             </a:pPr>
             <a:r>
-              <a:rPr sz="1200" b="1">
+              <a:rPr sz="900" b="0">
                 <a:solidFill>
                   <a:srgbClr val="002855"/>
+                </a:solidFill>
+                <a:latin typeface="Arial"/>
+                <a:ea typeface="Arial"/>
+                <a:cs typeface="Arial"/>
+              </a:rPr>
+              <a:t>wvurail.org/dspira</a:t>
+            </a:r>
+          </a:p>
+        </p:txBody>
+      </p:sp>
+      <p:sp>
+        <p:nvSpPr>
+          <p:cNvPr id="21" name="DSPIRA 5"/>
+          <p:cNvSpPr>
+            <a:spLocks noGrp="1"/>
+          </p:cNvSpPr>
+          <p:nvPr/>
+        </p:nvSpPr>
+        <p:spPr>
+          <a:xfrm>
+            <a:off x="11191875" y="7277100"/>
+            <a:ext cx="762000" cy="228600"/>
+          </a:xfrm>
+          <a:prstGeom prst="rect">
+            <a:avLst/>
+          </a:prstGeom>
+          <a:noFill/>
+          <a:ln w="0">
+            <a:noFill/>
+          </a:ln>
+        </p:spPr>
+        <p:txBody>
+          <a:bodyPr>
+            <a:noAutofit/>
+          </a:bodyPr>
+          <a:lstStyle/>
+          <a:p>
+            <a:pPr>
+              <a:defRPr sz="900" b="0">
+                <a:solidFill>
+                  <a:srgbClr val="002855"/>
+                </a:solidFill>
+                <a:latin typeface="Arial"/>
+                <a:ea typeface="Arial"/>
+                <a:cs typeface="Arial"/>
+              </a:defRPr>
+            </a:pPr>
+            <a:r>
+              <a:rPr sz="900" b="0">
+                <a:solidFill>
+                  <a:srgbClr val="002855"/>
+                </a:solidFill>
+                <a:latin typeface="Arial"/>
+                <a:ea typeface="Arial"/>
+                <a:cs typeface="Arial"/>
+              </a:rPr>
+              <a:t>5 of 11</a:t>
+            </a:r>
+          </a:p>
+        </p:txBody>
+      </p:sp>
+      <p:sp>
+        <p:nvSpPr>
+          <p:cNvPr id="22" name="WVU DSPIRA navy band"/>
+          <p:cNvSpPr>
+            <a:spLocks noGrp="1"/>
+          </p:cNvSpPr>
+          <p:nvPr/>
+        </p:nvSpPr>
+        <p:spPr>
+          <a:xfrm>
+            <a:off x="0" y="0"/>
+            <a:ext cx="12192000" cy="323850"/>
+          </a:xfrm>
+          <a:prstGeom prst="rect">
+            <a:avLst/>
+          </a:prstGeom>
+          <a:solidFill>
+            <a:srgbClr val="002855"/>
+          </a:solidFill>
+          <a:ln w="0">
+            <a:noFill/>
+          </a:ln>
+        </p:spPr>
+      </p:sp>
+      <p:sp>
+        <p:nvSpPr>
+          <p:cNvPr id="23" name="WVU DSPIRA gold rule"/>
+          <p:cNvSpPr>
+            <a:spLocks noGrp="1"/>
+          </p:cNvSpPr>
+          <p:nvPr/>
+        </p:nvSpPr>
+        <p:spPr>
+          <a:xfrm>
+            <a:off x="0" y="323850"/>
+            <a:ext cx="12192000" cy="19050"/>
+          </a:xfrm>
+          <a:prstGeom prst="rect">
+            <a:avLst/>
+          </a:prstGeom>
+          <a:solidFill>
+            <a:srgbClr val="EEAA00"/>
+          </a:solidFill>
+          <a:ln w="0">
+            <a:noFill/>
+          </a:ln>
+        </p:spPr>
+      </p:sp>
+      <p:sp>
+        <p:nvSpPr>
+          <p:cNvPr id="24" name="WVU DSPIRA name"/>
+          <p:cNvSpPr>
+            <a:spLocks noGrp="1"/>
+          </p:cNvSpPr>
+          <p:nvPr/>
+        </p:nvSpPr>
+        <p:spPr>
+          <a:xfrm>
+            <a:off x="228600" y="19050"/>
+            <a:ext cx="2857500" cy="257175"/>
+          </a:xfrm>
+          <a:prstGeom prst="rect">
+            <a:avLst/>
+          </a:prstGeom>
+          <a:noFill/>
+          <a:ln w="0">
+            <a:noFill/>
+          </a:ln>
+        </p:spPr>
+        <p:txBody>
+          <a:bodyPr>
+            <a:noAutofit/>
+          </a:bodyPr>
+          <a:lstStyle/>
+          <a:p>
+            <a:pPr>
+              <a:defRPr sz="1600" b="1">
+                <a:solidFill>
+                  <a:srgbClr val="FFFFFF"/>
+                </a:solidFill>
+                <a:latin typeface="Arial"/>
+                <a:ea typeface="Arial"/>
+                <a:cs typeface="Arial"/>
+              </a:defRPr>
+            </a:pPr>
+            <a:r>
+              <a:rPr sz="1600" b="1">
+                <a:solidFill>
+                  <a:srgbClr val="FFFFFF"/>
                 </a:solidFill>
                 <a:latin typeface="Arial"/>
                 <a:ea typeface="Arial"/>
@@ -6585,7 +7161,7 @@
       </p:sp>
       <p:sp>
         <p:nvSpPr>
-          <p:cNvPr id="20" name="DSPIRA 4"/>
+          <p:cNvPr id="25" name="WVU DSPIRA university"/>
           <p:cNvSpPr>
             <a:spLocks noGrp="1"/>
           </p:cNvSpPr>
@@ -6593,8 +7169,8 @@
         </p:nvSpPr>
         <p:spPr>
           <a:xfrm>
-            <a:off x="228600" y="7277100"/>
-            <a:ext cx="6667500" cy="228600"/>
+            <a:off x="9334500" y="114300"/>
+            <a:ext cx="2628900" cy="171450"/>
           </a:xfrm>
           <a:prstGeom prst="rect">
             <a:avLst/>
@@ -6610,10 +7186,10 @@
           </a:bodyPr>
           <a:lstStyle/>
           <a:p>
-            <a:pPr>
-              <a:defRPr sz="900" b="0">
-                <a:solidFill>
-                  <a:srgbClr val="002855"/>
+            <a:pPr algn="r">
+              <a:defRPr sz="900">
+                <a:solidFill>
+                  <a:srgbClr val="FFFFFF"/>
                 </a:solidFill>
                 <a:latin typeface="Arial"/>
                 <a:ea typeface="Arial"/>
@@ -6621,66 +7197,15 @@
               </a:defRPr>
             </a:pPr>
             <a:r>
-              <a:rPr sz="900" b="0">
-                <a:solidFill>
-                  <a:srgbClr val="002855"/>
+              <a:rPr sz="900">
+                <a:solidFill>
+                  <a:srgbClr val="FFFFFF"/>
                 </a:solidFill>
                 <a:latin typeface="Arial"/>
                 <a:ea typeface="Arial"/>
                 <a:cs typeface="Arial"/>
               </a:rPr>
-              <a:t>wvurail.org/dspira</a:t>
-            </a:r>
-          </a:p>
-        </p:txBody>
-      </p:sp>
-      <p:sp>
-        <p:nvSpPr>
-          <p:cNvPr id="21" name="DSPIRA 5"/>
-          <p:cNvSpPr>
-            <a:spLocks noGrp="1"/>
-          </p:cNvSpPr>
-          <p:nvPr/>
-        </p:nvSpPr>
-        <p:spPr>
-          <a:xfrm>
-            <a:off x="11191875" y="7277100"/>
-            <a:ext cx="762000" cy="228600"/>
-          </a:xfrm>
-          <a:prstGeom prst="rect">
-            <a:avLst/>
-          </a:prstGeom>
-          <a:noFill/>
-          <a:ln w="0">
-            <a:noFill/>
-          </a:ln>
-        </p:spPr>
-        <p:txBody>
-          <a:bodyPr>
-            <a:noAutofit/>
-          </a:bodyPr>
-          <a:lstStyle/>
-          <a:p>
-            <a:pPr>
-              <a:defRPr sz="900" b="0">
-                <a:solidFill>
-                  <a:srgbClr val="002855"/>
-                </a:solidFill>
-                <a:latin typeface="Arial"/>
-                <a:ea typeface="Arial"/>
-                <a:cs typeface="Arial"/>
-              </a:defRPr>
-            </a:pPr>
-            <a:r>
-              <a:rPr sz="900" b="0">
-                <a:solidFill>
-                  <a:srgbClr val="002855"/>
-                </a:solidFill>
-                <a:latin typeface="Arial"/>
-                <a:ea typeface="Arial"/>
-                <a:cs typeface="Arial"/>
-              </a:rPr>
-              <a:t>5 of 11</a:t>
+              <a:t>WEST VIRGINIA UNIVERSITY</a:t>
             </a:r>
           </a:p>
         </p:txBody>
@@ -7446,7 +7971,7 @@
       </mc:AlternateContent>
       <p:sp>
         <p:nvSpPr>
-          <p:cNvPr id="14" name="DSPIRA 1"/>
+          <p:cNvPr id="15" name="DSPIRA 2"/>
           <p:cNvSpPr>
             <a:spLocks noGrp="1"/>
           </p:cNvSpPr>
@@ -7454,7 +7979,7 @@
         </p:nvSpPr>
         <p:spPr>
           <a:xfrm>
-            <a:off x="0" y="0"/>
+            <a:off x="0" y="7200900"/>
             <a:ext cx="12192000" cy="342900"/>
           </a:xfrm>
           <a:prstGeom prst="rect">
@@ -7470,7 +7995,7 @@
       </p:sp>
       <p:sp>
         <p:nvSpPr>
-          <p:cNvPr id="15" name="DSPIRA 2"/>
+          <p:cNvPr id="17" name="DSPIRA 4"/>
           <p:cNvSpPr>
             <a:spLocks noGrp="1"/>
           </p:cNvSpPr>
@@ -7478,32 +8003,8 @@
         </p:nvSpPr>
         <p:spPr>
           <a:xfrm>
-            <a:off x="0" y="7200900"/>
-            <a:ext cx="12192000" cy="342900"/>
-          </a:xfrm>
-          <a:prstGeom prst="rect">
-            <a:avLst/>
-          </a:prstGeom>
-          <a:solidFill>
-            <a:srgbClr val="FFFFFF"/>
-          </a:solidFill>
-          <a:ln w="0">
-            <a:noFill/>
-          </a:ln>
-        </p:spPr>
-      </p:sp>
-      <p:sp>
-        <p:nvSpPr>
-          <p:cNvPr id="16" name="DSPIRA 3"/>
-          <p:cNvSpPr>
-            <a:spLocks noGrp="1"/>
-          </p:cNvSpPr>
-          <p:nvPr/>
-        </p:nvSpPr>
-        <p:spPr>
-          <a:xfrm>
-            <a:off x="228600" y="76200"/>
-            <a:ext cx="4762500" cy="228600"/>
+            <a:off x="228600" y="7277100"/>
+            <a:ext cx="6667500" cy="228600"/>
           </a:xfrm>
           <a:prstGeom prst="rect">
             <a:avLst/>
@@ -7520,7 +8021,7 @@
           <a:lstStyle/>
           <a:p>
             <a:pPr>
-              <a:defRPr sz="1200" b="1">
+              <a:defRPr sz="900" b="0">
                 <a:solidFill>
                   <a:srgbClr val="002855"/>
                 </a:solidFill>
@@ -7530,9 +8031,159 @@
               </a:defRPr>
             </a:pPr>
             <a:r>
-              <a:rPr sz="1200" b="1">
+              <a:rPr sz="900" b="0">
                 <a:solidFill>
                   <a:srgbClr val="002855"/>
+                </a:solidFill>
+                <a:latin typeface="Arial"/>
+                <a:ea typeface="Arial"/>
+                <a:cs typeface="Arial"/>
+              </a:rPr>
+              <a:t>wvurail.org/dspira</a:t>
+            </a:r>
+          </a:p>
+        </p:txBody>
+      </p:sp>
+      <p:sp>
+        <p:nvSpPr>
+          <p:cNvPr id="18" name="DSPIRA 5"/>
+          <p:cNvSpPr>
+            <a:spLocks noGrp="1"/>
+          </p:cNvSpPr>
+          <p:nvPr/>
+        </p:nvSpPr>
+        <p:spPr>
+          <a:xfrm>
+            <a:off x="11191875" y="7277100"/>
+            <a:ext cx="762000" cy="228600"/>
+          </a:xfrm>
+          <a:prstGeom prst="rect">
+            <a:avLst/>
+          </a:prstGeom>
+          <a:noFill/>
+          <a:ln w="0">
+            <a:noFill/>
+          </a:ln>
+        </p:spPr>
+        <p:txBody>
+          <a:bodyPr>
+            <a:noAutofit/>
+          </a:bodyPr>
+          <a:lstStyle/>
+          <a:p>
+            <a:pPr>
+              <a:defRPr sz="900" b="0">
+                <a:solidFill>
+                  <a:srgbClr val="002855"/>
+                </a:solidFill>
+                <a:latin typeface="Arial"/>
+                <a:ea typeface="Arial"/>
+                <a:cs typeface="Arial"/>
+              </a:defRPr>
+            </a:pPr>
+            <a:r>
+              <a:rPr sz="900" b="0">
+                <a:solidFill>
+                  <a:srgbClr val="002855"/>
+                </a:solidFill>
+                <a:latin typeface="Arial"/>
+                <a:ea typeface="Arial"/>
+                <a:cs typeface="Arial"/>
+              </a:rPr>
+              <a:t>6 of 11</a:t>
+            </a:r>
+          </a:p>
+        </p:txBody>
+      </p:sp>
+      <p:sp>
+        <p:nvSpPr>
+          <p:cNvPr id="19" name="WVU DSPIRA navy band"/>
+          <p:cNvSpPr>
+            <a:spLocks noGrp="1"/>
+          </p:cNvSpPr>
+          <p:nvPr/>
+        </p:nvSpPr>
+        <p:spPr>
+          <a:xfrm>
+            <a:off x="0" y="0"/>
+            <a:ext cx="12192000" cy="323850"/>
+          </a:xfrm>
+          <a:prstGeom prst="rect">
+            <a:avLst/>
+          </a:prstGeom>
+          <a:solidFill>
+            <a:srgbClr val="002855"/>
+          </a:solidFill>
+          <a:ln w="0">
+            <a:noFill/>
+          </a:ln>
+        </p:spPr>
+      </p:sp>
+      <p:sp>
+        <p:nvSpPr>
+          <p:cNvPr id="20" name="WVU DSPIRA gold rule"/>
+          <p:cNvSpPr>
+            <a:spLocks noGrp="1"/>
+          </p:cNvSpPr>
+          <p:nvPr/>
+        </p:nvSpPr>
+        <p:spPr>
+          <a:xfrm>
+            <a:off x="0" y="323850"/>
+            <a:ext cx="12192000" cy="19050"/>
+          </a:xfrm>
+          <a:prstGeom prst="rect">
+            <a:avLst/>
+          </a:prstGeom>
+          <a:solidFill>
+            <a:srgbClr val="EEAA00"/>
+          </a:solidFill>
+          <a:ln w="0">
+            <a:noFill/>
+          </a:ln>
+        </p:spPr>
+      </p:sp>
+      <p:sp>
+        <p:nvSpPr>
+          <p:cNvPr id="21" name="WVU DSPIRA name"/>
+          <p:cNvSpPr>
+            <a:spLocks noGrp="1"/>
+          </p:cNvSpPr>
+          <p:nvPr/>
+        </p:nvSpPr>
+        <p:spPr>
+          <a:xfrm>
+            <a:off x="228600" y="19050"/>
+            <a:ext cx="2857500" cy="257175"/>
+          </a:xfrm>
+          <a:prstGeom prst="rect">
+            <a:avLst/>
+          </a:prstGeom>
+          <a:noFill/>
+          <a:ln w="0">
+            <a:noFill/>
+          </a:ln>
+        </p:spPr>
+        <p:txBody>
+          <a:bodyPr>
+            <a:noAutofit/>
+          </a:bodyPr>
+          <a:lstStyle/>
+          <a:p>
+            <a:pPr>
+              <a:defRPr sz="1600" b="1">
+                <a:solidFill>
+                  <a:srgbClr val="FFFFFF"/>
+                </a:solidFill>
+                <a:latin typeface="Arial"/>
+                <a:ea typeface="Arial"/>
+                <a:cs typeface="Arial"/>
+              </a:defRPr>
+            </a:pPr>
+            <a:r>
+              <a:rPr sz="1600" b="1">
+                <a:solidFill>
+                  <a:srgbClr val="FFFFFF"/>
                 </a:solidFill>
                 <a:latin typeface="Arial"/>
                 <a:ea typeface="Arial"/>
@@ -7545,7 +8196,7 @@
       </p:sp>
       <p:sp>
         <p:nvSpPr>
-          <p:cNvPr id="17" name="DSPIRA 4"/>
+          <p:cNvPr id="22" name="WVU DSPIRA university"/>
           <p:cNvSpPr>
             <a:spLocks noGrp="1"/>
           </p:cNvSpPr>
@@ -7553,8 +8204,8 @@
         </p:nvSpPr>
         <p:spPr>
           <a:xfrm>
-            <a:off x="228600" y="7277100"/>
-            <a:ext cx="6667500" cy="228600"/>
+            <a:off x="9334500" y="114300"/>
+            <a:ext cx="2628900" cy="171450"/>
           </a:xfrm>
           <a:prstGeom prst="rect">
             <a:avLst/>
@@ -7570,10 +8221,10 @@
           </a:bodyPr>
           <a:lstStyle/>
           <a:p>
-            <a:pPr>
-              <a:defRPr sz="900" b="0">
-                <a:solidFill>
-                  <a:srgbClr val="002855"/>
+            <a:pPr algn="r">
+              <a:defRPr sz="900">
+                <a:solidFill>
+                  <a:srgbClr val="FFFFFF"/>
                 </a:solidFill>
                 <a:latin typeface="Arial"/>
                 <a:ea typeface="Arial"/>
@@ -7581,66 +8232,15 @@
               </a:defRPr>
             </a:pPr>
             <a:r>
-              <a:rPr sz="900" b="0">
-                <a:solidFill>
-                  <a:srgbClr val="002855"/>
+              <a:rPr sz="900">
+                <a:solidFill>
+                  <a:srgbClr val="FFFFFF"/>
                 </a:solidFill>
                 <a:latin typeface="Arial"/>
                 <a:ea typeface="Arial"/>
                 <a:cs typeface="Arial"/>
               </a:rPr>
-              <a:t>wvurail.org/dspira</a:t>
-            </a:r>
-          </a:p>
-        </p:txBody>
-      </p:sp>
-      <p:sp>
-        <p:nvSpPr>
-          <p:cNvPr id="18" name="DSPIRA 5"/>
-          <p:cNvSpPr>
-            <a:spLocks noGrp="1"/>
-          </p:cNvSpPr>
-          <p:nvPr/>
-        </p:nvSpPr>
-        <p:spPr>
-          <a:xfrm>
-            <a:off x="11191875" y="7277100"/>
-            <a:ext cx="762000" cy="228600"/>
-          </a:xfrm>
-          <a:prstGeom prst="rect">
-            <a:avLst/>
-          </a:prstGeom>
-          <a:noFill/>
-          <a:ln w="0">
-            <a:noFill/>
-          </a:ln>
-        </p:spPr>
-        <p:txBody>
-          <a:bodyPr>
-            <a:noAutofit/>
-          </a:bodyPr>
-          <a:lstStyle/>
-          <a:p>
-            <a:pPr>
-              <a:defRPr sz="900" b="0">
-                <a:solidFill>
-                  <a:srgbClr val="002855"/>
-                </a:solidFill>
-                <a:latin typeface="Arial"/>
-                <a:ea typeface="Arial"/>
-                <a:cs typeface="Arial"/>
-              </a:defRPr>
-            </a:pPr>
-            <a:r>
-              <a:rPr sz="900" b="0">
-                <a:solidFill>
-                  <a:srgbClr val="002855"/>
-                </a:solidFill>
-                <a:latin typeface="Arial"/>
-                <a:ea typeface="Arial"/>
-                <a:cs typeface="Arial"/>
-              </a:rPr>
-              <a:t>6 of 11</a:t>
+              <a:t>WEST VIRGINIA UNIVERSITY</a:t>
             </a:r>
           </a:p>
         </p:txBody>
@@ -7954,7 +8554,7 @@
       </p:sp>
       <p:sp>
         <p:nvSpPr>
-          <p:cNvPr id="15" name="DSPIRA 1"/>
+          <p:cNvPr id="16" name="DSPIRA 2"/>
           <p:cNvSpPr>
             <a:spLocks noGrp="1"/>
           </p:cNvSpPr>
@@ -7962,7 +8562,7 @@
         </p:nvSpPr>
         <p:spPr>
           <a:xfrm>
-            <a:off x="0" y="0"/>
+            <a:off x="0" y="7200900"/>
             <a:ext cx="12192000" cy="342900"/>
           </a:xfrm>
           <a:prstGeom prst="rect">
@@ -7978,7 +8578,7 @@
       </p:sp>
       <p:sp>
         <p:nvSpPr>
-          <p:cNvPr id="16" name="DSPIRA 2"/>
+          <p:cNvPr id="18" name="DSPIRA 4"/>
           <p:cNvSpPr>
             <a:spLocks noGrp="1"/>
           </p:cNvSpPr>
@@ -7986,32 +8586,8 @@
         </p:nvSpPr>
         <p:spPr>
           <a:xfrm>
-            <a:off x="0" y="7200900"/>
-            <a:ext cx="12192000" cy="342900"/>
-          </a:xfrm>
-          <a:prstGeom prst="rect">
-            <a:avLst/>
-          </a:prstGeom>
-          <a:solidFill>
-            <a:srgbClr val="FFFFFF"/>
-          </a:solidFill>
-          <a:ln w="0">
-            <a:noFill/>
-          </a:ln>
-        </p:spPr>
-      </p:sp>
-      <p:sp>
-        <p:nvSpPr>
-          <p:cNvPr id="17" name="DSPIRA 3"/>
-          <p:cNvSpPr>
-            <a:spLocks noGrp="1"/>
-          </p:cNvSpPr>
-          <p:nvPr/>
-        </p:nvSpPr>
-        <p:spPr>
-          <a:xfrm>
-            <a:off x="228600" y="76200"/>
-            <a:ext cx="4762500" cy="228600"/>
+            <a:off x="228600" y="7277100"/>
+            <a:ext cx="6667500" cy="228600"/>
           </a:xfrm>
           <a:prstGeom prst="rect">
             <a:avLst/>
@@ -8028,7 +8604,7 @@
           <a:lstStyle/>
           <a:p>
             <a:pPr>
-              <a:defRPr sz="1200" b="1">
+              <a:defRPr sz="900" b="0">
                 <a:solidFill>
                   <a:srgbClr val="002855"/>
                 </a:solidFill>
@@ -8038,9 +8614,159 @@
               </a:defRPr>
             </a:pPr>
             <a:r>
-              <a:rPr sz="1200" b="1">
+              <a:rPr sz="900" b="0">
                 <a:solidFill>
                   <a:srgbClr val="002855"/>
+                </a:solidFill>
+                <a:latin typeface="Arial"/>
+                <a:ea typeface="Arial"/>
+                <a:cs typeface="Arial"/>
+              </a:rPr>
+              <a:t>wvurail.org/dspira</a:t>
+            </a:r>
+          </a:p>
+        </p:txBody>
+      </p:sp>
+      <p:sp>
+        <p:nvSpPr>
+          <p:cNvPr id="19" name="DSPIRA 5"/>
+          <p:cNvSpPr>
+            <a:spLocks noGrp="1"/>
+          </p:cNvSpPr>
+          <p:nvPr/>
+        </p:nvSpPr>
+        <p:spPr>
+          <a:xfrm>
+            <a:off x="11191875" y="7277100"/>
+            <a:ext cx="762000" cy="228600"/>
+          </a:xfrm>
+          <a:prstGeom prst="rect">
+            <a:avLst/>
+          </a:prstGeom>
+          <a:noFill/>
+          <a:ln w="0">
+            <a:noFill/>
+          </a:ln>
+        </p:spPr>
+        <p:txBody>
+          <a:bodyPr>
+            <a:noAutofit/>
+          </a:bodyPr>
+          <a:lstStyle/>
+          <a:p>
+            <a:pPr>
+              <a:defRPr sz="900" b="0">
+                <a:solidFill>
+                  <a:srgbClr val="002855"/>
+                </a:solidFill>
+                <a:latin typeface="Arial"/>
+                <a:ea typeface="Arial"/>
+                <a:cs typeface="Arial"/>
+              </a:defRPr>
+            </a:pPr>
+            <a:r>
+              <a:rPr sz="900" b="0">
+                <a:solidFill>
+                  <a:srgbClr val="002855"/>
+                </a:solidFill>
+                <a:latin typeface="Arial"/>
+                <a:ea typeface="Arial"/>
+                <a:cs typeface="Arial"/>
+              </a:rPr>
+              <a:t>7 of 11</a:t>
+            </a:r>
+          </a:p>
+        </p:txBody>
+      </p:sp>
+      <p:sp>
+        <p:nvSpPr>
+          <p:cNvPr id="20" name="WVU DSPIRA navy band"/>
+          <p:cNvSpPr>
+            <a:spLocks noGrp="1"/>
+          </p:cNvSpPr>
+          <p:nvPr/>
+        </p:nvSpPr>
+        <p:spPr>
+          <a:xfrm>
+            <a:off x="0" y="0"/>
+            <a:ext cx="12192000" cy="323850"/>
+          </a:xfrm>
+          <a:prstGeom prst="rect">
+            <a:avLst/>
+          </a:prstGeom>
+          <a:solidFill>
+            <a:srgbClr val="002855"/>
+          </a:solidFill>
+          <a:ln w="0">
+            <a:noFill/>
+          </a:ln>
+        </p:spPr>
+      </p:sp>
+      <p:sp>
+        <p:nvSpPr>
+          <p:cNvPr id="21" name="WVU DSPIRA gold rule"/>
+          <p:cNvSpPr>
+            <a:spLocks noGrp="1"/>
+          </p:cNvSpPr>
+          <p:nvPr/>
+        </p:nvSpPr>
+        <p:spPr>
+          <a:xfrm>
+            <a:off x="0" y="323850"/>
+            <a:ext cx="12192000" cy="19050"/>
+          </a:xfrm>
+          <a:prstGeom prst="rect">
+            <a:avLst/>
+          </a:prstGeom>
+          <a:solidFill>
+            <a:srgbClr val="EEAA00"/>
+          </a:solidFill>
+          <a:ln w="0">
+            <a:noFill/>
+          </a:ln>
+        </p:spPr>
+      </p:sp>
+      <p:sp>
+        <p:nvSpPr>
+          <p:cNvPr id="22" name="WVU DSPIRA name"/>
+          <p:cNvSpPr>
+            <a:spLocks noGrp="1"/>
+          </p:cNvSpPr>
+          <p:nvPr/>
+        </p:nvSpPr>
+        <p:spPr>
+          <a:xfrm>
+            <a:off x="228600" y="19050"/>
+            <a:ext cx="2857500" cy="257175"/>
+          </a:xfrm>
+          <a:prstGeom prst="rect">
+            <a:avLst/>
+          </a:prstGeom>
+          <a:noFill/>
+          <a:ln w="0">
+            <a:noFill/>
+          </a:ln>
+        </p:spPr>
+        <p:txBody>
+          <a:bodyPr>
+            <a:noAutofit/>
+          </a:bodyPr>
+          <a:lstStyle/>
+          <a:p>
+            <a:pPr>
+              <a:defRPr sz="1600" b="1">
+                <a:solidFill>
+                  <a:srgbClr val="FFFFFF"/>
+                </a:solidFill>
+                <a:latin typeface="Arial"/>
+                <a:ea typeface="Arial"/>
+                <a:cs typeface="Arial"/>
+              </a:defRPr>
+            </a:pPr>
+            <a:r>
+              <a:rPr sz="1600" b="1">
+                <a:solidFill>
+                  <a:srgbClr val="FFFFFF"/>
                 </a:solidFill>
                 <a:latin typeface="Arial"/>
                 <a:ea typeface="Arial"/>
@@ -8053,7 +8779,7 @@
       </p:sp>
       <p:sp>
         <p:nvSpPr>
-          <p:cNvPr id="18" name="DSPIRA 4"/>
+          <p:cNvPr id="23" name="WVU DSPIRA university"/>
           <p:cNvSpPr>
             <a:spLocks noGrp="1"/>
           </p:cNvSpPr>
@@ -8061,8 +8787,8 @@
         </p:nvSpPr>
         <p:spPr>
           <a:xfrm>
-            <a:off x="228600" y="7277100"/>
-            <a:ext cx="6667500" cy="228600"/>
+            <a:off x="9334500" y="114300"/>
+            <a:ext cx="2628900" cy="171450"/>
           </a:xfrm>
           <a:prstGeom prst="rect">
             <a:avLst/>
@@ -8078,10 +8804,10 @@
           </a:bodyPr>
           <a:lstStyle/>
           <a:p>
-            <a:pPr>
-              <a:defRPr sz="900" b="0">
-                <a:solidFill>
-                  <a:srgbClr val="002855"/>
+            <a:pPr algn="r">
+              <a:defRPr sz="900">
+                <a:solidFill>
+                  <a:srgbClr val="FFFFFF"/>
                 </a:solidFill>
                 <a:latin typeface="Arial"/>
                 <a:ea typeface="Arial"/>
@@ -8089,66 +8815,15 @@
               </a:defRPr>
             </a:pPr>
             <a:r>
-              <a:rPr sz="900" b="0">
-                <a:solidFill>
-                  <a:srgbClr val="002855"/>
+              <a:rPr sz="900">
+                <a:solidFill>
+                  <a:srgbClr val="FFFFFF"/>
                 </a:solidFill>
                 <a:latin typeface="Arial"/>
                 <a:ea typeface="Arial"/>
                 <a:cs typeface="Arial"/>
               </a:rPr>
-              <a:t>wvurail.org/dspira</a:t>
-            </a:r>
-          </a:p>
-        </p:txBody>
-      </p:sp>
-      <p:sp>
-        <p:nvSpPr>
-          <p:cNvPr id="19" name="DSPIRA 5"/>
-          <p:cNvSpPr>
-            <a:spLocks noGrp="1"/>
-          </p:cNvSpPr>
-          <p:nvPr/>
-        </p:nvSpPr>
-        <p:spPr>
-          <a:xfrm>
-            <a:off x="11191875" y="7277100"/>
-            <a:ext cx="762000" cy="228600"/>
-          </a:xfrm>
-          <a:prstGeom prst="rect">
-            <a:avLst/>
-          </a:prstGeom>
-          <a:noFill/>
-          <a:ln w="0">
-            <a:noFill/>
-          </a:ln>
-        </p:spPr>
-        <p:txBody>
-          <a:bodyPr>
-            <a:noAutofit/>
-          </a:bodyPr>
-          <a:lstStyle/>
-          <a:p>
-            <a:pPr>
-              <a:defRPr sz="900" b="0">
-                <a:solidFill>
-                  <a:srgbClr val="002855"/>
-                </a:solidFill>
-                <a:latin typeface="Arial"/>
-                <a:ea typeface="Arial"/>
-                <a:cs typeface="Arial"/>
-              </a:defRPr>
-            </a:pPr>
-            <a:r>
-              <a:rPr sz="900" b="0">
-                <a:solidFill>
-                  <a:srgbClr val="002855"/>
-                </a:solidFill>
-                <a:latin typeface="Arial"/>
-                <a:ea typeface="Arial"/>
-                <a:cs typeface="Arial"/>
-              </a:rPr>
-              <a:t>7 of 11</a:t>
+              <a:t>WEST VIRGINIA UNIVERSITY</a:t>
             </a:r>
           </a:p>
         </p:txBody>
@@ -8336,7 +9011,7 @@
       </p:sp>
       <p:sp>
         <p:nvSpPr>
-          <p:cNvPr id="10" name="DSPIRA 1"/>
+          <p:cNvPr id="11" name="DSPIRA 2"/>
           <p:cNvSpPr>
             <a:spLocks noGrp="1"/>
           </p:cNvSpPr>
@@ -8344,7 +9019,7 @@
         </p:nvSpPr>
         <p:spPr>
           <a:xfrm>
-            <a:off x="0" y="0"/>
+            <a:off x="0" y="7200900"/>
             <a:ext cx="12192000" cy="342900"/>
           </a:xfrm>
           <a:prstGeom prst="rect">
@@ -8360,7 +9035,7 @@
       </p:sp>
       <p:sp>
         <p:nvSpPr>
-          <p:cNvPr id="11" name="DSPIRA 2"/>
+          <p:cNvPr id="13" name="DSPIRA 4"/>
           <p:cNvSpPr>
             <a:spLocks noGrp="1"/>
           </p:cNvSpPr>
@@ -8368,32 +9043,8 @@
         </p:nvSpPr>
         <p:spPr>
           <a:xfrm>
-            <a:off x="0" y="7200900"/>
-            <a:ext cx="12192000" cy="342900"/>
-          </a:xfrm>
-          <a:prstGeom prst="rect">
-            <a:avLst/>
-          </a:prstGeom>
-          <a:solidFill>
-            <a:srgbClr val="FFFFFF"/>
-          </a:solidFill>
-          <a:ln w="0">
-            <a:noFill/>
-          </a:ln>
-        </p:spPr>
-      </p:sp>
-      <p:sp>
-        <p:nvSpPr>
-          <p:cNvPr id="12" name="DSPIRA 3"/>
-          <p:cNvSpPr>
-            <a:spLocks noGrp="1"/>
-          </p:cNvSpPr>
-          <p:nvPr/>
-        </p:nvSpPr>
-        <p:spPr>
-          <a:xfrm>
-            <a:off x="228600" y="76200"/>
-            <a:ext cx="4762500" cy="228600"/>
+            <a:off x="228600" y="7277100"/>
+            <a:ext cx="6667500" cy="228600"/>
           </a:xfrm>
           <a:prstGeom prst="rect">
             <a:avLst/>
@@ -8410,7 +9061,7 @@
           <a:lstStyle/>
           <a:p>
             <a:pPr>
-              <a:defRPr sz="1200" b="1">
+              <a:defRPr sz="900" b="0">
                 <a:solidFill>
                   <a:srgbClr val="002855"/>
                 </a:solidFill>
@@ -8420,9 +9071,159 @@
               </a:defRPr>
             </a:pPr>
             <a:r>
-              <a:rPr sz="1200" b="1">
+              <a:rPr sz="900" b="0">
                 <a:solidFill>
                   <a:srgbClr val="002855"/>
+                </a:solidFill>
+                <a:latin typeface="Arial"/>
+                <a:ea typeface="Arial"/>
+                <a:cs typeface="Arial"/>
+              </a:rPr>
+              <a:t>wvurail.org/dspira</a:t>
+            </a:r>
+          </a:p>
+        </p:txBody>
+      </p:sp>
+      <p:sp>
+        <p:nvSpPr>
+          <p:cNvPr id="14" name="DSPIRA 5"/>
+          <p:cNvSpPr>
+            <a:spLocks noGrp="1"/>
+          </p:cNvSpPr>
+          <p:nvPr/>
+        </p:nvSpPr>
+        <p:spPr>
+          <a:xfrm>
+            <a:off x="11191875" y="7277100"/>
+            <a:ext cx="762000" cy="228600"/>
+          </a:xfrm>
+          <a:prstGeom prst="rect">
+            <a:avLst/>
+          </a:prstGeom>
+          <a:noFill/>
+          <a:ln w="0">
+            <a:noFill/>
+          </a:ln>
+        </p:spPr>
+        <p:txBody>
+          <a:bodyPr>
+            <a:noAutofit/>
+          </a:bodyPr>
+          <a:lstStyle/>
+          <a:p>
+            <a:pPr>
+              <a:defRPr sz="900" b="0">
+                <a:solidFill>
+                  <a:srgbClr val="002855"/>
+                </a:solidFill>
+                <a:latin typeface="Arial"/>
+                <a:ea typeface="Arial"/>
+                <a:cs typeface="Arial"/>
+              </a:defRPr>
+            </a:pPr>
+            <a:r>
+              <a:rPr sz="900" b="0">
+                <a:solidFill>
+                  <a:srgbClr val="002855"/>
+                </a:solidFill>
+                <a:latin typeface="Arial"/>
+                <a:ea typeface="Arial"/>
+                <a:cs typeface="Arial"/>
+              </a:rPr>
+              <a:t>8 of 11</a:t>
+            </a:r>
+          </a:p>
+        </p:txBody>
+      </p:sp>
+      <p:sp>
+        <p:nvSpPr>
+          <p:cNvPr id="15" name="WVU DSPIRA navy band"/>
+          <p:cNvSpPr>
+            <a:spLocks noGrp="1"/>
+          </p:cNvSpPr>
+          <p:nvPr/>
+        </p:nvSpPr>
+        <p:spPr>
+          <a:xfrm>
+            <a:off x="0" y="0"/>
+            <a:ext cx="12192000" cy="323850"/>
+          </a:xfrm>
+          <a:prstGeom prst="rect">
+            <a:avLst/>
+          </a:prstGeom>
+          <a:solidFill>
+            <a:srgbClr val="002855"/>
+          </a:solidFill>
+          <a:ln w="0">
+            <a:noFill/>
+          </a:ln>
+        </p:spPr>
+      </p:sp>
+      <p:sp>
+        <p:nvSpPr>
+          <p:cNvPr id="16" name="WVU DSPIRA gold rule"/>
+          <p:cNvSpPr>
+            <a:spLocks noGrp="1"/>
+          </p:cNvSpPr>
+          <p:nvPr/>
+        </p:nvSpPr>
+        <p:spPr>
+          <a:xfrm>
+            <a:off x="0" y="323850"/>
+            <a:ext cx="12192000" cy="19050"/>
+          </a:xfrm>
+          <a:prstGeom prst="rect">
+            <a:avLst/>
+          </a:prstGeom>
+          <a:solidFill>
+            <a:srgbClr val="EEAA00"/>
+          </a:solidFill>
+          <a:ln w="0">
+            <a:noFill/>
+          </a:ln>
+        </p:spPr>
+      </p:sp>
+      <p:sp>
+        <p:nvSpPr>
+          <p:cNvPr id="17" name="WVU DSPIRA name"/>
+          <p:cNvSpPr>
+            <a:spLocks noGrp="1"/>
+          </p:cNvSpPr>
+          <p:nvPr/>
+        </p:nvSpPr>
+        <p:spPr>
+          <a:xfrm>
+            <a:off x="228600" y="19050"/>
+            <a:ext cx="2857500" cy="257175"/>
+          </a:xfrm>
+          <a:prstGeom prst="rect">
+            <a:avLst/>
+          </a:prstGeom>
+          <a:noFill/>
+          <a:ln w="0">
+            <a:noFill/>
+          </a:ln>
+        </p:spPr>
+        <p:txBody>
+          <a:bodyPr>
+            <a:noAutofit/>
+          </a:bodyPr>
+          <a:lstStyle/>
+          <a:p>
+            <a:pPr>
+              <a:defRPr sz="1600" b="1">
+                <a:solidFill>
+                  <a:srgbClr val="FFFFFF"/>
+                </a:solidFill>
+                <a:latin typeface="Arial"/>
+                <a:ea typeface="Arial"/>
+                <a:cs typeface="Arial"/>
+              </a:defRPr>
+            </a:pPr>
+            <a:r>
+              <a:rPr sz="1600" b="1">
+                <a:solidFill>
+                  <a:srgbClr val="FFFFFF"/>
                 </a:solidFill>
                 <a:latin typeface="Arial"/>
                 <a:ea typeface="Arial"/>
@@ -8435,7 +9236,7 @@
       </p:sp>
       <p:sp>
         <p:nvSpPr>
-          <p:cNvPr id="13" name="DSPIRA 4"/>
+          <p:cNvPr id="18" name="WVU DSPIRA university"/>
           <p:cNvSpPr>
             <a:spLocks noGrp="1"/>
           </p:cNvSpPr>
@@ -8443,8 +9244,8 @@
         </p:nvSpPr>
         <p:spPr>
           <a:xfrm>
-            <a:off x="228600" y="7277100"/>
-            <a:ext cx="6667500" cy="228600"/>
+            <a:off x="9334500" y="114300"/>
+            <a:ext cx="2628900" cy="171450"/>
           </a:xfrm>
           <a:prstGeom prst="rect">
             <a:avLst/>
@@ -8460,10 +9261,10 @@
           </a:bodyPr>
           <a:lstStyle/>
           <a:p>
-            <a:pPr>
-              <a:defRPr sz="900" b="0">
-                <a:solidFill>
-                  <a:srgbClr val="002855"/>
+            <a:pPr algn="r">
+              <a:defRPr sz="900">
+                <a:solidFill>
+                  <a:srgbClr val="FFFFFF"/>
                 </a:solidFill>
                 <a:latin typeface="Arial"/>
                 <a:ea typeface="Arial"/>
@@ -8471,66 +9272,15 @@
               </a:defRPr>
             </a:pPr>
             <a:r>
-              <a:rPr sz="900" b="0">
-                <a:solidFill>
-                  <a:srgbClr val="002855"/>
+              <a:rPr sz="900">
+                <a:solidFill>
+                  <a:srgbClr val="FFFFFF"/>
                 </a:solidFill>
                 <a:latin typeface="Arial"/>
                 <a:ea typeface="Arial"/>
                 <a:cs typeface="Arial"/>
               </a:rPr>
-              <a:t>wvurail.org/dspira</a:t>
-            </a:r>
-          </a:p>
-        </p:txBody>
-      </p:sp>
-      <p:sp>
-        <p:nvSpPr>
-          <p:cNvPr id="14" name="DSPIRA 5"/>
-          <p:cNvSpPr>
-            <a:spLocks noGrp="1"/>
-          </p:cNvSpPr>
-          <p:nvPr/>
-        </p:nvSpPr>
-        <p:spPr>
-          <a:xfrm>
-            <a:off x="11191875" y="7277100"/>
-            <a:ext cx="762000" cy="228600"/>
-          </a:xfrm>
-          <a:prstGeom prst="rect">
-            <a:avLst/>
-          </a:prstGeom>
-          <a:noFill/>
-          <a:ln w="0">
-            <a:noFill/>
-          </a:ln>
-        </p:spPr>
-        <p:txBody>
-          <a:bodyPr>
-            <a:noAutofit/>
-          </a:bodyPr>
-          <a:lstStyle/>
-          <a:p>
-            <a:pPr>
-              <a:defRPr sz="900" b="0">
-                <a:solidFill>
-                  <a:srgbClr val="002855"/>
-                </a:solidFill>
-                <a:latin typeface="Arial"/>
-                <a:ea typeface="Arial"/>
-                <a:cs typeface="Arial"/>
-              </a:defRPr>
-            </a:pPr>
-            <a:r>
-              <a:rPr sz="900" b="0">
-                <a:solidFill>
-                  <a:srgbClr val="002855"/>
-                </a:solidFill>
-                <a:latin typeface="Arial"/>
-                <a:ea typeface="Arial"/>
-                <a:cs typeface="Arial"/>
-              </a:rPr>
-              <a:t>8 of 11</a:t>
+              <a:t>WEST VIRGINIA UNIVERSITY</a:t>
             </a:r>
           </a:p>
         </p:txBody>
@@ -8777,7 +9527,7 @@
       </p:sp>
       <p:sp>
         <p:nvSpPr>
-          <p:cNvPr id="15" name="DSPIRA 1"/>
+          <p:cNvPr id="16" name="DSPIRA 2"/>
           <p:cNvSpPr>
             <a:spLocks noGrp="1"/>
           </p:cNvSpPr>
@@ -8785,7 +9535,7 @@
         </p:nvSpPr>
         <p:spPr>
           <a:xfrm>
-            <a:off x="0" y="0"/>
+            <a:off x="0" y="7200900"/>
             <a:ext cx="12192000" cy="342900"/>
           </a:xfrm>
           <a:prstGeom prst="rect">
@@ -8801,7 +9551,7 @@
       </p:sp>
       <p:sp>
         <p:nvSpPr>
-          <p:cNvPr id="16" name="DSPIRA 2"/>
+          <p:cNvPr id="18" name="DSPIRA 4"/>
           <p:cNvSpPr>
             <a:spLocks noGrp="1"/>
           </p:cNvSpPr>
@@ -8809,32 +9559,8 @@
         </p:nvSpPr>
         <p:spPr>
           <a:xfrm>
-            <a:off x="0" y="7200900"/>
-            <a:ext cx="12192000" cy="342900"/>
-          </a:xfrm>
-          <a:prstGeom prst="rect">
-            <a:avLst/>
-          </a:prstGeom>
-          <a:solidFill>
-            <a:srgbClr val="FFFFFF"/>
-          </a:solidFill>
-          <a:ln w="0">
-            <a:noFill/>
-          </a:ln>
-        </p:spPr>
-      </p:sp>
-      <p:sp>
-        <p:nvSpPr>
-          <p:cNvPr id="17" name="DSPIRA 3"/>
-          <p:cNvSpPr>
-            <a:spLocks noGrp="1"/>
-          </p:cNvSpPr>
-          <p:nvPr/>
-        </p:nvSpPr>
-        <p:spPr>
-          <a:xfrm>
-            <a:off x="228600" y="76200"/>
-            <a:ext cx="4762500" cy="228600"/>
+            <a:off x="228600" y="7277100"/>
+            <a:ext cx="6667500" cy="228600"/>
           </a:xfrm>
           <a:prstGeom prst="rect">
             <a:avLst/>
@@ -8851,7 +9577,7 @@
           <a:lstStyle/>
           <a:p>
             <a:pPr>
-              <a:defRPr sz="1200" b="1">
+              <a:defRPr sz="900" b="0">
                 <a:solidFill>
                   <a:srgbClr val="002855"/>
                 </a:solidFill>
@@ -8861,9 +9587,159 @@
               </a:defRPr>
             </a:pPr>
             <a:r>
-              <a:rPr sz="1200" b="1">
+              <a:rPr sz="900" b="0">
                 <a:solidFill>
                   <a:srgbClr val="002855"/>
+                </a:solidFill>
+                <a:latin typeface="Arial"/>
+                <a:ea typeface="Arial"/>
+                <a:cs typeface="Arial"/>
+              </a:rPr>
+              <a:t>wvurail.org/dspira</a:t>
+            </a:r>
+          </a:p>
+        </p:txBody>
+      </p:sp>
+      <p:sp>
+        <p:nvSpPr>
+          <p:cNvPr id="19" name="DSPIRA 5"/>
+          <p:cNvSpPr>
+            <a:spLocks noGrp="1"/>
+          </p:cNvSpPr>
+          <p:nvPr/>
+        </p:nvSpPr>
+        <p:spPr>
+          <a:xfrm>
+            <a:off x="11191875" y="7277100"/>
+            <a:ext cx="762000" cy="228600"/>
+          </a:xfrm>
+          <a:prstGeom prst="rect">
+            <a:avLst/>
+          </a:prstGeom>
+          <a:noFill/>
+          <a:ln w="0">
+            <a:noFill/>
+          </a:ln>
+        </p:spPr>
+        <p:txBody>
+          <a:bodyPr>
+            <a:noAutofit/>
+          </a:bodyPr>
+          <a:lstStyle/>
+          <a:p>
+            <a:pPr>
+              <a:defRPr sz="900" b="0">
+                <a:solidFill>
+                  <a:srgbClr val="002855"/>
+                </a:solidFill>
+                <a:latin typeface="Arial"/>
+                <a:ea typeface="Arial"/>
+                <a:cs typeface="Arial"/>
+              </a:defRPr>
+            </a:pPr>
+            <a:r>
+              <a:rPr sz="900" b="0">
+                <a:solidFill>
+                  <a:srgbClr val="002855"/>
+                </a:solidFill>
+                <a:latin typeface="Arial"/>
+                <a:ea typeface="Arial"/>
+                <a:cs typeface="Arial"/>
+              </a:rPr>
+              <a:t>9 of 11</a:t>
+            </a:r>
+          </a:p>
+        </p:txBody>
+      </p:sp>
+      <p:sp>
+        <p:nvSpPr>
+          <p:cNvPr id="20" name="WVU DSPIRA navy band"/>
+          <p:cNvSpPr>
+            <a:spLocks noGrp="1"/>
+          </p:cNvSpPr>
+          <p:nvPr/>
+        </p:nvSpPr>
+        <p:spPr>
+          <a:xfrm>
+            <a:off x="0" y="0"/>
+            <a:ext cx="12192000" cy="323850"/>
+          </a:xfrm>
+          <a:prstGeom prst="rect">
+            <a:avLst/>
+          </a:prstGeom>
+          <a:solidFill>
+            <a:srgbClr val="002855"/>
+          </a:solidFill>
+          <a:ln w="0">
+            <a:noFill/>
+          </a:ln>
+        </p:spPr>
+      </p:sp>
+      <p:sp>
+        <p:nvSpPr>
+          <p:cNvPr id="21" name="WVU DSPIRA gold rule"/>
+          <p:cNvSpPr>
+            <a:spLocks noGrp="1"/>
+          </p:cNvSpPr>
+          <p:nvPr/>
+        </p:nvSpPr>
+        <p:spPr>
+          <a:xfrm>
+            <a:off x="0" y="323850"/>
+            <a:ext cx="12192000" cy="19050"/>
+          </a:xfrm>
+          <a:prstGeom prst="rect">
+            <a:avLst/>
+          </a:prstGeom>
+          <a:solidFill>
+            <a:srgbClr val="EEAA00"/>
+          </a:solidFill>
+          <a:ln w="0">
+            <a:noFill/>
+          </a:ln>
+        </p:spPr>
+      </p:sp>
+      <p:sp>
+        <p:nvSpPr>
+          <p:cNvPr id="22" name="WVU DSPIRA name"/>
+          <p:cNvSpPr>
+            <a:spLocks noGrp="1"/>
+          </p:cNvSpPr>
+          <p:nvPr/>
+        </p:nvSpPr>
+        <p:spPr>
+          <a:xfrm>
+            <a:off x="228600" y="19050"/>
+            <a:ext cx="2857500" cy="257175"/>
+          </a:xfrm>
+          <a:prstGeom prst="rect">
+            <a:avLst/>
+          </a:prstGeom>
+          <a:noFill/>
+          <a:ln w="0">
+            <a:noFill/>
+          </a:ln>
+        </p:spPr>
+        <p:txBody>
+          <a:bodyPr>
+            <a:noAutofit/>
+          </a:bodyPr>
+          <a:lstStyle/>
+          <a:p>
+            <a:pPr>
+              <a:defRPr sz="1600" b="1">
+                <a:solidFill>
+                  <a:srgbClr val="FFFFFF"/>
+                </a:solidFill>
+                <a:latin typeface="Arial"/>
+                <a:ea typeface="Arial"/>
+                <a:cs typeface="Arial"/>
+              </a:defRPr>
+            </a:pPr>
+            <a:r>
+              <a:rPr sz="1600" b="1">
+                <a:solidFill>
+                  <a:srgbClr val="FFFFFF"/>
                 </a:solidFill>
                 <a:latin typeface="Arial"/>
                 <a:ea typeface="Arial"/>
@@ -8876,7 +9752,7 @@
       </p:sp>
       <p:sp>
         <p:nvSpPr>
-          <p:cNvPr id="18" name="DSPIRA 4"/>
+          <p:cNvPr id="23" name="WVU DSPIRA university"/>
           <p:cNvSpPr>
             <a:spLocks noGrp="1"/>
           </p:cNvSpPr>
@@ -8884,8 +9760,8 @@
         </p:nvSpPr>
         <p:spPr>
           <a:xfrm>
-            <a:off x="228600" y="7277100"/>
-            <a:ext cx="6667500" cy="228600"/>
+            <a:off x="9334500" y="114300"/>
+            <a:ext cx="2628900" cy="171450"/>
           </a:xfrm>
           <a:prstGeom prst="rect">
             <a:avLst/>
@@ -8901,10 +9777,10 @@
           </a:bodyPr>
           <a:lstStyle/>
           <a:p>
-            <a:pPr>
-              <a:defRPr sz="900" b="0">
-                <a:solidFill>
-                  <a:srgbClr val="002855"/>
+            <a:pPr algn="r">
+              <a:defRPr sz="900">
+                <a:solidFill>
+                  <a:srgbClr val="FFFFFF"/>
                 </a:solidFill>
                 <a:latin typeface="Arial"/>
                 <a:ea typeface="Arial"/>
@@ -8912,66 +9788,15 @@
               </a:defRPr>
             </a:pPr>
             <a:r>
-              <a:rPr sz="900" b="0">
-                <a:solidFill>
-                  <a:srgbClr val="002855"/>
+              <a:rPr sz="900">
+                <a:solidFill>
+                  <a:srgbClr val="FFFFFF"/>
                 </a:solidFill>
                 <a:latin typeface="Arial"/>
                 <a:ea typeface="Arial"/>
                 <a:cs typeface="Arial"/>
               </a:rPr>
-              <a:t>wvurail.org/dspira</a:t>
-            </a:r>
-          </a:p>
-        </p:txBody>
-      </p:sp>
-      <p:sp>
-        <p:nvSpPr>
-          <p:cNvPr id="19" name="DSPIRA 5"/>
-          <p:cNvSpPr>
-            <a:spLocks noGrp="1"/>
-          </p:cNvSpPr>
-          <p:nvPr/>
-        </p:nvSpPr>
-        <p:spPr>
-          <a:xfrm>
-            <a:off x="11191875" y="7277100"/>
-            <a:ext cx="762000" cy="228600"/>
-          </a:xfrm>
-          <a:prstGeom prst="rect">
-            <a:avLst/>
-          </a:prstGeom>
-          <a:noFill/>
-          <a:ln w="0">
-            <a:noFill/>
-          </a:ln>
-        </p:spPr>
-        <p:txBody>
-          <a:bodyPr>
-            <a:noAutofit/>
-          </a:bodyPr>
-          <a:lstStyle/>
-          <a:p>
-            <a:pPr>
-              <a:defRPr sz="900" b="0">
-                <a:solidFill>
-                  <a:srgbClr val="002855"/>
-                </a:solidFill>
-                <a:latin typeface="Arial"/>
-                <a:ea typeface="Arial"/>
-                <a:cs typeface="Arial"/>
-              </a:defRPr>
-            </a:pPr>
-            <a:r>
-              <a:rPr sz="900" b="0">
-                <a:solidFill>
-                  <a:srgbClr val="002855"/>
-                </a:solidFill>
-                <a:latin typeface="Arial"/>
-                <a:ea typeface="Arial"/>
-                <a:cs typeface="Arial"/>
-              </a:rPr>
-              <a:t>9 of 11</a:t>
+              <a:t>WEST VIRGINIA UNIVERSITY</a:t>
             </a:r>
           </a:p>
         </p:txBody>

--- a/assets/lessons/lectures/digital-signal-processing/filters-2018.pptx
+++ b/assets/lessons/lectures/digital-signal-processing/filters-2018.pptx
@@ -3829,7 +3829,7 @@
                 <a:ea typeface="Arial"/>
                 <a:cs typeface="Arial"/>
               </a:rPr>
-              <a:t>wvurail.org/dspira</a:t>
+              <a:t>rail.wvu.edu/dspira</a:t>
             </a:r>
           </a:p>
         </p:txBody>
